--- a/bachelor_thesis_presentation.pptx
+++ b/bachelor_thesis_presentation.pptx
@@ -2,30 +2,33 @@
 <file path=ppt/presentation.xml><?xml version="1.0" encoding="utf-8"?>
 <p:presentation xmlns:a="http://schemas.openxmlformats.org/drawingml/2006/main" xmlns:r="http://schemas.openxmlformats.org/officeDocument/2006/relationships" xmlns:p="http://schemas.openxmlformats.org/presentationml/2006/main" saveSubsetFonts="1" autoCompressPictures="0">
   <p:sldMasterIdLst>
-    <p:sldMasterId id="2147483648" r:id="rId1"/>
+    <p:sldMasterId id="2147483700" r:id="rId1"/>
   </p:sldMasterIdLst>
+  <p:notesMasterIdLst>
+    <p:notesMasterId r:id="rId15"/>
+  </p:notesMasterIdLst>
   <p:sldIdLst>
-    <p:sldId id="256" r:id="rId7"/>
-    <p:sldId id="257" r:id="rId9"/>
-    <p:sldId id="258" r:id="rId10"/>
-    <p:sldId id="259" r:id="rId11"/>
-    <p:sldId id="260" r:id="rId12"/>
-    <p:sldId id="261" r:id="rId13"/>
-    <p:sldId id="262" r:id="rId14"/>
-    <p:sldId id="263" r:id="rId15"/>
-    <p:sldId id="264" r:id="rId16"/>
-    <p:sldId id="265" r:id="rId17"/>
-    <p:sldId id="266" r:id="rId18"/>
-    <p:sldId id="267" r:id="rId19"/>
-    <p:sldId id="268" r:id="rId20"/>
+    <p:sldId id="256" r:id="rId2"/>
+    <p:sldId id="257" r:id="rId3"/>
+    <p:sldId id="258" r:id="rId4"/>
+    <p:sldId id="259" r:id="rId5"/>
+    <p:sldId id="260" r:id="rId6"/>
+    <p:sldId id="261" r:id="rId7"/>
+    <p:sldId id="262" r:id="rId8"/>
+    <p:sldId id="263" r:id="rId9"/>
+    <p:sldId id="264" r:id="rId10"/>
+    <p:sldId id="265" r:id="rId11"/>
+    <p:sldId id="266" r:id="rId12"/>
+    <p:sldId id="267" r:id="rId13"/>
+    <p:sldId id="268" r:id="rId14"/>
   </p:sldIdLst>
-  <p:sldSz cx="12191695" cy="6858000" type="screen4x3"/>
+  <p:sldSz cx="12192000" cy="6858000"/>
   <p:notesSz cx="6858000" cy="9144000"/>
   <p:defaultTextStyle>
     <a:defPPr>
-      <a:defRPr lang="en-US"/>
+      <a:defRPr lang="en-DE"/>
     </a:defPPr>
-    <a:lvl1pPr marL="0" algn="l" defTabSz="457200" rtl="0" eaLnBrk="1" latinLnBrk="0" hangingPunct="1">
+    <a:lvl1pPr marL="0" algn="l" defTabSz="914400" rtl="0" eaLnBrk="1" latinLnBrk="0" hangingPunct="1">
       <a:defRPr sz="1800" kern="1200">
         <a:solidFill>
           <a:schemeClr val="tx1"/>
@@ -35,7 +38,7 @@
         <a:cs typeface="+mn-cs"/>
       </a:defRPr>
     </a:lvl1pPr>
-    <a:lvl2pPr marL="457200" algn="l" defTabSz="457200" rtl="0" eaLnBrk="1" latinLnBrk="0" hangingPunct="1">
+    <a:lvl2pPr marL="457200" algn="l" defTabSz="914400" rtl="0" eaLnBrk="1" latinLnBrk="0" hangingPunct="1">
       <a:defRPr sz="1800" kern="1200">
         <a:solidFill>
           <a:schemeClr val="tx1"/>
@@ -45,7 +48,7 @@
         <a:cs typeface="+mn-cs"/>
       </a:defRPr>
     </a:lvl2pPr>
-    <a:lvl3pPr marL="914400" algn="l" defTabSz="457200" rtl="0" eaLnBrk="1" latinLnBrk="0" hangingPunct="1">
+    <a:lvl3pPr marL="914400" algn="l" defTabSz="914400" rtl="0" eaLnBrk="1" latinLnBrk="0" hangingPunct="1">
       <a:defRPr sz="1800" kern="1200">
         <a:solidFill>
           <a:schemeClr val="tx1"/>
@@ -55,7 +58,7 @@
         <a:cs typeface="+mn-cs"/>
       </a:defRPr>
     </a:lvl3pPr>
-    <a:lvl4pPr marL="1371600" algn="l" defTabSz="457200" rtl="0" eaLnBrk="1" latinLnBrk="0" hangingPunct="1">
+    <a:lvl4pPr marL="1371600" algn="l" defTabSz="914400" rtl="0" eaLnBrk="1" latinLnBrk="0" hangingPunct="1">
       <a:defRPr sz="1800" kern="1200">
         <a:solidFill>
           <a:schemeClr val="tx1"/>
@@ -65,7 +68,7 @@
         <a:cs typeface="+mn-cs"/>
       </a:defRPr>
     </a:lvl4pPr>
-    <a:lvl5pPr marL="1828800" algn="l" defTabSz="457200" rtl="0" eaLnBrk="1" latinLnBrk="0" hangingPunct="1">
+    <a:lvl5pPr marL="1828800" algn="l" defTabSz="914400" rtl="0" eaLnBrk="1" latinLnBrk="0" hangingPunct="1">
       <a:defRPr sz="1800" kern="1200">
         <a:solidFill>
           <a:schemeClr val="tx1"/>
@@ -75,7 +78,7 @@
         <a:cs typeface="+mn-cs"/>
       </a:defRPr>
     </a:lvl5pPr>
-    <a:lvl6pPr marL="2286000" algn="l" defTabSz="457200" rtl="0" eaLnBrk="1" latinLnBrk="0" hangingPunct="1">
+    <a:lvl6pPr marL="2286000" algn="l" defTabSz="914400" rtl="0" eaLnBrk="1" latinLnBrk="0" hangingPunct="1">
       <a:defRPr sz="1800" kern="1200">
         <a:solidFill>
           <a:schemeClr val="tx1"/>
@@ -85,7 +88,7 @@
         <a:cs typeface="+mn-cs"/>
       </a:defRPr>
     </a:lvl6pPr>
-    <a:lvl7pPr marL="2743200" algn="l" defTabSz="457200" rtl="0" eaLnBrk="1" latinLnBrk="0" hangingPunct="1">
+    <a:lvl7pPr marL="2743200" algn="l" defTabSz="914400" rtl="0" eaLnBrk="1" latinLnBrk="0" hangingPunct="1">
       <a:defRPr sz="1800" kern="1200">
         <a:solidFill>
           <a:schemeClr val="tx1"/>
@@ -95,7 +98,7 @@
         <a:cs typeface="+mn-cs"/>
       </a:defRPr>
     </a:lvl7pPr>
-    <a:lvl8pPr marL="3200400" algn="l" defTabSz="457200" rtl="0" eaLnBrk="1" latinLnBrk="0" hangingPunct="1">
+    <a:lvl8pPr marL="3200400" algn="l" defTabSz="914400" rtl="0" eaLnBrk="1" latinLnBrk="0" hangingPunct="1">
       <a:defRPr sz="1800" kern="1200">
         <a:solidFill>
           <a:schemeClr val="tx1"/>
@@ -105,7 +108,7 @@
         <a:cs typeface="+mn-cs"/>
       </a:defRPr>
     </a:lvl8pPr>
-    <a:lvl9pPr marL="3657600" algn="l" defTabSz="457200" rtl="0" eaLnBrk="1" latinLnBrk="0" hangingPunct="1">
+    <a:lvl9pPr marL="3657600" algn="l" defTabSz="914400" rtl="0" eaLnBrk="1" latinLnBrk="0" hangingPunct="1">
       <a:defRPr sz="1800" kern="1200">
         <a:solidFill>
           <a:schemeClr val="tx1"/>
@@ -116,11 +119,27 @@
       </a:defRPr>
     </a:lvl9pPr>
   </p:defaultTextStyle>
+  <p:extLst>
+    <p:ext uri="{EFAFB233-063F-42B5-8137-9DF3F51BA10A}">
+      <p15:sldGuideLst xmlns:p15="http://schemas.microsoft.com/office/powerpoint/2012/main">
+        <p15:guide id="1" orient="horz" pos="2160">
+          <p15:clr>
+            <a:srgbClr val="A4A3A4"/>
+          </p15:clr>
+        </p15:guide>
+        <p15:guide id="2" pos="2880">
+          <p15:clr>
+            <a:srgbClr val="A4A3A4"/>
+          </p15:clr>
+        </p15:guide>
+      </p15:sldGuideLst>
+    </p:ext>
+  </p:extLst>
 </p:presentation>
 </file>
 
 <file path=ppt/notesMasters/notesMaster1.xml><?xml version="1.0" encoding="utf-8"?>
-<p:notesMaster xmlns:a="http://schemas.openxmlformats.org/drawingml/2006/main" xmlns:p="http://schemas.openxmlformats.org/presentationml/2006/main" xmlns:r="http://schemas.openxmlformats.org/officeDocument/2006/relationships">
+<p:notesMaster xmlns:a="http://schemas.openxmlformats.org/drawingml/2006/main" xmlns:r="http://schemas.openxmlformats.org/officeDocument/2006/relationships" xmlns:p="http://schemas.openxmlformats.org/presentationml/2006/main">
   <p:cSld>
     <p:bg>
       <p:bgRef idx="1001">
@@ -141,241 +160,16 @@
           <a:chExt cx="0" cy="0"/>
         </a:xfrm>
       </p:grpSpPr>
-      <p:sp>
-        <p:nvSpPr>
-          <p:cNvPr id="2" name="Header Placeholder 1"/>
-          <p:cNvSpPr>
-            <a:spLocks noGrp="1"/>
-          </p:cNvSpPr>
-          <p:nvPr>
-            <p:ph type="hdr" sz="quarter"/>
-          </p:nvPr>
-        </p:nvSpPr>
-        <p:spPr>
-          <a:xfrm>
-            <a:off x="0" y="0"/>
-            <a:ext cx="2971800" cy="457200"/>
-          </a:xfrm>
-          <a:prstGeom prst="rect">
-            <a:avLst/>
-          </a:prstGeom>
-        </p:spPr>
-        <p:txBody>
-          <a:bodyPr vert="horz" lIns="91440" tIns="45720" rIns="91440" bIns="45720" rtlCol="0"/>
-          <a:lstStyle>
-            <a:lvl1pPr algn="l">
-              <a:defRPr sz="1200"/>
-            </a:lvl1pPr>
-          </a:lstStyle>
-          <a:p>
-            <a:endParaRPr lang="en-US"/>
-          </a:p>
-        </p:txBody>
-      </p:sp>
-      <p:sp>
-        <p:nvSpPr>
-          <p:cNvPr id="3" name="Date Placeholder 2"/>
-          <p:cNvSpPr>
-            <a:spLocks noGrp="1"/>
-          </p:cNvSpPr>
-          <p:nvPr>
-            <p:ph type="dt" idx="1"/>
-          </p:nvPr>
-        </p:nvSpPr>
-        <p:spPr>
-          <a:xfrm>
-            <a:off x="3884613" y="0"/>
-            <a:ext cx="2971800" cy="457200"/>
-          </a:xfrm>
-          <a:prstGeom prst="rect">
-            <a:avLst/>
-          </a:prstGeom>
-        </p:spPr>
-        <p:txBody>
-          <a:bodyPr vert="horz" lIns="91440" tIns="45720" rIns="91440" bIns="45720" rtlCol="0"/>
-          <a:lstStyle>
-            <a:lvl1pPr algn="r">
-              <a:defRPr sz="1200"/>
-            </a:lvl1pPr>
-          </a:lstStyle>
-          <a:p>
-            <a:fld id="{0F89C1C7-3DCD-1040-A9CF-14679D8B5DDD}" type="datetimeFigureOut">
-              <a:rPr lang="en-US" smtClean="0"/>
-              <a:t>10/17/16</a:t>
-            </a:fld>
-            <a:endParaRPr lang="en-US"/>
-          </a:p>
-        </p:txBody>
-      </p:sp>
-      <p:sp>
-        <p:nvSpPr>
-          <p:cNvPr id="4" name="Slide Image Placeholder 3"/>
-          <p:cNvSpPr>
-            <a:spLocks noGrp="1" noRot="1" noChangeAspect="1"/>
-          </p:cNvSpPr>
-          <p:nvPr>
-            <p:ph type="sldImg" idx="2"/>
-          </p:nvPr>
-        </p:nvSpPr>
-        <p:spPr>
-          <a:xfrm>
-            <a:off x="1143000" y="685800"/>
-            <a:ext cx="4572000" cy="3429000"/>
-          </a:xfrm>
-          <a:prstGeom prst="rect">
-            <a:avLst/>
-          </a:prstGeom>
-          <a:noFill/>
-          <a:ln w="12700">
-            <a:solidFill>
-              <a:prstClr val="black"/>
-            </a:solidFill>
-          </a:ln>
-        </p:spPr>
-        <p:txBody>
-          <a:bodyPr vert="horz" lIns="91440" tIns="45720" rIns="91440" bIns="45720" rtlCol="0" anchor="ctr"/>
-          <a:lstStyle/>
-          <a:p>
-            <a:endParaRPr lang="en-US"/>
-          </a:p>
-        </p:txBody>
-      </p:sp>
-      <p:sp>
-        <p:nvSpPr>
-          <p:cNvPr id="5" name="Notes Placeholder 4"/>
-          <p:cNvSpPr>
-            <a:spLocks noGrp="1"/>
-          </p:cNvSpPr>
-          <p:nvPr>
-            <p:ph type="body" sz="quarter" idx="3"/>
-          </p:nvPr>
-        </p:nvSpPr>
-        <p:spPr>
-          <a:xfrm>
-            <a:off x="685800" y="4343400"/>
-            <a:ext cx="5486400" cy="4114800"/>
-          </a:xfrm>
-          <a:prstGeom prst="rect">
-            <a:avLst/>
-          </a:prstGeom>
-        </p:spPr>
-        <p:txBody>
-          <a:bodyPr vert="horz" lIns="91440" tIns="45720" rIns="91440" bIns="45720" rtlCol="0"/>
-          <a:lstStyle/>
-          <a:p>
-            <a:pPr lvl="0"/>
-            <a:r>
-              <a:rPr lang="en-US" smtClean="0"/>
-              <a:t>Click to edit Master text styles</a:t>
-            </a:r>
-          </a:p>
-          <a:p>
-            <a:pPr lvl="1"/>
-            <a:r>
-              <a:rPr lang="en-US" smtClean="0"/>
-              <a:t>Second level</a:t>
-            </a:r>
-          </a:p>
-          <a:p>
-            <a:pPr lvl="2"/>
-            <a:r>
-              <a:rPr lang="en-US" smtClean="0"/>
-              <a:t>Third level</a:t>
-            </a:r>
-          </a:p>
-          <a:p>
-            <a:pPr lvl="3"/>
-            <a:r>
-              <a:rPr lang="en-US" smtClean="0"/>
-              <a:t>Fourth level</a:t>
-            </a:r>
-          </a:p>
-          <a:p>
-            <a:pPr lvl="4"/>
-            <a:r>
-              <a:rPr lang="en-US" smtClean="0"/>
-              <a:t>Fifth level</a:t>
-            </a:r>
-            <a:endParaRPr lang="en-US"/>
-          </a:p>
-        </p:txBody>
-      </p:sp>
-      <p:sp>
-        <p:nvSpPr>
-          <p:cNvPr id="6" name="Footer Placeholder 5"/>
-          <p:cNvSpPr>
-            <a:spLocks noGrp="1"/>
-          </p:cNvSpPr>
-          <p:nvPr>
-            <p:ph type="ftr" sz="quarter" idx="4"/>
-          </p:nvPr>
-        </p:nvSpPr>
-        <p:spPr>
-          <a:xfrm>
-            <a:off x="0" y="8685213"/>
-            <a:ext cx="2971800" cy="457200"/>
-          </a:xfrm>
-          <a:prstGeom prst="rect">
-            <a:avLst/>
-          </a:prstGeom>
-        </p:spPr>
-        <p:txBody>
-          <a:bodyPr vert="horz" lIns="91440" tIns="45720" rIns="91440" bIns="45720" rtlCol="0" anchor="b"/>
-          <a:lstStyle>
-            <a:lvl1pPr algn="l">
-              <a:defRPr sz="1200"/>
-            </a:lvl1pPr>
-          </a:lstStyle>
-          <a:p>
-            <a:endParaRPr lang="en-US"/>
-          </a:p>
-        </p:txBody>
-      </p:sp>
-      <p:sp>
-        <p:nvSpPr>
-          <p:cNvPr id="7" name="Slide Number Placeholder 6"/>
-          <p:cNvSpPr>
-            <a:spLocks noGrp="1"/>
-          </p:cNvSpPr>
-          <p:nvPr>
-            <p:ph type="sldNum" sz="quarter" idx="5"/>
-          </p:nvPr>
-        </p:nvSpPr>
-        <p:spPr>
-          <a:xfrm>
-            <a:off x="3884613" y="8685213"/>
-            <a:ext cx="2971800" cy="457200"/>
-          </a:xfrm>
-          <a:prstGeom prst="rect">
-            <a:avLst/>
-          </a:prstGeom>
-        </p:spPr>
-        <p:txBody>
-          <a:bodyPr vert="horz" lIns="91440" tIns="45720" rIns="91440" bIns="45720" rtlCol="0" anchor="b"/>
-          <a:lstStyle>
-            <a:lvl1pPr algn="r">
-              <a:defRPr sz="1200"/>
-            </a:lvl1pPr>
-          </a:lstStyle>
-          <a:p>
-            <a:fld id="{BB5E49A5-4136-284D-997B-48E1D791AD67}" type="slidenum">
-              <a:rPr lang="en-US" smtClean="0"/>
-              <a:t>‹#›</a:t>
-            </a:fld>
-            <a:endParaRPr lang="en-US"/>
-          </a:p>
-        </p:txBody>
-      </p:sp>
     </p:spTree>
     <p:extLst>
       <p:ext uri="{BB962C8B-B14F-4D97-AF65-F5344CB8AC3E}">
-        <p14:creationId xmlns:p14="http://schemas.microsoft.com/office/powerpoint/2010/main" val="2623252185"/>
+        <p14:creationId xmlns:p14="http://schemas.microsoft.com/office/powerpoint/2010/main" val="4128980431"/>
       </p:ext>
     </p:extLst>
   </p:cSld>
   <p:clrMap bg1="lt1" tx1="dk1" bg2="lt2" tx2="dk2" accent1="accent1" accent2="accent2" accent3="accent3" accent4="accent4" accent5="accent5" accent6="accent6" hlink="hlink" folHlink="folHlink"/>
   <p:notesStyle>
-    <a:lvl1pPr marL="0" algn="l" defTabSz="457200" rtl="0" eaLnBrk="1" latinLnBrk="0" hangingPunct="1">
+    <a:lvl1pPr marL="0" algn="l" defTabSz="914400" rtl="0" eaLnBrk="1" latinLnBrk="0" hangingPunct="1">
       <a:defRPr sz="1200" kern="1200">
         <a:solidFill>
           <a:schemeClr val="tx1"/>
@@ -385,7 +179,7 @@
         <a:cs typeface="+mn-cs"/>
       </a:defRPr>
     </a:lvl1pPr>
-    <a:lvl2pPr marL="457200" algn="l" defTabSz="457200" rtl="0" eaLnBrk="1" latinLnBrk="0" hangingPunct="1">
+    <a:lvl2pPr marL="457200" algn="l" defTabSz="914400" rtl="0" eaLnBrk="1" latinLnBrk="0" hangingPunct="1">
       <a:defRPr sz="1200" kern="1200">
         <a:solidFill>
           <a:schemeClr val="tx1"/>
@@ -395,7 +189,7 @@
         <a:cs typeface="+mn-cs"/>
       </a:defRPr>
     </a:lvl2pPr>
-    <a:lvl3pPr marL="914400" algn="l" defTabSz="457200" rtl="0" eaLnBrk="1" latinLnBrk="0" hangingPunct="1">
+    <a:lvl3pPr marL="914400" algn="l" defTabSz="914400" rtl="0" eaLnBrk="1" latinLnBrk="0" hangingPunct="1">
       <a:defRPr sz="1200" kern="1200">
         <a:solidFill>
           <a:schemeClr val="tx1"/>
@@ -405,7 +199,7 @@
         <a:cs typeface="+mn-cs"/>
       </a:defRPr>
     </a:lvl3pPr>
-    <a:lvl4pPr marL="1371600" algn="l" defTabSz="457200" rtl="0" eaLnBrk="1" latinLnBrk="0" hangingPunct="1">
+    <a:lvl4pPr marL="1371600" algn="l" defTabSz="914400" rtl="0" eaLnBrk="1" latinLnBrk="0" hangingPunct="1">
       <a:defRPr sz="1200" kern="1200">
         <a:solidFill>
           <a:schemeClr val="tx1"/>
@@ -415,7 +209,7 @@
         <a:cs typeface="+mn-cs"/>
       </a:defRPr>
     </a:lvl4pPr>
-    <a:lvl5pPr marL="1828800" algn="l" defTabSz="457200" rtl="0" eaLnBrk="1" latinLnBrk="0" hangingPunct="1">
+    <a:lvl5pPr marL="1828800" algn="l" defTabSz="914400" rtl="0" eaLnBrk="1" latinLnBrk="0" hangingPunct="1">
       <a:defRPr sz="1200" kern="1200">
         <a:solidFill>
           <a:schemeClr val="tx1"/>
@@ -425,7 +219,7 @@
         <a:cs typeface="+mn-cs"/>
       </a:defRPr>
     </a:lvl5pPr>
-    <a:lvl6pPr marL="2286000" algn="l" defTabSz="457200" rtl="0" eaLnBrk="1" latinLnBrk="0" hangingPunct="1">
+    <a:lvl6pPr marL="2286000" algn="l" defTabSz="914400" rtl="0" eaLnBrk="1" latinLnBrk="0" hangingPunct="1">
       <a:defRPr sz="1200" kern="1200">
         <a:solidFill>
           <a:schemeClr val="tx1"/>
@@ -435,7 +229,7 @@
         <a:cs typeface="+mn-cs"/>
       </a:defRPr>
     </a:lvl6pPr>
-    <a:lvl7pPr marL="2743200" algn="l" defTabSz="457200" rtl="0" eaLnBrk="1" latinLnBrk="0" hangingPunct="1">
+    <a:lvl7pPr marL="2743200" algn="l" defTabSz="914400" rtl="0" eaLnBrk="1" latinLnBrk="0" hangingPunct="1">
       <a:defRPr sz="1200" kern="1200">
         <a:solidFill>
           <a:schemeClr val="tx1"/>
@@ -445,7 +239,7 @@
         <a:cs typeface="+mn-cs"/>
       </a:defRPr>
     </a:lvl7pPr>
-    <a:lvl8pPr marL="3200400" algn="l" defTabSz="457200" rtl="0" eaLnBrk="1" latinLnBrk="0" hangingPunct="1">
+    <a:lvl8pPr marL="3200400" algn="l" defTabSz="914400" rtl="0" eaLnBrk="1" latinLnBrk="0" hangingPunct="1">
       <a:defRPr sz="1200" kern="1200">
         <a:solidFill>
           <a:schemeClr val="tx1"/>
@@ -455,7 +249,7 @@
         <a:cs typeface="+mn-cs"/>
       </a:defRPr>
     </a:lvl8pPr>
-    <a:lvl9pPr marL="3657600" algn="l" defTabSz="457200" rtl="0" eaLnBrk="1" latinLnBrk="0" hangingPunct="1">
+    <a:lvl9pPr marL="3657600" algn="l" defTabSz="914400" rtl="0" eaLnBrk="1" latinLnBrk="0" hangingPunct="1">
       <a:defRPr sz="1200" kern="1200">
         <a:solidFill>
           <a:schemeClr val="tx1"/>
@@ -470,7 +264,7 @@
 </file>
 
 <file path=ppt/notesSlides/notesSlide1.xml><?xml version="1.0" encoding="utf-8"?>
-<p:notes xmlns:a="http://schemas.openxmlformats.org/drawingml/2006/main" xmlns:p="http://schemas.openxmlformats.org/presentationml/2006/main" xmlns:r="http://schemas.openxmlformats.org/officeDocument/2006/relationships">
+<p:notes xmlns:a="http://schemas.openxmlformats.org/drawingml/2006/main" xmlns:r="http://schemas.openxmlformats.org/officeDocument/2006/relationships" xmlns:p="http://schemas.openxmlformats.org/presentationml/2006/main">
   <p:cSld>
     <p:spTree>
       <p:nvGrpSpPr>
@@ -490,7 +284,7 @@
         <p:nvSpPr>
           <p:cNvPr id="2" name="Slide Image Placeholder 1"/>
           <p:cNvSpPr>
-            <a:spLocks noGrp="1"/>
+            <a:spLocks noGrp="1" noRot="1" noChangeAspect="1"/>
           </p:cNvSpPr>
           <p:nvPr>
             <p:ph type="sldImg" idx="2"/>
@@ -505,7 +299,7 @@
             <a:spLocks noGrp="1"/>
           </p:cNvSpPr>
           <p:nvPr>
-            <p:ph type="body" idx="3" sz="quarter"/>
+            <p:ph type="body" sz="quarter" idx="3"/>
           </p:nvPr>
         </p:nvSpPr>
         <p:spPr/>
@@ -526,7 +320,7 @@
             <a:spLocks noGrp="1"/>
           </p:cNvSpPr>
           <p:nvPr>
-            <p:ph type="sldNum" idx="5" sz="quarter"/>
+            <p:ph type="sldNum" sz="quarter" idx="5"/>
           </p:nvPr>
         </p:nvSpPr>
         <p:spPr/>
@@ -540,7 +334,7 @@
 </file>
 
 <file path=ppt/notesSlides/notesSlide10.xml><?xml version="1.0" encoding="utf-8"?>
-<p:notes xmlns:a="http://schemas.openxmlformats.org/drawingml/2006/main" xmlns:p="http://schemas.openxmlformats.org/presentationml/2006/main" xmlns:r="http://schemas.openxmlformats.org/officeDocument/2006/relationships">
+<p:notes xmlns:a="http://schemas.openxmlformats.org/drawingml/2006/main" xmlns:r="http://schemas.openxmlformats.org/officeDocument/2006/relationships" xmlns:p="http://schemas.openxmlformats.org/presentationml/2006/main">
   <p:cSld>
     <p:spTree>
       <p:nvGrpSpPr>
@@ -560,7 +354,7 @@
         <p:nvSpPr>
           <p:cNvPr id="2" name="Slide Image Placeholder 1"/>
           <p:cNvSpPr>
-            <a:spLocks noGrp="1"/>
+            <a:spLocks noGrp="1" noRot="1" noChangeAspect="1"/>
           </p:cNvSpPr>
           <p:nvPr>
             <p:ph type="sldImg" idx="2"/>
@@ -575,7 +369,7 @@
             <a:spLocks noGrp="1"/>
           </p:cNvSpPr>
           <p:nvPr>
-            <p:ph type="body" idx="3" sz="quarter"/>
+            <p:ph type="body" sz="quarter" idx="3"/>
           </p:nvPr>
         </p:nvSpPr>
         <p:spPr/>
@@ -587,19 +381,25 @@
               <a:t>This is the central result of the thesis. The blue contours show the forecasts from FRB auto-correlation alone, while the orange contours show the joint analysis with the six KiDS bins. In all four cases, the blue contours extend far beyond the plotted range. This quantitatively confirms that the FRB auto-correlation cannot meaningfully constrain the host bias.</a:t>
             </a:r>
           </a:p>
-          <a:p/>
+          <a:p>
+            <a:endParaRPr/>
+          </a:p>
           <a:p>
             <a:r>
               <a:t>Adding the cross-correlations reduces the marginalised uncertainties on the two parameters by factors between 17 and 51. The two-dimensional Figure of Merit improves by factors between 61 and 449. This is particularly notable because the joint analysis uses only the small KiDS overlap area, about 3.3 percent of the sky, whereas the FRB auto-correlation assumes 90 percent sky coverage. The additional tracer and redshift information more than compensates for the loss of area.</a:t>
             </a:r>
           </a:p>
-          <a:p/>
+          <a:p>
+            <a:endParaRPr/>
+          </a:p>
           <a:p>
             <a:r>
               <a:t>The deep survey provides tighter constraints in every case, mainly because it contains ten times as many bursts. Once cross-correlation mitigates the shot-noise problem, however, its relative advantage becomes smaller. At that point, the overlap of the redshift distributions and the limited KiDS area become the dominant restrictions.</a:t>
             </a:r>
           </a:p>
-          <a:p/>
+          <a:p>
+            <a:endParaRPr/>
+          </a:p>
           <a:p>
             <a:r>
               <a:t>Despite the considerable improvement, the two fiducial progenitor models still lie within the one-sigma contours. KiDS makes a meaningful bias constraint possible, but it cannot yet reliably distinguish between the magnetar and delayed neutron-star scenarios.</a:t>
@@ -614,7 +414,7 @@
             <a:spLocks noGrp="1"/>
           </p:cNvSpPr>
           <p:nvPr>
-            <p:ph type="sldNum" idx="5" sz="quarter"/>
+            <p:ph type="sldNum" sz="quarter" idx="5"/>
           </p:nvPr>
         </p:nvSpPr>
         <p:spPr/>
@@ -628,7 +428,7 @@
 </file>
 
 <file path=ppt/notesSlides/notesSlide11.xml><?xml version="1.0" encoding="utf-8"?>
-<p:notes xmlns:a="http://schemas.openxmlformats.org/drawingml/2006/main" xmlns:p="http://schemas.openxmlformats.org/presentationml/2006/main" xmlns:r="http://schemas.openxmlformats.org/officeDocument/2006/relationships">
+<p:notes xmlns:a="http://schemas.openxmlformats.org/drawingml/2006/main" xmlns:r="http://schemas.openxmlformats.org/officeDocument/2006/relationships" xmlns:p="http://schemas.openxmlformats.org/presentationml/2006/main">
   <p:cSld>
     <p:spTree>
       <p:nvGrpSpPr>
@@ -648,7 +448,7 @@
         <p:nvSpPr>
           <p:cNvPr id="2" name="Slide Image Placeholder 1"/>
           <p:cNvSpPr>
-            <a:spLocks noGrp="1"/>
+            <a:spLocks noGrp="1" noRot="1" noChangeAspect="1"/>
           </p:cNvSpPr>
           <p:nvPr>
             <p:ph type="sldImg" idx="2"/>
@@ -663,7 +463,7 @@
             <a:spLocks noGrp="1"/>
           </p:cNvSpPr>
           <p:nvPr>
-            <p:ph type="body" idx="3" sz="quarter"/>
+            <p:ph type="body" sz="quarter" idx="3"/>
           </p:nvPr>
         </p:nvSpPr>
         <p:spPr/>
@@ -675,13 +475,17 @@
               <a:t>The most direct next step is to use a larger galaxy survey. LSST will cover approximately 18,000 square degrees, around thirteen times the area of KiDS. It will also provide ten rather than six tomographic bins and a deeper galaxy sample.</a:t>
             </a:r>
           </a:p>
-          <a:p/>
+          <a:p>
+            <a:endParaRPr/>
+          </a:p>
           <a:p>
             <a:r>
               <a:t>I therefore ran the same pipeline with an LSST Year 10 model distribution. In the deep magnetar scenario, the uncertainty on $b_0$ decreases from 1.27 with KiDS to 0.25 with LSST. The Figure of Merit increases from 1.59 to 42.01, a factor of about 26. Most of this improvement follows directly from the larger sky area, with additional information coming from finer tomography and greater depth.</a:t>
             </a:r>
           </a:p>
-          <a:p/>
+          <a:p>
+            <a:endParaRPr/>
+          </a:p>
           <a:p>
             <a:r>
               <a:t>In this forecast, the separation between the two progenitor models lies outside their respective one-sigma contours for the deep survey. Cross-correlating FRBs with an LSST-like data set could therefore genuinely distinguish between a prompt and a delayed progenitor population.</a:t>
@@ -696,7 +500,7 @@
             <a:spLocks noGrp="1"/>
           </p:cNvSpPr>
           <p:nvPr>
-            <p:ph type="sldNum" idx="5" sz="quarter"/>
+            <p:ph type="sldNum" sz="quarter" idx="5"/>
           </p:nvPr>
         </p:nvSpPr>
         <p:spPr/>
@@ -710,7 +514,7 @@
 </file>
 
 <file path=ppt/notesSlides/notesSlide12.xml><?xml version="1.0" encoding="utf-8"?>
-<p:notes xmlns:a="http://schemas.openxmlformats.org/drawingml/2006/main" xmlns:p="http://schemas.openxmlformats.org/presentationml/2006/main" xmlns:r="http://schemas.openxmlformats.org/officeDocument/2006/relationships">
+<p:notes xmlns:a="http://schemas.openxmlformats.org/drawingml/2006/main" xmlns:r="http://schemas.openxmlformats.org/officeDocument/2006/relationships" xmlns:p="http://schemas.openxmlformats.org/presentationml/2006/main">
   <p:cSld>
     <p:spTree>
       <p:nvGrpSpPr>
@@ -730,7 +534,7 @@
         <p:nvSpPr>
           <p:cNvPr id="2" name="Slide Image Placeholder 1"/>
           <p:cNvSpPr>
-            <a:spLocks noGrp="1"/>
+            <a:spLocks noGrp="1" noRot="1" noChangeAspect="1"/>
           </p:cNvSpPr>
           <p:nvPr>
             <p:ph type="sldImg" idx="2"/>
@@ -745,7 +549,7 @@
             <a:spLocks noGrp="1"/>
           </p:cNvSpPr>
           <p:nvPr>
-            <p:ph type="body" idx="3" sz="quarter"/>
+            <p:ph type="body" sz="quarter" idx="3"/>
           </p:nvPr>
         </p:nvSpPr>
         <p:spPr/>
@@ -757,13 +561,17 @@
               <a:t>The forecast relies on several simplifications. First, I use the Limber approximation and therefore start at $\ell=10$. However, the largest angular scales may be particularly sensitive to differences between the radial models.</a:t>
             </a:r>
           </a:p>
-          <a:p/>
+          <a:p>
+            <a:endParaRPr/>
+          </a:p>
           <a:p>
             <a:r>
               <a:t>Second, the Fisher method assumes a Gaussian likelihood and Gaussian covariance. Non-linear structure formation and potentially non-Gaussian posterior shapes are not fully captured, so the reported uncertainties should be regarded as optimistic lower bounds.</a:t>
             </a:r>
           </a:p>
-          <a:p/>
+          <a:p>
+            <a:endParaRPr/>
+          </a:p>
           <a:p>
             <a:r>
               <a:t>Third, the FRB redshift distribution and the fiducial bias parameters are model assumptions rather than direct measurements. Survey geometry is also represented only through the factor $f_\mathrm{sky}$; a real analysis would require a mask or pseudo-$C_\ell$ treatment. Finally, a small cross-shot-noise term may arise if FRB host galaxies are themselves included in the KiDS catalogue. This contribution was neglected because the source densities differ so strongly.</a:t>
@@ -778,7 +586,7 @@
             <a:spLocks noGrp="1"/>
           </p:cNvSpPr>
           <p:nvPr>
-            <p:ph type="sldNum" idx="5" sz="quarter"/>
+            <p:ph type="sldNum" sz="quarter" idx="5"/>
           </p:nvPr>
         </p:nvSpPr>
         <p:spPr/>
@@ -792,7 +600,7 @@
 </file>
 
 <file path=ppt/notesSlides/notesSlide13.xml><?xml version="1.0" encoding="utf-8"?>
-<p:notes xmlns:a="http://schemas.openxmlformats.org/drawingml/2006/main" xmlns:p="http://schemas.openxmlformats.org/presentationml/2006/main" xmlns:r="http://schemas.openxmlformats.org/officeDocument/2006/relationships">
+<p:notes xmlns:a="http://schemas.openxmlformats.org/drawingml/2006/main" xmlns:r="http://schemas.openxmlformats.org/officeDocument/2006/relationships" xmlns:p="http://schemas.openxmlformats.org/presentationml/2006/main">
   <p:cSld>
     <p:spTree>
       <p:nvGrpSpPr>
@@ -812,7 +620,7 @@
         <p:nvSpPr>
           <p:cNvPr id="2" name="Slide Image Placeholder 1"/>
           <p:cNvSpPr>
-            <a:spLocks noGrp="1"/>
+            <a:spLocks noGrp="1" noRot="1" noChangeAspect="1"/>
           </p:cNvSpPr>
           <p:nvPr>
             <p:ph type="sldImg" idx="2"/>
@@ -827,7 +635,7 @@
             <a:spLocks noGrp="1"/>
           </p:cNvSpPr>
           <p:nvPr>
-            <p:ph type="body" idx="3" sz="quarter"/>
+            <p:ph type="body" sz="quarter" idx="3"/>
           </p:nvPr>
         </p:nvSpPr>
         <p:spPr/>
@@ -839,7 +647,9 @@
               <a:t>To conclude, my thesis demonstrates three main points. First, the auto-correlation of current or near-future FRB samples is strongly limited by shot noise. Second, cross-correlation with a dense and tomographically divided galaxy sample recovers a substantial amount of the clustering information. With KiDS, the Figure of Merit improves by factors between 61 and 449, although the limited survey area is not yet sufficient to distinguish the two assumed progenitor models.</a:t>
             </a:r>
           </a:p>
-          <a:p/>
+          <a:p>
+            <a:endParaRPr/>
+          </a:p>
           <a:p>
             <a:r>
               <a:t>Third, the LSST forecast shows that the next generation of wide-area surveys can reach the required precision. The main take-home message is therefore that we do not need to localise every Fast Radio Burst individually to learn about its typical environment and origin. Its statistical connection to the large-scale galaxy distribution already provides an independent and promising route. Thank you for your attention.</a:t>
@@ -854,7 +664,7 @@
             <a:spLocks noGrp="1"/>
           </p:cNvSpPr>
           <p:nvPr>
-            <p:ph type="sldNum" idx="5" sz="quarter"/>
+            <p:ph type="sldNum" sz="quarter" idx="5"/>
           </p:nvPr>
         </p:nvSpPr>
         <p:spPr/>
@@ -868,7 +678,7 @@
 </file>
 
 <file path=ppt/notesSlides/notesSlide2.xml><?xml version="1.0" encoding="utf-8"?>
-<p:notes xmlns:a="http://schemas.openxmlformats.org/drawingml/2006/main" xmlns:p="http://schemas.openxmlformats.org/presentationml/2006/main" xmlns:r="http://schemas.openxmlformats.org/officeDocument/2006/relationships">
+<p:notes xmlns:a="http://schemas.openxmlformats.org/drawingml/2006/main" xmlns:r="http://schemas.openxmlformats.org/officeDocument/2006/relationships" xmlns:p="http://schemas.openxmlformats.org/presentationml/2006/main">
   <p:cSld>
     <p:spTree>
       <p:nvGrpSpPr>
@@ -888,7 +698,7 @@
         <p:nvSpPr>
           <p:cNvPr id="2" name="Slide Image Placeholder 1"/>
           <p:cNvSpPr>
-            <a:spLocks noGrp="1"/>
+            <a:spLocks noGrp="1" noRot="1" noChangeAspect="1"/>
           </p:cNvSpPr>
           <p:nvPr>
             <p:ph type="sldImg" idx="2"/>
@@ -903,7 +713,7 @@
             <a:spLocks noGrp="1"/>
           </p:cNvSpPr>
           <p:nvPr>
-            <p:ph type="body" idx="3" sz="quarter"/>
+            <p:ph type="body" sz="quarter" idx="3"/>
           </p:nvPr>
         </p:nvSpPr>
         <p:spPr/>
@@ -915,7 +725,9 @@
               <a:t>Fast Radio Bursts last only milliseconds or less, but release an enormous amount of energy during that short interval. One important observable is dispersion: lower radio frequencies arrive later than higher frequencies because the signal travels through ionised matter. For many FRBs, the resulting dispersion measure is much larger than the contribution expected from the Milky Way alone. This shows that most sources are extragalactic and are often located at cosmological distances.</a:t>
             </a:r>
           </a:p>
-          <a:p/>
+          <a:p>
+            <a:endParaRPr/>
+          </a:p>
           <a:p>
             <a:r>
               <a:t>CHIME has dramatically increased the number of observations. The latest catalogue considered in this thesis contains 4,539 bursts from 3,641 distinct sources. Nevertheless, their emission mechanisms and progenitors remain uncertain. Precisely localising individual bursts and assigning them to host galaxies is difficult. A statistical approach therefore offers an alternative: even without an individual redshift for every FRB, the population as a whole can be compared with the known large-scale distribution of galaxies.</a:t>
@@ -930,7 +742,7 @@
             <a:spLocks noGrp="1"/>
           </p:cNvSpPr>
           <p:nvPr>
-            <p:ph type="sldNum" idx="5" sz="quarter"/>
+            <p:ph type="sldNum" sz="quarter" idx="5"/>
           </p:nvPr>
         </p:nvSpPr>
         <p:spPr/>
@@ -944,7 +756,7 @@
 </file>
 
 <file path=ppt/notesSlides/notesSlide3.xml><?xml version="1.0" encoding="utf-8"?>
-<p:notes xmlns:a="http://schemas.openxmlformats.org/drawingml/2006/main" xmlns:p="http://schemas.openxmlformats.org/presentationml/2006/main" xmlns:r="http://schemas.openxmlformats.org/officeDocument/2006/relationships">
+<p:notes xmlns:a="http://schemas.openxmlformats.org/drawingml/2006/main" xmlns:r="http://schemas.openxmlformats.org/officeDocument/2006/relationships" xmlns:p="http://schemas.openxmlformats.org/presentationml/2006/main">
   <p:cSld>
     <p:spTree>
       <p:nvGrpSpPr>
@@ -964,7 +776,7 @@
         <p:nvSpPr>
           <p:cNvPr id="2" name="Slide Image Placeholder 1"/>
           <p:cNvSpPr>
-            <a:spLocks noGrp="1"/>
+            <a:spLocks noGrp="1" noRot="1" noChangeAspect="1"/>
           </p:cNvSpPr>
           <p:nvPr>
             <p:ph type="sldImg" idx="2"/>
@@ -979,7 +791,7 @@
             <a:spLocks noGrp="1"/>
           </p:cNvSpPr>
           <p:nvPr>
-            <p:ph type="body" idx="3" sz="quarter"/>
+            <p:ph type="body" sz="quarter" idx="3"/>
           </p:nvPr>
         </p:nvSpPr>
         <p:spPr/>
@@ -991,13 +803,17 @@
               <a:t>In this thesis, I compare two simplified classes of possible progenitors. The first model describes young magnetars. They are primarily formed through the collapse of massive stars and should therefore follow the cosmic star-formation rate with little delay. This interpretation is also supported by the detection of an FRB-like burst from the Galactic magnetar SGR 1935+2154.</a:t>
             </a:r>
           </a:p>
-          <a:p/>
+          <a:p>
+            <a:endParaRPr/>
+          </a:p>
           <a:p>
             <a:r>
               <a:t>The second model represents delayed neutron-star channels, such as compact-object mergers or accretion-induced collapse. These events may occur billions of years after the original star formation and can therefore also be found in older galaxy populations.</a:t>
             </a:r>
           </a:p>
-          <a:p/>
+          <a:p>
+            <a:endParaRPr/>
+          </a:p>
           <a:p>
             <a:r>
               <a:t>Their different evolution is represented by a linear tracer bias, $b(z)=b_0(1+z)^\delta$. Here, $b_0$ sets the present-day amplitude, while $\delta$ determines how strongly the bias grows with redshift. The two models consequently leave different signatures in their spatial distributions. The goal of the cross-correlation analysis is to constrain these two bias parameters.</a:t>
@@ -1012,7 +828,7 @@
             <a:spLocks noGrp="1"/>
           </p:cNvSpPr>
           <p:nvPr>
-            <p:ph type="sldNum" idx="5" sz="quarter"/>
+            <p:ph type="sldNum" sz="quarter" idx="5"/>
           </p:nvPr>
         </p:nvSpPr>
         <p:spPr/>
@@ -1026,7 +842,7 @@
 </file>
 
 <file path=ppt/notesSlides/notesSlide4.xml><?xml version="1.0" encoding="utf-8"?>
-<p:notes xmlns:a="http://schemas.openxmlformats.org/drawingml/2006/main" xmlns:p="http://schemas.openxmlformats.org/presentationml/2006/main" xmlns:r="http://schemas.openxmlformats.org/officeDocument/2006/relationships">
+<p:notes xmlns:a="http://schemas.openxmlformats.org/drawingml/2006/main" xmlns:r="http://schemas.openxmlformats.org/officeDocument/2006/relationships" xmlns:p="http://schemas.openxmlformats.org/presentationml/2006/main">
   <p:cSld>
     <p:spTree>
       <p:nvGrpSpPr>
@@ -1046,7 +862,7 @@
         <p:nvSpPr>
           <p:cNvPr id="2" name="Slide Image Placeholder 1"/>
           <p:cNvSpPr>
-            <a:spLocks noGrp="1"/>
+            <a:spLocks noGrp="1" noRot="1" noChangeAspect="1"/>
           </p:cNvSpPr>
           <p:nvPr>
             <p:ph type="sldImg" idx="2"/>
@@ -1061,7 +877,7 @@
             <a:spLocks noGrp="1"/>
           </p:cNvSpPr>
           <p:nvPr>
-            <p:ph type="body" idx="3" sz="quarter"/>
+            <p:ph type="body" sz="quarter" idx="3"/>
           </p:nvPr>
         </p:nvSpPr>
         <p:spPr/>
@@ -1070,19 +886,30 @@
           <a:lstStyle/>
           <a:p>
             <a:r>
+              <a:rPr dirty="0"/>
               <a:t>The basic idea is that both galaxies and FRB host objects trace the same underlying matter distribution. If a region of the sky contains more galaxies than average and we also observe more FRBs there, this produces a positive cross-correlation signal.</a:t>
             </a:r>
           </a:p>
-          <a:p/>
-          <a:p>
-            <a:r>
+          <a:p>
+            <a:endParaRPr dirty="0"/>
+          </a:p>
+          <a:p>
+            <a:r>
+              <a:rPr dirty="0"/>
               <a:t>This signal is quantified by the angular power spectrum, $C_\ell$. Small multipoles correspond to large angular structures, while large multipoles probe small angular scales. The overlap along the line of sight is crucial: a low-redshift galaxy population only correlates with the fraction of FRBs located in the same redshift range.</a:t>
             </a:r>
           </a:p>
-          <a:p/>
-          <a:p>
-            <a:r>
-              <a:t>KiDS divides its galaxies into six tomographic redshift bins. This means that FRB clustering is measured through six different radial weighting functions instead of one integrated projection. The resulting redshift information should help separate the overall bias amplitude, $b_0$, from its redshift evolution, $\delta$.</a:t>
+          <a:p>
+            <a:endParaRPr dirty="0"/>
+          </a:p>
+          <a:p>
+            <a:r>
+              <a:rPr dirty="0" err="1"/>
+              <a:t>KiDS</a:t>
+            </a:r>
+            <a:r>
+              <a:rPr dirty="0"/>
+              <a:t> divides its galaxies into six tomographic redshift bins. This means that FRB clustering is measured through six different radial weighting functions instead of one integrated projection. The resulting redshift information should help separate the overall bias amplitude, $b_0$, from its redshift evolution, $\delta$.</a:t>
             </a:r>
           </a:p>
         </p:txBody>
@@ -1094,7 +921,7 @@
             <a:spLocks noGrp="1"/>
           </p:cNvSpPr>
           <p:nvPr>
-            <p:ph type="sldNum" idx="5" sz="quarter"/>
+            <p:ph type="sldNum" sz="quarter" idx="5"/>
           </p:nvPr>
         </p:nvSpPr>
         <p:spPr/>
@@ -1108,7 +935,7 @@
 </file>
 
 <file path=ppt/notesSlides/notesSlide5.xml><?xml version="1.0" encoding="utf-8"?>
-<p:notes xmlns:a="http://schemas.openxmlformats.org/drawingml/2006/main" xmlns:p="http://schemas.openxmlformats.org/presentationml/2006/main" xmlns:r="http://schemas.openxmlformats.org/officeDocument/2006/relationships">
+<p:notes xmlns:a="http://schemas.openxmlformats.org/drawingml/2006/main" xmlns:r="http://schemas.openxmlformats.org/officeDocument/2006/relationships" xmlns:p="http://schemas.openxmlformats.org/presentationml/2006/main">
   <p:cSld>
     <p:spTree>
       <p:nvGrpSpPr>
@@ -1128,7 +955,7 @@
         <p:nvSpPr>
           <p:cNvPr id="2" name="Slide Image Placeholder 1"/>
           <p:cNvSpPr>
-            <a:spLocks noGrp="1"/>
+            <a:spLocks noGrp="1" noRot="1" noChangeAspect="1"/>
           </p:cNvSpPr>
           <p:nvPr>
             <p:ph type="sldImg" idx="2"/>
@@ -1143,7 +970,7 @@
             <a:spLocks noGrp="1"/>
           </p:cNvSpPr>
           <p:nvPr>
-            <p:ph type="body" idx="3" sz="quarter"/>
+            <p:ph type="body" sz="quarter" idx="3"/>
           </p:nvPr>
         </p:nvSpPr>
         <p:spPr/>
@@ -1152,13 +979,49 @@
           <a:lstStyle/>
           <a:p>
             <a:r>
-              <a:t>Because individual redshifts are not assumed to be available for the FRB population, I model its normalised distribution as $n(z)\propto z^2\exp(-\alpha z)$. I consider two scenarios. The shallow survey contains 5,000 bursts and is more strongly concentrated at low redshift. The deep survey contains 50,000 bursts and has a substantially longer high-redshift tail. Both are assumed to cover 90 percent of the sky.</a:t>
-            </a:r>
-          </a:p>
-          <a:p/>
-          <a:p>
-            <a:r>
-              <a:t>For the galaxy sample, I use the published redshift distributions from KiDS DR5. The survey covers 1,347 square degrees and is divided into six tomographic bins. These plots already indicate which combinations should provide the strongest signal. The lower KiDS bins overlap considerably with both FRB scenarios, whereas the higher bins benefit mainly from the deep survey. Alongside the number of objects, this radial overlap is the key factor determining the eventual parameter constraints.</a:t>
+              <a:rPr dirty="0"/>
+              <a:t>Because individual redshifts are not assumed to be available for the FRB population, I model its </a:t>
+            </a:r>
+            <a:r>
+              <a:rPr dirty="0" err="1"/>
+              <a:t>normalised</a:t>
+            </a:r>
+            <a:r>
+              <a:rPr dirty="0"/>
+              <a:t> distribution as $n(z)\</a:t>
+            </a:r>
+            <a:r>
+              <a:rPr dirty="0" err="1"/>
+              <a:t>propto</a:t>
+            </a:r>
+            <a:r>
+              <a:rPr dirty="0"/>
+              <a:t> z^2\exp(-\alpha z)$. I consider two scenarios. The shallow survey contains 5,000 bursts and is more strongly concentrated at low redshift. The deep survey contains 50,000 bursts and has a substantially longer high-redshift tail. Both are assumed to cover 90 percent of the sky.</a:t>
+            </a:r>
+          </a:p>
+          <a:p>
+            <a:endParaRPr dirty="0"/>
+          </a:p>
+          <a:p>
+            <a:r>
+              <a:rPr dirty="0"/>
+              <a:t>For the galaxy sample, I use the published redshift distributions from </a:t>
+            </a:r>
+            <a:r>
+              <a:rPr dirty="0" err="1"/>
+              <a:t>KiDS</a:t>
+            </a:r>
+            <a:r>
+              <a:rPr dirty="0"/>
+              <a:t> DR5. The survey covers 1,347 square degrees and is divided into six tomographic bins. These plots already indicate which combinations should provide the strongest signal. The lower </a:t>
+            </a:r>
+            <a:r>
+              <a:rPr dirty="0" err="1"/>
+              <a:t>KiDS</a:t>
+            </a:r>
+            <a:r>
+              <a:rPr dirty="0"/>
+              <a:t> bins overlap considerably with both FRB scenarios, whereas the higher bins benefit mainly from the deep survey. Alongside the number of objects, this radial overlap is the key factor determining the eventual parameter constraints.</a:t>
             </a:r>
           </a:p>
         </p:txBody>
@@ -1170,7 +1033,7 @@
             <a:spLocks noGrp="1"/>
           </p:cNvSpPr>
           <p:nvPr>
-            <p:ph type="sldNum" idx="5" sz="quarter"/>
+            <p:ph type="sldNum" sz="quarter" idx="5"/>
           </p:nvPr>
         </p:nvSpPr>
         <p:spPr/>
@@ -1184,7 +1047,7 @@
 </file>
 
 <file path=ppt/notesSlides/notesSlide6.xml><?xml version="1.0" encoding="utf-8"?>
-<p:notes xmlns:a="http://schemas.openxmlformats.org/drawingml/2006/main" xmlns:p="http://schemas.openxmlformats.org/presentationml/2006/main" xmlns:r="http://schemas.openxmlformats.org/officeDocument/2006/relationships">
+<p:notes xmlns:a="http://schemas.openxmlformats.org/drawingml/2006/main" xmlns:r="http://schemas.openxmlformats.org/officeDocument/2006/relationships" xmlns:p="http://schemas.openxmlformats.org/presentationml/2006/main">
   <p:cSld>
     <p:spTree>
       <p:nvGrpSpPr>
@@ -1204,7 +1067,7 @@
         <p:nvSpPr>
           <p:cNvPr id="2" name="Slide Image Placeholder 1"/>
           <p:cNvSpPr>
-            <a:spLocks noGrp="1"/>
+            <a:spLocks noGrp="1" noRot="1" noChangeAspect="1"/>
           </p:cNvSpPr>
           <p:nvPr>
             <p:ph type="sldImg" idx="2"/>
@@ -1219,7 +1082,7 @@
             <a:spLocks noGrp="1"/>
           </p:cNvSpPr>
           <p:nvPr>
-            <p:ph type="body" idx="3" sz="quarter"/>
+            <p:ph type="body" sz="quarter" idx="3"/>
           </p:nvPr>
         </p:nvSpPr>
         <p:spPr/>
@@ -1228,19 +1091,66 @@
           <a:lstStyle/>
           <a:p>
             <a:r>
-              <a:t>The calculation starts with a flat $\Lambda$CDM cosmology using the Planck 2018 parameters. I calculate the non-linear three-dimensional matter power spectrum, $P(k,z)$, with the Python package `hmf`. All quantities are evaluated on a common redshift grid from 0.01 to 5.</a:t>
-            </a:r>
-          </a:p>
-          <a:p/>
-          <a:p>
-            <a:r>
-              <a:t>For each population, I then construct a radial kernel. It is essentially the product of the normalised redshift distribution and the bias. The angular power spectrum is obtained through the Limber projection shown here, which combines both radial kernels with the matter power spectrum. I calculate multipoles from $\ell=10$ to 1,000 because the Limber approximation is unreliable on the very largest angular scales.</a:t>
-            </a:r>
-          </a:p>
-          <a:p/>
-          <a:p>
-            <a:r>
-              <a:t>The pipeline produces auto-spectra for the FRBs and for each KiDS bin, as well as all FRB-galaxy cross-spectra. With two progenitor models, two FRB surveys, and six galaxy bins, this gives 24 cross-spectra. In the final step, these spectra and their noise contributions enter the Fisher forecast.</a:t>
+              <a:rPr dirty="0"/>
+              <a:t>The calculation starts with a flat $\</a:t>
+            </a:r>
+            <a:r>
+              <a:rPr dirty="0" err="1"/>
+              <a:t>Lambda$CDM</a:t>
+            </a:r>
+            <a:r>
+              <a:rPr dirty="0"/>
+              <a:t> cosmology using the Planck 2018 parameters. I calculate the non-linear three-dimensional matter power spectrum, $P(</a:t>
+            </a:r>
+            <a:r>
+              <a:rPr dirty="0" err="1"/>
+              <a:t>k,z</a:t>
+            </a:r>
+            <a:r>
+              <a:rPr dirty="0"/>
+              <a:t>)$, with the Python package `</a:t>
+            </a:r>
+            <a:r>
+              <a:rPr dirty="0" err="1"/>
+              <a:t>hmf</a:t>
+            </a:r>
+            <a:r>
+              <a:rPr dirty="0"/>
+              <a:t>`. All quantities are evaluated on a common redshift grid from 0.01 to 5.</a:t>
+            </a:r>
+          </a:p>
+          <a:p>
+            <a:endParaRPr dirty="0"/>
+          </a:p>
+          <a:p>
+            <a:r>
+              <a:rPr dirty="0"/>
+              <a:t>For each population, I then construct a radial kernel. It is essentially the product of the </a:t>
+            </a:r>
+            <a:r>
+              <a:rPr dirty="0" err="1"/>
+              <a:t>normalised</a:t>
+            </a:r>
+            <a:r>
+              <a:rPr dirty="0"/>
+              <a:t> redshift distribution and the bias. The angular power spectrum is obtained through the Limber projection shown here, which combines both radial kernels with the matter power spectrum. I calculate multipoles from $\ell=10$ to 1,000 because the Limber approximation is unreliable on the very largest angular scales.</a:t>
+            </a:r>
+          </a:p>
+          <a:p>
+            <a:endParaRPr dirty="0"/>
+          </a:p>
+          <a:p>
+            <a:r>
+              <a:rPr dirty="0"/>
+              <a:t>The pipeline produces auto-spectra for the FRBs and for each </a:t>
+            </a:r>
+            <a:r>
+              <a:rPr dirty="0" err="1"/>
+              <a:t>KiDS</a:t>
+            </a:r>
+            <a:r>
+              <a:rPr dirty="0"/>
+              <a:t> bin, as well as all FRB-galaxy cross-spectra. With two progenitor models, two FRB surveys, and six galaxy bins, this gives 24 cross-spectra. In the final step, these spectra and their noise contributions enter the Fisher forecast.</a:t>
             </a:r>
           </a:p>
         </p:txBody>
@@ -1252,7 +1162,7 @@
             <a:spLocks noGrp="1"/>
           </p:cNvSpPr>
           <p:nvPr>
-            <p:ph type="sldNum" idx="5" sz="quarter"/>
+            <p:ph type="sldNum" sz="quarter" idx="5"/>
           </p:nvPr>
         </p:nvSpPr>
         <p:spPr/>
@@ -1266,7 +1176,7 @@
 </file>
 
 <file path=ppt/notesSlides/notesSlide7.xml><?xml version="1.0" encoding="utf-8"?>
-<p:notes xmlns:a="http://schemas.openxmlformats.org/drawingml/2006/main" xmlns:p="http://schemas.openxmlformats.org/presentationml/2006/main" xmlns:r="http://schemas.openxmlformats.org/officeDocument/2006/relationships">
+<p:notes xmlns:a="http://schemas.openxmlformats.org/drawingml/2006/main" xmlns:r="http://schemas.openxmlformats.org/officeDocument/2006/relationships" xmlns:p="http://schemas.openxmlformats.org/presentationml/2006/main">
   <p:cSld>
     <p:spTree>
       <p:nvGrpSpPr>
@@ -1286,7 +1196,7 @@
         <p:nvSpPr>
           <p:cNvPr id="2" name="Slide Image Placeholder 1"/>
           <p:cNvSpPr>
-            <a:spLocks noGrp="1"/>
+            <a:spLocks noGrp="1" noRot="1" noChangeAspect="1"/>
           </p:cNvSpPr>
           <p:nvPr>
             <p:ph type="sldImg" idx="2"/>
@@ -1301,7 +1211,7 @@
             <a:spLocks noGrp="1"/>
           </p:cNvSpPr>
           <p:nvPr>
-            <p:ph type="body" idx="3" sz="quarter"/>
+            <p:ph type="body" sz="quarter" idx="3"/>
           </p:nvPr>
         </p:nvSpPr>
         <p:spPr/>
@@ -1310,19 +1220,34 @@
           <a:lstStyle/>
           <a:p>
             <a:r>
+              <a:rPr dirty="0"/>
               <a:t>Before considering the cross-correlation, the FRB auto-correlation reveals the central problem. FRBs are discrete and rare compared with galaxies. The measured auto-spectrum therefore contains a constant Poisson contribution of $1/\bar n$.</a:t>
             </a:r>
           </a:p>
-          <a:p/>
-          <a:p>
-            <a:r>
+          <a:p>
+            <a:endParaRPr dirty="0"/>
+          </a:p>
+          <a:p>
+            <a:r>
+              <a:rPr dirty="0"/>
               <a:t>For the shallow survey with 5,000 bursts, this shot noise lies roughly three orders of magnitude above the clustering signal throughout the multipole range considered. In principle, the auto-spectrum contains information about the host bias, but in practice that information is overwhelmed by noise.</a:t>
             </a:r>
           </a:p>
-          <a:p/>
-          <a:p>
-            <a:r>
-              <a:t>The deep survey reduces shot noise through its ten times larger source count. Its projected clustering signal is also slightly smaller because of the broader redshift distribution. The essential point remains that more FRBs help, but the auto-correlation still relies on a sparse sample. Combining it with the much denser galaxy population is therefore not a minor optimisation; it is the central element of the method.</a:t>
+          <a:p>
+            <a:endParaRPr dirty="0"/>
+          </a:p>
+          <a:p>
+            <a:r>
+              <a:rPr dirty="0"/>
+              <a:t>The deep survey reduces shot noise through its ten times larger source count. Its projected clustering signal is also slightly smaller because of the broader redshift distribution. The essential point remains that more FRBs help, but the auto-correlation still relies on a sparse sample. Combining it with the much denser galaxy population is therefore not a minor </a:t>
+            </a:r>
+            <a:r>
+              <a:rPr dirty="0" err="1"/>
+              <a:t>optimisation</a:t>
+            </a:r>
+            <a:r>
+              <a:rPr dirty="0"/>
+              <a:t>; it is the central element of the method.</a:t>
             </a:r>
           </a:p>
         </p:txBody>
@@ -1334,7 +1259,7 @@
             <a:spLocks noGrp="1"/>
           </p:cNvSpPr>
           <p:nvPr>
-            <p:ph type="sldNum" idx="5" sz="quarter"/>
+            <p:ph type="sldNum" sz="quarter" idx="5"/>
           </p:nvPr>
         </p:nvSpPr>
         <p:spPr/>
@@ -1348,7 +1273,7 @@
 </file>
 
 <file path=ppt/notesSlides/notesSlide8.xml><?xml version="1.0" encoding="utf-8"?>
-<p:notes xmlns:a="http://schemas.openxmlformats.org/drawingml/2006/main" xmlns:p="http://schemas.openxmlformats.org/presentationml/2006/main" xmlns:r="http://schemas.openxmlformats.org/officeDocument/2006/relationships">
+<p:notes xmlns:a="http://schemas.openxmlformats.org/drawingml/2006/main" xmlns:r="http://schemas.openxmlformats.org/officeDocument/2006/relationships" xmlns:p="http://schemas.openxmlformats.org/presentationml/2006/main">
   <p:cSld>
     <p:spTree>
       <p:nvGrpSpPr>
@@ -1368,7 +1293,7 @@
         <p:nvSpPr>
           <p:cNvPr id="2" name="Slide Image Placeholder 1"/>
           <p:cNvSpPr>
-            <a:spLocks noGrp="1"/>
+            <a:spLocks noGrp="1" noRot="1" noChangeAspect="1"/>
           </p:cNvSpPr>
           <p:nvPr>
             <p:ph type="sldImg" idx="2"/>
@@ -1383,7 +1308,7 @@
             <a:spLocks noGrp="1"/>
           </p:cNvSpPr>
           <p:nvPr>
-            <p:ph type="body" idx="3" sz="quarter"/>
+            <p:ph type="body" sz="quarter" idx="3"/>
           </p:nvPr>
         </p:nvSpPr>
         <p:spPr/>
@@ -1392,18 +1317,41 @@
           <a:lstStyle/>
           <a:p>
             <a:r>
-              <a:t>Here we see the cross-spectra for the magnetar model, including all six KiDS bins and both FRB surveys. Their amplitudes depend directly on the overlap between each galaxy distribution and the corresponding FRB distribution.</a:t>
-            </a:r>
-          </a:p>
-          <a:p/>
-          <a:p>
-            <a:r>
-              <a:t>The shallow survey is concentrated at low redshift and therefore produces a stronger signal in the lower KiDS bins. The deep survey spreads its sources across a wider radial range. This broad projection dilutes its low-redshift signal, but leaves comparatively more signal in the higher bins.</a:t>
-            </a:r>
-          </a:p>
-          <a:p/>
-          <a:p>
-            <a:r>
+              <a:rPr dirty="0"/>
+              <a:t>Here we see the cross-spectra for the magnetar model, including all six </a:t>
+            </a:r>
+            <a:r>
+              <a:rPr dirty="0" err="1"/>
+              <a:t>KiDS</a:t>
+            </a:r>
+            <a:r>
+              <a:rPr dirty="0"/>
+              <a:t> bins and both FRB surveys. Their amplitudes depend directly on the overlap between each galaxy distribution and the corresponding FRB distribution.</a:t>
+            </a:r>
+          </a:p>
+          <a:p>
+            <a:endParaRPr dirty="0"/>
+          </a:p>
+          <a:p>
+            <a:r>
+              <a:rPr dirty="0"/>
+              <a:t>The shallow survey is concentrated at low redshift and therefore produces a stronger signal in the lower </a:t>
+            </a:r>
+            <a:r>
+              <a:rPr dirty="0" err="1"/>
+              <a:t>KiDS</a:t>
+            </a:r>
+            <a:r>
+              <a:rPr dirty="0"/>
+              <a:t> bins. The deep survey spreads its sources across a wider radial range. This broad projection dilutes its low-redshift signal, but leaves comparatively more signal in the higher bins.</a:t>
+            </a:r>
+          </a:p>
+          <a:p>
+            <a:endParaRPr dirty="0"/>
+          </a:p>
+          <a:p>
+            <a:r>
+              <a:rPr dirty="0"/>
               <a:t>Each galaxy bin therefore observes the FRB bias through a different redshift window. This is the value of tomography. A change in $b_0$ rescales all windows, while a change in $\delta$ affects high redshifts differently from low redshifts. The cross-correlation can consequently separate the two parameters more effectively.</a:t>
             </a:r>
           </a:p>
@@ -1416,7 +1364,7 @@
             <a:spLocks noGrp="1"/>
           </p:cNvSpPr>
           <p:nvPr>
-            <p:ph type="sldNum" idx="5" sz="quarter"/>
+            <p:ph type="sldNum" sz="quarter" idx="5"/>
           </p:nvPr>
         </p:nvSpPr>
         <p:spPr/>
@@ -1430,7 +1378,7 @@
 </file>
 
 <file path=ppt/notesSlides/notesSlide9.xml><?xml version="1.0" encoding="utf-8"?>
-<p:notes xmlns:a="http://schemas.openxmlformats.org/drawingml/2006/main" xmlns:p="http://schemas.openxmlformats.org/presentationml/2006/main" xmlns:r="http://schemas.openxmlformats.org/officeDocument/2006/relationships">
+<p:notes xmlns:a="http://schemas.openxmlformats.org/drawingml/2006/main" xmlns:r="http://schemas.openxmlformats.org/officeDocument/2006/relationships" xmlns:p="http://schemas.openxmlformats.org/presentationml/2006/main">
   <p:cSld>
     <p:spTree>
       <p:nvGrpSpPr>
@@ -1450,7 +1398,7 @@
         <p:nvSpPr>
           <p:cNvPr id="2" name="Slide Image Placeholder 1"/>
           <p:cNvSpPr>
-            <a:spLocks noGrp="1"/>
+            <a:spLocks noGrp="1" noRot="1" noChangeAspect="1"/>
           </p:cNvSpPr>
           <p:nvPr>
             <p:ph type="sldImg" idx="2"/>
@@ -1465,7 +1413,7 @@
             <a:spLocks noGrp="1"/>
           </p:cNvSpPr>
           <p:nvPr>
-            <p:ph type="body" idx="3" sz="quarter"/>
+            <p:ph type="body" sz="quarter" idx="3"/>
           </p:nvPr>
         </p:nvSpPr>
         <p:spPr/>
@@ -1477,13 +1425,17 @@
               <a:t>To translate the spectra into expected parameter uncertainties, I use a Fisher matrix. It measures how sensitively all auto- and cross-spectra respond to small changes in $b_0$ and $\delta$. I calculate the derivatives numerically using central differences with a relative step size of one percent, while holding the cosmological parameters fixed.</a:t>
             </a:r>
           </a:p>
-          <a:p/>
+          <a:p>
+            <a:endParaRPr/>
+          </a:p>
           <a:p>
             <a:r>
               <a:t>The inverse Fisher matrix gives the expected covariance. Its diagonal elements provide the marginalised one-sigma uncertainties, while the shape and orientation of the ellipse show the degeneracy between the two parameters. I also summarise the joint two-dimensional precision with a Figure of Merit. It is inversely proportional to the area of the error ellipse, so a larger value indicates a stronger constraint.</a:t>
             </a:r>
           </a:p>
-          <a:p/>
+          <a:p>
+            <a:endParaRPr/>
+          </a:p>
           <a:p>
             <a:r>
               <a:t>It is important to note that a Fisher analysis assumes a locally Gaussian likelihood. These results should therefore be interpreted as optimistic forecasts rather than uncertainties that have already been measured.</a:t>
@@ -1498,7 +1450,7 @@
             <a:spLocks noGrp="1"/>
           </p:cNvSpPr>
           <p:nvPr>
-            <p:ph type="sldNum" idx="5" sz="quarter"/>
+            <p:ph type="sldNum" sz="quarter" idx="5"/>
           </p:nvPr>
         </p:nvSpPr>
         <p:spPr/>
@@ -1530,7 +1482,13 @@
       </p:grpSpPr>
       <p:sp>
         <p:nvSpPr>
-          <p:cNvPr id="2" name="Title 1"/>
+          <p:cNvPr id="2" name="Title 1">
+            <a:extLst>
+              <a:ext uri="{FF2B5EF4-FFF2-40B4-BE49-F238E27FC236}">
+                <a16:creationId xmlns:a16="http://schemas.microsoft.com/office/drawing/2014/main" id="{25E64899-D35F-770B-1E8C-55728EC5FDE7}"/>
+              </a:ext>
+            </a:extLst>
+          </p:cNvPr>
           <p:cNvSpPr>
             <a:spLocks noGrp="1"/>
           </p:cNvSpPr>
@@ -1540,25 +1498,35 @@
         </p:nvSpPr>
         <p:spPr>
           <a:xfrm>
-            <a:off x="685800" y="2130425"/>
-            <a:ext cx="7772400" cy="1470025"/>
-          </a:xfrm>
-        </p:spPr>
-        <p:txBody>
-          <a:bodyPr/>
-          <a:lstStyle/>
-          <a:p>
-            <a:r>
-              <a:rPr lang="en-US" smtClean="0"/>
+            <a:off x="1524000" y="1122363"/>
+            <a:ext cx="9144000" cy="2387600"/>
+          </a:xfrm>
+        </p:spPr>
+        <p:txBody>
+          <a:bodyPr anchor="b"/>
+          <a:lstStyle>
+            <a:lvl1pPr algn="ctr">
+              <a:defRPr sz="6000"/>
+            </a:lvl1pPr>
+          </a:lstStyle>
+          <a:p>
+            <a:r>
+              <a:rPr lang="en-GB"/>
               <a:t>Click to edit Master title style</a:t>
             </a:r>
-            <a:endParaRPr lang="en-US"/>
-          </a:p>
-        </p:txBody>
-      </p:sp>
-      <p:sp>
-        <p:nvSpPr>
-          <p:cNvPr id="3" name="Subtitle 2"/>
+            <a:endParaRPr lang="en-DE"/>
+          </a:p>
+        </p:txBody>
+      </p:sp>
+      <p:sp>
+        <p:nvSpPr>
+          <p:cNvPr id="3" name="Subtitle 2">
+            <a:extLst>
+              <a:ext uri="{FF2B5EF4-FFF2-40B4-BE49-F238E27FC236}">
+                <a16:creationId xmlns:a16="http://schemas.microsoft.com/office/drawing/2014/main" id="{A98670E5-DDB1-B0E6-25C2-EA1E5081692B}"/>
+              </a:ext>
+            </a:extLst>
+          </p:cNvPr>
           <p:cNvSpPr>
             <a:spLocks noGrp="1"/>
           </p:cNvSpPr>
@@ -1568,8 +1536,8 @@
         </p:nvSpPr>
         <p:spPr>
           <a:xfrm>
-            <a:off x="1371600" y="3886200"/>
-            <a:ext cx="6400800" cy="1752600"/>
+            <a:off x="1524000" y="3602038"/>
+            <a:ext cx="9144000" cy="1655762"/>
           </a:xfrm>
         </p:spPr>
         <p:txBody>
@@ -1577,107 +1545,59 @@
           <a:lstStyle>
             <a:lvl1pPr marL="0" indent="0" algn="ctr">
               <a:buNone/>
-              <a:defRPr>
-                <a:solidFill>
-                  <a:schemeClr val="tx1">
-                    <a:tint val="75000"/>
-                  </a:schemeClr>
-                </a:solidFill>
-              </a:defRPr>
+              <a:defRPr sz="2400"/>
             </a:lvl1pPr>
             <a:lvl2pPr marL="457200" indent="0" algn="ctr">
               <a:buNone/>
-              <a:defRPr>
-                <a:solidFill>
-                  <a:schemeClr val="tx1">
-                    <a:tint val="75000"/>
-                  </a:schemeClr>
-                </a:solidFill>
-              </a:defRPr>
+              <a:defRPr sz="2000"/>
             </a:lvl2pPr>
             <a:lvl3pPr marL="914400" indent="0" algn="ctr">
               <a:buNone/>
-              <a:defRPr>
-                <a:solidFill>
-                  <a:schemeClr val="tx1">
-                    <a:tint val="75000"/>
-                  </a:schemeClr>
-                </a:solidFill>
-              </a:defRPr>
+              <a:defRPr sz="1800"/>
             </a:lvl3pPr>
             <a:lvl4pPr marL="1371600" indent="0" algn="ctr">
               <a:buNone/>
-              <a:defRPr>
-                <a:solidFill>
-                  <a:schemeClr val="tx1">
-                    <a:tint val="75000"/>
-                  </a:schemeClr>
-                </a:solidFill>
-              </a:defRPr>
+              <a:defRPr sz="1600"/>
             </a:lvl4pPr>
             <a:lvl5pPr marL="1828800" indent="0" algn="ctr">
               <a:buNone/>
-              <a:defRPr>
-                <a:solidFill>
-                  <a:schemeClr val="tx1">
-                    <a:tint val="75000"/>
-                  </a:schemeClr>
-                </a:solidFill>
-              </a:defRPr>
+              <a:defRPr sz="1600"/>
             </a:lvl5pPr>
             <a:lvl6pPr marL="2286000" indent="0" algn="ctr">
               <a:buNone/>
-              <a:defRPr>
-                <a:solidFill>
-                  <a:schemeClr val="tx1">
-                    <a:tint val="75000"/>
-                  </a:schemeClr>
-                </a:solidFill>
-              </a:defRPr>
+              <a:defRPr sz="1600"/>
             </a:lvl6pPr>
             <a:lvl7pPr marL="2743200" indent="0" algn="ctr">
               <a:buNone/>
-              <a:defRPr>
-                <a:solidFill>
-                  <a:schemeClr val="tx1">
-                    <a:tint val="75000"/>
-                  </a:schemeClr>
-                </a:solidFill>
-              </a:defRPr>
+              <a:defRPr sz="1600"/>
             </a:lvl7pPr>
             <a:lvl8pPr marL="3200400" indent="0" algn="ctr">
               <a:buNone/>
-              <a:defRPr>
-                <a:solidFill>
-                  <a:schemeClr val="tx1">
-                    <a:tint val="75000"/>
-                  </a:schemeClr>
-                </a:solidFill>
-              </a:defRPr>
+              <a:defRPr sz="1600"/>
             </a:lvl8pPr>
             <a:lvl9pPr marL="3657600" indent="0" algn="ctr">
               <a:buNone/>
-              <a:defRPr>
-                <a:solidFill>
-                  <a:schemeClr val="tx1">
-                    <a:tint val="75000"/>
-                  </a:schemeClr>
-                </a:solidFill>
-              </a:defRPr>
+              <a:defRPr sz="1600"/>
             </a:lvl9pPr>
           </a:lstStyle>
           <a:p>
             <a:r>
-              <a:rPr lang="en-US" smtClean="0"/>
+              <a:rPr lang="en-GB"/>
               <a:t>Click to edit Master subtitle style</a:t>
             </a:r>
-            <a:endParaRPr lang="en-US"/>
-          </a:p>
-        </p:txBody>
-      </p:sp>
-      <p:sp>
-        <p:nvSpPr>
-          <p:cNvPr id="4" name="Date Placeholder 3"/>
+            <a:endParaRPr lang="en-DE"/>
+          </a:p>
+        </p:txBody>
+      </p:sp>
+      <p:sp>
+        <p:nvSpPr>
+          <p:cNvPr id="4" name="Date Placeholder 3">
+            <a:extLst>
+              <a:ext uri="{FF2B5EF4-FFF2-40B4-BE49-F238E27FC236}">
+                <a16:creationId xmlns:a16="http://schemas.microsoft.com/office/drawing/2014/main" id="{0DA785C8-7EE3-0C53-7232-4B87A368A567}"/>
+              </a:ext>
+            </a:extLst>
+          </p:cNvPr>
           <p:cNvSpPr>
             <a:spLocks noGrp="1"/>
           </p:cNvSpPr>
@@ -1692,7 +1612,7 @@
           <a:p>
             <a:fld id="{5BCAD085-E8A6-8845-BD4E-CB4CCA059FC4}" type="datetimeFigureOut">
               <a:rPr lang="en-US" smtClean="0"/>
-              <a:t>1/27/13</a:t>
+              <a:t>9/24/26</a:t>
             </a:fld>
             <a:endParaRPr lang="en-US"/>
           </a:p>
@@ -1700,7 +1620,13 @@
       </p:sp>
       <p:sp>
         <p:nvSpPr>
-          <p:cNvPr id="5" name="Footer Placeholder 4"/>
+          <p:cNvPr id="5" name="Footer Placeholder 4">
+            <a:extLst>
+              <a:ext uri="{FF2B5EF4-FFF2-40B4-BE49-F238E27FC236}">
+                <a16:creationId xmlns:a16="http://schemas.microsoft.com/office/drawing/2014/main" id="{37203D91-A26B-2785-F371-7026B5997E78}"/>
+              </a:ext>
+            </a:extLst>
+          </p:cNvPr>
           <p:cNvSpPr>
             <a:spLocks noGrp="1"/>
           </p:cNvSpPr>
@@ -1719,7 +1645,13 @@
       </p:sp>
       <p:sp>
         <p:nvSpPr>
-          <p:cNvPr id="6" name="Slide Number Placeholder 5"/>
+          <p:cNvPr id="6" name="Slide Number Placeholder 5">
+            <a:extLst>
+              <a:ext uri="{FF2B5EF4-FFF2-40B4-BE49-F238E27FC236}">
+                <a16:creationId xmlns:a16="http://schemas.microsoft.com/office/drawing/2014/main" id="{F1F2E382-1B90-C35B-858A-8488270EB0AB}"/>
+              </a:ext>
+            </a:extLst>
+          </p:cNvPr>
           <p:cNvSpPr>
             <a:spLocks noGrp="1"/>
           </p:cNvSpPr>
@@ -1743,7 +1675,7 @@
     </p:spTree>
     <p:extLst>
       <p:ext uri="{BB962C8B-B14F-4D97-AF65-F5344CB8AC3E}">
-        <p14:creationId xmlns:p14="http://schemas.microsoft.com/office/powerpoint/2010/main" val="3168075583"/>
+        <p14:creationId xmlns:p14="http://schemas.microsoft.com/office/powerpoint/2010/main" val="1941173610"/>
       </p:ext>
     </p:extLst>
   </p:cSld>
@@ -1772,7 +1704,13 @@
       </p:grpSpPr>
       <p:sp>
         <p:nvSpPr>
-          <p:cNvPr id="2" name="Title 1"/>
+          <p:cNvPr id="2" name="Title 1">
+            <a:extLst>
+              <a:ext uri="{FF2B5EF4-FFF2-40B4-BE49-F238E27FC236}">
+                <a16:creationId xmlns:a16="http://schemas.microsoft.com/office/drawing/2014/main" id="{A25059D1-D976-20FF-5931-8CCA3C7FBC35}"/>
+              </a:ext>
+            </a:extLst>
+          </p:cNvPr>
           <p:cNvSpPr>
             <a:spLocks noGrp="1"/>
           </p:cNvSpPr>
@@ -1786,16 +1724,22 @@
           <a:lstStyle/>
           <a:p>
             <a:r>
-              <a:rPr lang="en-US" smtClean="0"/>
+              <a:rPr lang="en-GB"/>
               <a:t>Click to edit Master title style</a:t>
             </a:r>
-            <a:endParaRPr lang="en-US"/>
-          </a:p>
-        </p:txBody>
-      </p:sp>
-      <p:sp>
-        <p:nvSpPr>
-          <p:cNvPr id="3" name="Vertical Text Placeholder 2"/>
+            <a:endParaRPr lang="en-DE"/>
+          </a:p>
+        </p:txBody>
+      </p:sp>
+      <p:sp>
+        <p:nvSpPr>
+          <p:cNvPr id="3" name="Vertical Text Placeholder 2">
+            <a:extLst>
+              <a:ext uri="{FF2B5EF4-FFF2-40B4-BE49-F238E27FC236}">
+                <a16:creationId xmlns:a16="http://schemas.microsoft.com/office/drawing/2014/main" id="{A1DDD2C0-4E26-7C60-6E8A-EEA77F5EE5D1}"/>
+              </a:ext>
+            </a:extLst>
+          </p:cNvPr>
           <p:cNvSpPr>
             <a:spLocks noGrp="1"/>
           </p:cNvSpPr>
@@ -1810,44 +1754,50 @@
           <a:p>
             <a:pPr lvl="0"/>
             <a:r>
-              <a:rPr lang="en-US" smtClean="0"/>
+              <a:rPr lang="en-GB"/>
               <a:t>Click to edit Master text styles</a:t>
             </a:r>
           </a:p>
           <a:p>
             <a:pPr lvl="1"/>
             <a:r>
-              <a:rPr lang="en-US" smtClean="0"/>
+              <a:rPr lang="en-GB"/>
               <a:t>Second level</a:t>
             </a:r>
           </a:p>
           <a:p>
             <a:pPr lvl="2"/>
             <a:r>
-              <a:rPr lang="en-US" smtClean="0"/>
+              <a:rPr lang="en-GB"/>
               <a:t>Third level</a:t>
             </a:r>
           </a:p>
           <a:p>
             <a:pPr lvl="3"/>
             <a:r>
-              <a:rPr lang="en-US" smtClean="0"/>
+              <a:rPr lang="en-GB"/>
               <a:t>Fourth level</a:t>
             </a:r>
           </a:p>
           <a:p>
             <a:pPr lvl="4"/>
             <a:r>
-              <a:rPr lang="en-US" smtClean="0"/>
+              <a:rPr lang="en-GB"/>
               <a:t>Fifth level</a:t>
             </a:r>
-            <a:endParaRPr lang="en-US"/>
-          </a:p>
-        </p:txBody>
-      </p:sp>
-      <p:sp>
-        <p:nvSpPr>
-          <p:cNvPr id="4" name="Date Placeholder 3"/>
+            <a:endParaRPr lang="en-DE"/>
+          </a:p>
+        </p:txBody>
+      </p:sp>
+      <p:sp>
+        <p:nvSpPr>
+          <p:cNvPr id="4" name="Date Placeholder 3">
+            <a:extLst>
+              <a:ext uri="{FF2B5EF4-FFF2-40B4-BE49-F238E27FC236}">
+                <a16:creationId xmlns:a16="http://schemas.microsoft.com/office/drawing/2014/main" id="{B15C3A50-606E-AD3C-7C63-74D091275A4C}"/>
+              </a:ext>
+            </a:extLst>
+          </p:cNvPr>
           <p:cNvSpPr>
             <a:spLocks noGrp="1"/>
           </p:cNvSpPr>
@@ -1862,7 +1812,7 @@
           <a:p>
             <a:fld id="{5BCAD085-E8A6-8845-BD4E-CB4CCA059FC4}" type="datetimeFigureOut">
               <a:rPr lang="en-US" smtClean="0"/>
-              <a:t>1/27/13</a:t>
+              <a:t>9/24/26</a:t>
             </a:fld>
             <a:endParaRPr lang="en-US"/>
           </a:p>
@@ -1870,7 +1820,13 @@
       </p:sp>
       <p:sp>
         <p:nvSpPr>
-          <p:cNvPr id="5" name="Footer Placeholder 4"/>
+          <p:cNvPr id="5" name="Footer Placeholder 4">
+            <a:extLst>
+              <a:ext uri="{FF2B5EF4-FFF2-40B4-BE49-F238E27FC236}">
+                <a16:creationId xmlns:a16="http://schemas.microsoft.com/office/drawing/2014/main" id="{55F30578-08A4-C70D-5905-22049D3DF6BD}"/>
+              </a:ext>
+            </a:extLst>
+          </p:cNvPr>
           <p:cNvSpPr>
             <a:spLocks noGrp="1"/>
           </p:cNvSpPr>
@@ -1889,7 +1845,13 @@
       </p:sp>
       <p:sp>
         <p:nvSpPr>
-          <p:cNvPr id="6" name="Slide Number Placeholder 5"/>
+          <p:cNvPr id="6" name="Slide Number Placeholder 5">
+            <a:extLst>
+              <a:ext uri="{FF2B5EF4-FFF2-40B4-BE49-F238E27FC236}">
+                <a16:creationId xmlns:a16="http://schemas.microsoft.com/office/drawing/2014/main" id="{06B0E265-46F3-DA68-E7DA-55A20466D8B9}"/>
+              </a:ext>
+            </a:extLst>
+          </p:cNvPr>
           <p:cNvSpPr>
             <a:spLocks noGrp="1"/>
           </p:cNvSpPr>
@@ -1913,7 +1875,7 @@
     </p:spTree>
     <p:extLst>
       <p:ext uri="{BB962C8B-B14F-4D97-AF65-F5344CB8AC3E}">
-        <p14:creationId xmlns:p14="http://schemas.microsoft.com/office/powerpoint/2010/main" val="2910927964"/>
+        <p14:creationId xmlns:p14="http://schemas.microsoft.com/office/powerpoint/2010/main" val="906445350"/>
       </p:ext>
     </p:extLst>
   </p:cSld>
@@ -1942,7 +1904,13 @@
       </p:grpSpPr>
       <p:sp>
         <p:nvSpPr>
-          <p:cNvPr id="2" name="Vertical Title 1"/>
+          <p:cNvPr id="2" name="Vertical Title 1">
+            <a:extLst>
+              <a:ext uri="{FF2B5EF4-FFF2-40B4-BE49-F238E27FC236}">
+                <a16:creationId xmlns:a16="http://schemas.microsoft.com/office/drawing/2014/main" id="{E8FF63A2-36ED-1F5A-0065-9E4D270B472B}"/>
+              </a:ext>
+            </a:extLst>
+          </p:cNvPr>
           <p:cNvSpPr>
             <a:spLocks noGrp="1"/>
           </p:cNvSpPr>
@@ -1952,8 +1920,8 @@
         </p:nvSpPr>
         <p:spPr>
           <a:xfrm>
-            <a:off x="6629400" y="274638"/>
-            <a:ext cx="2057400" cy="5851525"/>
+            <a:off x="8724900" y="365125"/>
+            <a:ext cx="2628900" cy="5811838"/>
           </a:xfrm>
         </p:spPr>
         <p:txBody>
@@ -1961,16 +1929,22 @@
           <a:lstStyle/>
           <a:p>
             <a:r>
-              <a:rPr lang="en-US" smtClean="0"/>
+              <a:rPr lang="en-GB"/>
               <a:t>Click to edit Master title style</a:t>
             </a:r>
-            <a:endParaRPr lang="en-US"/>
-          </a:p>
-        </p:txBody>
-      </p:sp>
-      <p:sp>
-        <p:nvSpPr>
-          <p:cNvPr id="3" name="Vertical Text Placeholder 2"/>
+            <a:endParaRPr lang="en-DE"/>
+          </a:p>
+        </p:txBody>
+      </p:sp>
+      <p:sp>
+        <p:nvSpPr>
+          <p:cNvPr id="3" name="Vertical Text Placeholder 2">
+            <a:extLst>
+              <a:ext uri="{FF2B5EF4-FFF2-40B4-BE49-F238E27FC236}">
+                <a16:creationId xmlns:a16="http://schemas.microsoft.com/office/drawing/2014/main" id="{7B4F4061-6441-09EF-EB55-6ED37637ECC2}"/>
+              </a:ext>
+            </a:extLst>
+          </p:cNvPr>
           <p:cNvSpPr>
             <a:spLocks noGrp="1"/>
           </p:cNvSpPr>
@@ -1980,8 +1954,8 @@
         </p:nvSpPr>
         <p:spPr>
           <a:xfrm>
-            <a:off x="457200" y="274638"/>
-            <a:ext cx="6019800" cy="5851525"/>
+            <a:off x="838200" y="365125"/>
+            <a:ext cx="7734300" cy="5811838"/>
           </a:xfrm>
         </p:spPr>
         <p:txBody>
@@ -1990,44 +1964,50 @@
           <a:p>
             <a:pPr lvl="0"/>
             <a:r>
-              <a:rPr lang="en-US" smtClean="0"/>
+              <a:rPr lang="en-GB"/>
               <a:t>Click to edit Master text styles</a:t>
             </a:r>
           </a:p>
           <a:p>
             <a:pPr lvl="1"/>
             <a:r>
-              <a:rPr lang="en-US" smtClean="0"/>
+              <a:rPr lang="en-GB"/>
               <a:t>Second level</a:t>
             </a:r>
           </a:p>
           <a:p>
             <a:pPr lvl="2"/>
             <a:r>
-              <a:rPr lang="en-US" smtClean="0"/>
+              <a:rPr lang="en-GB"/>
               <a:t>Third level</a:t>
             </a:r>
           </a:p>
           <a:p>
             <a:pPr lvl="3"/>
             <a:r>
-              <a:rPr lang="en-US" smtClean="0"/>
+              <a:rPr lang="en-GB"/>
               <a:t>Fourth level</a:t>
             </a:r>
           </a:p>
           <a:p>
             <a:pPr lvl="4"/>
             <a:r>
-              <a:rPr lang="en-US" smtClean="0"/>
+              <a:rPr lang="en-GB"/>
               <a:t>Fifth level</a:t>
             </a:r>
-            <a:endParaRPr lang="en-US"/>
-          </a:p>
-        </p:txBody>
-      </p:sp>
-      <p:sp>
-        <p:nvSpPr>
-          <p:cNvPr id="4" name="Date Placeholder 3"/>
+            <a:endParaRPr lang="en-DE"/>
+          </a:p>
+        </p:txBody>
+      </p:sp>
+      <p:sp>
+        <p:nvSpPr>
+          <p:cNvPr id="4" name="Date Placeholder 3">
+            <a:extLst>
+              <a:ext uri="{FF2B5EF4-FFF2-40B4-BE49-F238E27FC236}">
+                <a16:creationId xmlns:a16="http://schemas.microsoft.com/office/drawing/2014/main" id="{65477AFF-65F6-EF7C-A4A1-44A78601104A}"/>
+              </a:ext>
+            </a:extLst>
+          </p:cNvPr>
           <p:cNvSpPr>
             <a:spLocks noGrp="1"/>
           </p:cNvSpPr>
@@ -2042,7 +2022,7 @@
           <a:p>
             <a:fld id="{5BCAD085-E8A6-8845-BD4E-CB4CCA059FC4}" type="datetimeFigureOut">
               <a:rPr lang="en-US" smtClean="0"/>
-              <a:t>1/27/13</a:t>
+              <a:t>9/24/26</a:t>
             </a:fld>
             <a:endParaRPr lang="en-US"/>
           </a:p>
@@ -2050,7 +2030,13 @@
       </p:sp>
       <p:sp>
         <p:nvSpPr>
-          <p:cNvPr id="5" name="Footer Placeholder 4"/>
+          <p:cNvPr id="5" name="Footer Placeholder 4">
+            <a:extLst>
+              <a:ext uri="{FF2B5EF4-FFF2-40B4-BE49-F238E27FC236}">
+                <a16:creationId xmlns:a16="http://schemas.microsoft.com/office/drawing/2014/main" id="{28563443-A52B-65D5-4F03-F2858A0021A0}"/>
+              </a:ext>
+            </a:extLst>
+          </p:cNvPr>
           <p:cNvSpPr>
             <a:spLocks noGrp="1"/>
           </p:cNvSpPr>
@@ -2069,7 +2055,13 @@
       </p:sp>
       <p:sp>
         <p:nvSpPr>
-          <p:cNvPr id="6" name="Slide Number Placeholder 5"/>
+          <p:cNvPr id="6" name="Slide Number Placeholder 5">
+            <a:extLst>
+              <a:ext uri="{FF2B5EF4-FFF2-40B4-BE49-F238E27FC236}">
+                <a16:creationId xmlns:a16="http://schemas.microsoft.com/office/drawing/2014/main" id="{FE4176DB-384F-6844-30EC-DBA977C0C15D}"/>
+              </a:ext>
+            </a:extLst>
+          </p:cNvPr>
           <p:cNvSpPr>
             <a:spLocks noGrp="1"/>
           </p:cNvSpPr>
@@ -2093,7 +2085,7 @@
     </p:spTree>
     <p:extLst>
       <p:ext uri="{BB962C8B-B14F-4D97-AF65-F5344CB8AC3E}">
-        <p14:creationId xmlns:p14="http://schemas.microsoft.com/office/powerpoint/2010/main" val="3612223792"/>
+        <p14:creationId xmlns:p14="http://schemas.microsoft.com/office/powerpoint/2010/main" val="4050323533"/>
       </p:ext>
     </p:extLst>
   </p:cSld>
@@ -2122,7 +2114,13 @@
       </p:grpSpPr>
       <p:sp>
         <p:nvSpPr>
-          <p:cNvPr id="2" name="Title 1"/>
+          <p:cNvPr id="2" name="Title 1">
+            <a:extLst>
+              <a:ext uri="{FF2B5EF4-FFF2-40B4-BE49-F238E27FC236}">
+                <a16:creationId xmlns:a16="http://schemas.microsoft.com/office/drawing/2014/main" id="{2EF0035B-6E6D-7B8C-F82E-69436C12935B}"/>
+              </a:ext>
+            </a:extLst>
+          </p:cNvPr>
           <p:cNvSpPr>
             <a:spLocks noGrp="1"/>
           </p:cNvSpPr>
@@ -2136,16 +2134,22 @@
           <a:lstStyle/>
           <a:p>
             <a:r>
-              <a:rPr lang="en-US" smtClean="0"/>
+              <a:rPr lang="en-GB"/>
               <a:t>Click to edit Master title style</a:t>
             </a:r>
-            <a:endParaRPr lang="en-US"/>
-          </a:p>
-        </p:txBody>
-      </p:sp>
-      <p:sp>
-        <p:nvSpPr>
-          <p:cNvPr id="3" name="Content Placeholder 2"/>
+            <a:endParaRPr lang="en-DE"/>
+          </a:p>
+        </p:txBody>
+      </p:sp>
+      <p:sp>
+        <p:nvSpPr>
+          <p:cNvPr id="3" name="Content Placeholder 2">
+            <a:extLst>
+              <a:ext uri="{FF2B5EF4-FFF2-40B4-BE49-F238E27FC236}">
+                <a16:creationId xmlns:a16="http://schemas.microsoft.com/office/drawing/2014/main" id="{D4AAB443-C0FA-E04B-7CF1-2055770E8BAD}"/>
+              </a:ext>
+            </a:extLst>
+          </p:cNvPr>
           <p:cNvSpPr>
             <a:spLocks noGrp="1"/>
           </p:cNvSpPr>
@@ -2160,44 +2164,50 @@
           <a:p>
             <a:pPr lvl="0"/>
             <a:r>
-              <a:rPr lang="en-US" smtClean="0"/>
+              <a:rPr lang="en-GB"/>
               <a:t>Click to edit Master text styles</a:t>
             </a:r>
           </a:p>
           <a:p>
             <a:pPr lvl="1"/>
             <a:r>
-              <a:rPr lang="en-US" smtClean="0"/>
+              <a:rPr lang="en-GB"/>
               <a:t>Second level</a:t>
             </a:r>
           </a:p>
           <a:p>
             <a:pPr lvl="2"/>
             <a:r>
-              <a:rPr lang="en-US" smtClean="0"/>
+              <a:rPr lang="en-GB"/>
               <a:t>Third level</a:t>
             </a:r>
           </a:p>
           <a:p>
             <a:pPr lvl="3"/>
             <a:r>
-              <a:rPr lang="en-US" smtClean="0"/>
+              <a:rPr lang="en-GB"/>
               <a:t>Fourth level</a:t>
             </a:r>
           </a:p>
           <a:p>
             <a:pPr lvl="4"/>
             <a:r>
-              <a:rPr lang="en-US" smtClean="0"/>
+              <a:rPr lang="en-GB"/>
               <a:t>Fifth level</a:t>
             </a:r>
-            <a:endParaRPr lang="en-US"/>
-          </a:p>
-        </p:txBody>
-      </p:sp>
-      <p:sp>
-        <p:nvSpPr>
-          <p:cNvPr id="4" name="Date Placeholder 3"/>
+            <a:endParaRPr lang="en-DE"/>
+          </a:p>
+        </p:txBody>
+      </p:sp>
+      <p:sp>
+        <p:nvSpPr>
+          <p:cNvPr id="4" name="Date Placeholder 3">
+            <a:extLst>
+              <a:ext uri="{FF2B5EF4-FFF2-40B4-BE49-F238E27FC236}">
+                <a16:creationId xmlns:a16="http://schemas.microsoft.com/office/drawing/2014/main" id="{36A00603-DFAA-FBAD-A214-B975B19447F6}"/>
+              </a:ext>
+            </a:extLst>
+          </p:cNvPr>
           <p:cNvSpPr>
             <a:spLocks noGrp="1"/>
           </p:cNvSpPr>
@@ -2212,7 +2222,7 @@
           <a:p>
             <a:fld id="{5BCAD085-E8A6-8845-BD4E-CB4CCA059FC4}" type="datetimeFigureOut">
               <a:rPr lang="en-US" smtClean="0"/>
-              <a:t>1/27/13</a:t>
+              <a:t>9/24/26</a:t>
             </a:fld>
             <a:endParaRPr lang="en-US"/>
           </a:p>
@@ -2220,7 +2230,13 @@
       </p:sp>
       <p:sp>
         <p:nvSpPr>
-          <p:cNvPr id="5" name="Footer Placeholder 4"/>
+          <p:cNvPr id="5" name="Footer Placeholder 4">
+            <a:extLst>
+              <a:ext uri="{FF2B5EF4-FFF2-40B4-BE49-F238E27FC236}">
+                <a16:creationId xmlns:a16="http://schemas.microsoft.com/office/drawing/2014/main" id="{50D74A4D-1A6F-3186-F1DD-38ECD43845BF}"/>
+              </a:ext>
+            </a:extLst>
+          </p:cNvPr>
           <p:cNvSpPr>
             <a:spLocks noGrp="1"/>
           </p:cNvSpPr>
@@ -2239,7 +2255,13 @@
       </p:sp>
       <p:sp>
         <p:nvSpPr>
-          <p:cNvPr id="6" name="Slide Number Placeholder 5"/>
+          <p:cNvPr id="6" name="Slide Number Placeholder 5">
+            <a:extLst>
+              <a:ext uri="{FF2B5EF4-FFF2-40B4-BE49-F238E27FC236}">
+                <a16:creationId xmlns:a16="http://schemas.microsoft.com/office/drawing/2014/main" id="{46F60A30-E21C-22C6-74FB-882350A862D1}"/>
+              </a:ext>
+            </a:extLst>
+          </p:cNvPr>
           <p:cNvSpPr>
             <a:spLocks noGrp="1"/>
           </p:cNvSpPr>
@@ -2263,7 +2285,7 @@
     </p:spTree>
     <p:extLst>
       <p:ext uri="{BB962C8B-B14F-4D97-AF65-F5344CB8AC3E}">
-        <p14:creationId xmlns:p14="http://schemas.microsoft.com/office/powerpoint/2010/main" val="2614314258"/>
+        <p14:creationId xmlns:p14="http://schemas.microsoft.com/office/powerpoint/2010/main" val="2291788436"/>
       </p:ext>
     </p:extLst>
   </p:cSld>
@@ -2292,7 +2314,13 @@
       </p:grpSpPr>
       <p:sp>
         <p:nvSpPr>
-          <p:cNvPr id="2" name="Title 1"/>
+          <p:cNvPr id="2" name="Title 1">
+            <a:extLst>
+              <a:ext uri="{FF2B5EF4-FFF2-40B4-BE49-F238E27FC236}">
+                <a16:creationId xmlns:a16="http://schemas.microsoft.com/office/drawing/2014/main" id="{0EB76693-45DB-6A94-5527-185A091841F8}"/>
+              </a:ext>
+            </a:extLst>
+          </p:cNvPr>
           <p:cNvSpPr>
             <a:spLocks noGrp="1"/>
           </p:cNvSpPr>
@@ -2302,29 +2330,35 @@
         </p:nvSpPr>
         <p:spPr>
           <a:xfrm>
-            <a:off x="722313" y="4406900"/>
-            <a:ext cx="7772400" cy="1362075"/>
-          </a:xfrm>
-        </p:spPr>
-        <p:txBody>
-          <a:bodyPr anchor="t"/>
+            <a:off x="831850" y="1709738"/>
+            <a:ext cx="10515600" cy="2852737"/>
+          </a:xfrm>
+        </p:spPr>
+        <p:txBody>
+          <a:bodyPr anchor="b"/>
           <a:lstStyle>
-            <a:lvl1pPr algn="l">
-              <a:defRPr sz="4000" b="1" cap="all"/>
+            <a:lvl1pPr>
+              <a:defRPr sz="6000"/>
             </a:lvl1pPr>
           </a:lstStyle>
           <a:p>
             <a:r>
-              <a:rPr lang="en-US" smtClean="0"/>
+              <a:rPr lang="en-GB"/>
               <a:t>Click to edit Master title style</a:t>
             </a:r>
-            <a:endParaRPr lang="en-US"/>
-          </a:p>
-        </p:txBody>
-      </p:sp>
-      <p:sp>
-        <p:nvSpPr>
-          <p:cNvPr id="3" name="Text Placeholder 2"/>
+            <a:endParaRPr lang="en-DE"/>
+          </a:p>
+        </p:txBody>
+      </p:sp>
+      <p:sp>
+        <p:nvSpPr>
+          <p:cNvPr id="3" name="Text Placeholder 2">
+            <a:extLst>
+              <a:ext uri="{FF2B5EF4-FFF2-40B4-BE49-F238E27FC236}">
+                <a16:creationId xmlns:a16="http://schemas.microsoft.com/office/drawing/2014/main" id="{4842DF30-005A-0C10-0688-E5759136D0A6}"/>
+              </a:ext>
+            </a:extLst>
+          </p:cNvPr>
           <p:cNvSpPr>
             <a:spLocks noGrp="1"/>
           </p:cNvSpPr>
@@ -2334,99 +2368,99 @@
         </p:nvSpPr>
         <p:spPr>
           <a:xfrm>
-            <a:off x="722313" y="2906713"/>
-            <a:ext cx="7772400" cy="1500187"/>
-          </a:xfrm>
-        </p:spPr>
-        <p:txBody>
-          <a:bodyPr anchor="b"/>
+            <a:off x="831850" y="4589463"/>
+            <a:ext cx="10515600" cy="1500187"/>
+          </a:xfrm>
+        </p:spPr>
+        <p:txBody>
+          <a:bodyPr/>
           <a:lstStyle>
             <a:lvl1pPr marL="0" indent="0">
               <a:buNone/>
-              <a:defRPr sz="2000">
+              <a:defRPr sz="2400">
                 <a:solidFill>
                   <a:schemeClr val="tx1">
-                    <a:tint val="75000"/>
+                    <a:tint val="82000"/>
                   </a:schemeClr>
                 </a:solidFill>
               </a:defRPr>
             </a:lvl1pPr>
             <a:lvl2pPr marL="457200" indent="0">
               <a:buNone/>
-              <a:defRPr sz="1800">
+              <a:defRPr sz="2000">
                 <a:solidFill>
                   <a:schemeClr val="tx1">
-                    <a:tint val="75000"/>
+                    <a:tint val="82000"/>
                   </a:schemeClr>
                 </a:solidFill>
               </a:defRPr>
             </a:lvl2pPr>
             <a:lvl3pPr marL="914400" indent="0">
               <a:buNone/>
-              <a:defRPr sz="1600">
+              <a:defRPr sz="1800">
                 <a:solidFill>
                   <a:schemeClr val="tx1">
-                    <a:tint val="75000"/>
+                    <a:tint val="82000"/>
                   </a:schemeClr>
                 </a:solidFill>
               </a:defRPr>
             </a:lvl3pPr>
             <a:lvl4pPr marL="1371600" indent="0">
               <a:buNone/>
-              <a:defRPr sz="1400">
+              <a:defRPr sz="1600">
                 <a:solidFill>
                   <a:schemeClr val="tx1">
-                    <a:tint val="75000"/>
+                    <a:tint val="82000"/>
                   </a:schemeClr>
                 </a:solidFill>
               </a:defRPr>
             </a:lvl4pPr>
             <a:lvl5pPr marL="1828800" indent="0">
               <a:buNone/>
-              <a:defRPr sz="1400">
+              <a:defRPr sz="1600">
                 <a:solidFill>
                   <a:schemeClr val="tx1">
-                    <a:tint val="75000"/>
+                    <a:tint val="82000"/>
                   </a:schemeClr>
                 </a:solidFill>
               </a:defRPr>
             </a:lvl5pPr>
             <a:lvl6pPr marL="2286000" indent="0">
               <a:buNone/>
-              <a:defRPr sz="1400">
+              <a:defRPr sz="1600">
                 <a:solidFill>
                   <a:schemeClr val="tx1">
-                    <a:tint val="75000"/>
+                    <a:tint val="82000"/>
                   </a:schemeClr>
                 </a:solidFill>
               </a:defRPr>
             </a:lvl6pPr>
             <a:lvl7pPr marL="2743200" indent="0">
               <a:buNone/>
-              <a:defRPr sz="1400">
+              <a:defRPr sz="1600">
                 <a:solidFill>
                   <a:schemeClr val="tx1">
-                    <a:tint val="75000"/>
+                    <a:tint val="82000"/>
                   </a:schemeClr>
                 </a:solidFill>
               </a:defRPr>
             </a:lvl7pPr>
             <a:lvl8pPr marL="3200400" indent="0">
               <a:buNone/>
-              <a:defRPr sz="1400">
+              <a:defRPr sz="1600">
                 <a:solidFill>
                   <a:schemeClr val="tx1">
-                    <a:tint val="75000"/>
+                    <a:tint val="82000"/>
                   </a:schemeClr>
                 </a:solidFill>
               </a:defRPr>
             </a:lvl8pPr>
             <a:lvl9pPr marL="3657600" indent="0">
               <a:buNone/>
-              <a:defRPr sz="1400">
+              <a:defRPr sz="1600">
                 <a:solidFill>
                   <a:schemeClr val="tx1">
-                    <a:tint val="75000"/>
+                    <a:tint val="82000"/>
                   </a:schemeClr>
                 </a:solidFill>
               </a:defRPr>
@@ -2435,7 +2469,7 @@
           <a:p>
             <a:pPr lvl="0"/>
             <a:r>
-              <a:rPr lang="en-US" smtClean="0"/>
+              <a:rPr lang="en-GB"/>
               <a:t>Click to edit Master text styles</a:t>
             </a:r>
           </a:p>
@@ -2443,7 +2477,13 @@
       </p:sp>
       <p:sp>
         <p:nvSpPr>
-          <p:cNvPr id="4" name="Date Placeholder 3"/>
+          <p:cNvPr id="4" name="Date Placeholder 3">
+            <a:extLst>
+              <a:ext uri="{FF2B5EF4-FFF2-40B4-BE49-F238E27FC236}">
+                <a16:creationId xmlns:a16="http://schemas.microsoft.com/office/drawing/2014/main" id="{D4345C56-8670-BACF-8582-D50807B7821A}"/>
+              </a:ext>
+            </a:extLst>
+          </p:cNvPr>
           <p:cNvSpPr>
             <a:spLocks noGrp="1"/>
           </p:cNvSpPr>
@@ -2458,7 +2498,7 @@
           <a:p>
             <a:fld id="{5BCAD085-E8A6-8845-BD4E-CB4CCA059FC4}" type="datetimeFigureOut">
               <a:rPr lang="en-US" smtClean="0"/>
-              <a:t>1/27/13</a:t>
+              <a:t>9/24/26</a:t>
             </a:fld>
             <a:endParaRPr lang="en-US"/>
           </a:p>
@@ -2466,7 +2506,13 @@
       </p:sp>
       <p:sp>
         <p:nvSpPr>
-          <p:cNvPr id="5" name="Footer Placeholder 4"/>
+          <p:cNvPr id="5" name="Footer Placeholder 4">
+            <a:extLst>
+              <a:ext uri="{FF2B5EF4-FFF2-40B4-BE49-F238E27FC236}">
+                <a16:creationId xmlns:a16="http://schemas.microsoft.com/office/drawing/2014/main" id="{45653531-2F3F-991A-D88F-619318611D88}"/>
+              </a:ext>
+            </a:extLst>
+          </p:cNvPr>
           <p:cNvSpPr>
             <a:spLocks noGrp="1"/>
           </p:cNvSpPr>
@@ -2485,7 +2531,13 @@
       </p:sp>
       <p:sp>
         <p:nvSpPr>
-          <p:cNvPr id="6" name="Slide Number Placeholder 5"/>
+          <p:cNvPr id="6" name="Slide Number Placeholder 5">
+            <a:extLst>
+              <a:ext uri="{FF2B5EF4-FFF2-40B4-BE49-F238E27FC236}">
+                <a16:creationId xmlns:a16="http://schemas.microsoft.com/office/drawing/2014/main" id="{2872F771-1C21-5697-979E-6C6677CA73AF}"/>
+              </a:ext>
+            </a:extLst>
+          </p:cNvPr>
           <p:cNvSpPr>
             <a:spLocks noGrp="1"/>
           </p:cNvSpPr>
@@ -2509,7 +2561,7 @@
     </p:spTree>
     <p:extLst>
       <p:ext uri="{BB962C8B-B14F-4D97-AF65-F5344CB8AC3E}">
-        <p14:creationId xmlns:p14="http://schemas.microsoft.com/office/powerpoint/2010/main" val="960648375"/>
+        <p14:creationId xmlns:p14="http://schemas.microsoft.com/office/powerpoint/2010/main" val="1690978473"/>
       </p:ext>
     </p:extLst>
   </p:cSld>
@@ -2538,7 +2590,13 @@
       </p:grpSpPr>
       <p:sp>
         <p:nvSpPr>
-          <p:cNvPr id="2" name="Title 1"/>
+          <p:cNvPr id="2" name="Title 1">
+            <a:extLst>
+              <a:ext uri="{FF2B5EF4-FFF2-40B4-BE49-F238E27FC236}">
+                <a16:creationId xmlns:a16="http://schemas.microsoft.com/office/drawing/2014/main" id="{CDFC415C-A467-6FD4-7519-75A672996FA3}"/>
+              </a:ext>
+            </a:extLst>
+          </p:cNvPr>
           <p:cNvSpPr>
             <a:spLocks noGrp="1"/>
           </p:cNvSpPr>
@@ -2552,16 +2610,22 @@
           <a:lstStyle/>
           <a:p>
             <a:r>
-              <a:rPr lang="en-US" smtClean="0"/>
+              <a:rPr lang="en-GB"/>
               <a:t>Click to edit Master title style</a:t>
             </a:r>
-            <a:endParaRPr lang="en-US"/>
-          </a:p>
-        </p:txBody>
-      </p:sp>
-      <p:sp>
-        <p:nvSpPr>
-          <p:cNvPr id="3" name="Content Placeholder 2"/>
+            <a:endParaRPr lang="en-DE"/>
+          </a:p>
+        </p:txBody>
+      </p:sp>
+      <p:sp>
+        <p:nvSpPr>
+          <p:cNvPr id="3" name="Content Placeholder 2">
+            <a:extLst>
+              <a:ext uri="{FF2B5EF4-FFF2-40B4-BE49-F238E27FC236}">
+                <a16:creationId xmlns:a16="http://schemas.microsoft.com/office/drawing/2014/main" id="{E53601C4-B7F4-01FD-C42A-67BF1E1DD594}"/>
+              </a:ext>
+            </a:extLst>
+          </p:cNvPr>
           <p:cNvSpPr>
             <a:spLocks noGrp="1"/>
           </p:cNvSpPr>
@@ -2571,82 +2635,60 @@
         </p:nvSpPr>
         <p:spPr>
           <a:xfrm>
-            <a:off x="457200" y="1600200"/>
-            <a:ext cx="4038600" cy="4525963"/>
+            <a:off x="838200" y="1825625"/>
+            <a:ext cx="5181600" cy="4351338"/>
           </a:xfrm>
         </p:spPr>
         <p:txBody>
           <a:bodyPr/>
-          <a:lstStyle>
-            <a:lvl1pPr>
-              <a:defRPr sz="2800"/>
-            </a:lvl1pPr>
-            <a:lvl2pPr>
-              <a:defRPr sz="2400"/>
-            </a:lvl2pPr>
-            <a:lvl3pPr>
-              <a:defRPr sz="2000"/>
-            </a:lvl3pPr>
-            <a:lvl4pPr>
-              <a:defRPr sz="1800"/>
-            </a:lvl4pPr>
-            <a:lvl5pPr>
-              <a:defRPr sz="1800"/>
-            </a:lvl5pPr>
-            <a:lvl6pPr>
-              <a:defRPr sz="1800"/>
-            </a:lvl6pPr>
-            <a:lvl7pPr>
-              <a:defRPr sz="1800"/>
-            </a:lvl7pPr>
-            <a:lvl8pPr>
-              <a:defRPr sz="1800"/>
-            </a:lvl8pPr>
-            <a:lvl9pPr>
-              <a:defRPr sz="1800"/>
-            </a:lvl9pPr>
-          </a:lstStyle>
+          <a:lstStyle/>
           <a:p>
             <a:pPr lvl="0"/>
             <a:r>
-              <a:rPr lang="en-US" smtClean="0"/>
+              <a:rPr lang="en-GB"/>
               <a:t>Click to edit Master text styles</a:t>
             </a:r>
           </a:p>
           <a:p>
             <a:pPr lvl="1"/>
             <a:r>
-              <a:rPr lang="en-US" smtClean="0"/>
+              <a:rPr lang="en-GB"/>
               <a:t>Second level</a:t>
             </a:r>
           </a:p>
           <a:p>
             <a:pPr lvl="2"/>
             <a:r>
-              <a:rPr lang="en-US" smtClean="0"/>
+              <a:rPr lang="en-GB"/>
               <a:t>Third level</a:t>
             </a:r>
           </a:p>
           <a:p>
             <a:pPr lvl="3"/>
             <a:r>
-              <a:rPr lang="en-US" smtClean="0"/>
+              <a:rPr lang="en-GB"/>
               <a:t>Fourth level</a:t>
             </a:r>
           </a:p>
           <a:p>
             <a:pPr lvl="4"/>
             <a:r>
-              <a:rPr lang="en-US" smtClean="0"/>
+              <a:rPr lang="en-GB"/>
               <a:t>Fifth level</a:t>
             </a:r>
-            <a:endParaRPr lang="en-US"/>
-          </a:p>
-        </p:txBody>
-      </p:sp>
-      <p:sp>
-        <p:nvSpPr>
-          <p:cNvPr id="4" name="Content Placeholder 3"/>
+            <a:endParaRPr lang="en-DE"/>
+          </a:p>
+        </p:txBody>
+      </p:sp>
+      <p:sp>
+        <p:nvSpPr>
+          <p:cNvPr id="4" name="Content Placeholder 3">
+            <a:extLst>
+              <a:ext uri="{FF2B5EF4-FFF2-40B4-BE49-F238E27FC236}">
+                <a16:creationId xmlns:a16="http://schemas.microsoft.com/office/drawing/2014/main" id="{AD481752-86FE-1418-70B4-8A70EC5F7DFE}"/>
+              </a:ext>
+            </a:extLst>
+          </p:cNvPr>
           <p:cNvSpPr>
             <a:spLocks noGrp="1"/>
           </p:cNvSpPr>
@@ -2656,82 +2698,60 @@
         </p:nvSpPr>
         <p:spPr>
           <a:xfrm>
-            <a:off x="4648200" y="1600200"/>
-            <a:ext cx="4038600" cy="4525963"/>
+            <a:off x="6172200" y="1825625"/>
+            <a:ext cx="5181600" cy="4351338"/>
           </a:xfrm>
         </p:spPr>
         <p:txBody>
           <a:bodyPr/>
-          <a:lstStyle>
-            <a:lvl1pPr>
-              <a:defRPr sz="2800"/>
-            </a:lvl1pPr>
-            <a:lvl2pPr>
-              <a:defRPr sz="2400"/>
-            </a:lvl2pPr>
-            <a:lvl3pPr>
-              <a:defRPr sz="2000"/>
-            </a:lvl3pPr>
-            <a:lvl4pPr>
-              <a:defRPr sz="1800"/>
-            </a:lvl4pPr>
-            <a:lvl5pPr>
-              <a:defRPr sz="1800"/>
-            </a:lvl5pPr>
-            <a:lvl6pPr>
-              <a:defRPr sz="1800"/>
-            </a:lvl6pPr>
-            <a:lvl7pPr>
-              <a:defRPr sz="1800"/>
-            </a:lvl7pPr>
-            <a:lvl8pPr>
-              <a:defRPr sz="1800"/>
-            </a:lvl8pPr>
-            <a:lvl9pPr>
-              <a:defRPr sz="1800"/>
-            </a:lvl9pPr>
-          </a:lstStyle>
+          <a:lstStyle/>
           <a:p>
             <a:pPr lvl="0"/>
             <a:r>
-              <a:rPr lang="en-US" smtClean="0"/>
+              <a:rPr lang="en-GB"/>
               <a:t>Click to edit Master text styles</a:t>
             </a:r>
           </a:p>
           <a:p>
             <a:pPr lvl="1"/>
             <a:r>
-              <a:rPr lang="en-US" smtClean="0"/>
+              <a:rPr lang="en-GB"/>
               <a:t>Second level</a:t>
             </a:r>
           </a:p>
           <a:p>
             <a:pPr lvl="2"/>
             <a:r>
-              <a:rPr lang="en-US" smtClean="0"/>
+              <a:rPr lang="en-GB"/>
               <a:t>Third level</a:t>
             </a:r>
           </a:p>
           <a:p>
             <a:pPr lvl="3"/>
             <a:r>
-              <a:rPr lang="en-US" smtClean="0"/>
+              <a:rPr lang="en-GB"/>
               <a:t>Fourth level</a:t>
             </a:r>
           </a:p>
           <a:p>
             <a:pPr lvl="4"/>
             <a:r>
-              <a:rPr lang="en-US" smtClean="0"/>
+              <a:rPr lang="en-GB"/>
               <a:t>Fifth level</a:t>
             </a:r>
-            <a:endParaRPr lang="en-US"/>
-          </a:p>
-        </p:txBody>
-      </p:sp>
-      <p:sp>
-        <p:nvSpPr>
-          <p:cNvPr id="5" name="Date Placeholder 4"/>
+            <a:endParaRPr lang="en-DE"/>
+          </a:p>
+        </p:txBody>
+      </p:sp>
+      <p:sp>
+        <p:nvSpPr>
+          <p:cNvPr id="5" name="Date Placeholder 4">
+            <a:extLst>
+              <a:ext uri="{FF2B5EF4-FFF2-40B4-BE49-F238E27FC236}">
+                <a16:creationId xmlns:a16="http://schemas.microsoft.com/office/drawing/2014/main" id="{EB61D3AD-C5AB-D6CC-C691-A17F74F82BC3}"/>
+              </a:ext>
+            </a:extLst>
+          </p:cNvPr>
           <p:cNvSpPr>
             <a:spLocks noGrp="1"/>
           </p:cNvSpPr>
@@ -2746,7 +2766,7 @@
           <a:p>
             <a:fld id="{5BCAD085-E8A6-8845-BD4E-CB4CCA059FC4}" type="datetimeFigureOut">
               <a:rPr lang="en-US" smtClean="0"/>
-              <a:t>1/27/13</a:t>
+              <a:t>9/24/26</a:t>
             </a:fld>
             <a:endParaRPr lang="en-US"/>
           </a:p>
@@ -2754,7 +2774,13 @@
       </p:sp>
       <p:sp>
         <p:nvSpPr>
-          <p:cNvPr id="6" name="Footer Placeholder 5"/>
+          <p:cNvPr id="6" name="Footer Placeholder 5">
+            <a:extLst>
+              <a:ext uri="{FF2B5EF4-FFF2-40B4-BE49-F238E27FC236}">
+                <a16:creationId xmlns:a16="http://schemas.microsoft.com/office/drawing/2014/main" id="{8C1F35C6-D69B-5EEE-CFFB-B031E0CF7200}"/>
+              </a:ext>
+            </a:extLst>
+          </p:cNvPr>
           <p:cNvSpPr>
             <a:spLocks noGrp="1"/>
           </p:cNvSpPr>
@@ -2773,7 +2799,13 @@
       </p:sp>
       <p:sp>
         <p:nvSpPr>
-          <p:cNvPr id="7" name="Slide Number Placeholder 6"/>
+          <p:cNvPr id="7" name="Slide Number Placeholder 6">
+            <a:extLst>
+              <a:ext uri="{FF2B5EF4-FFF2-40B4-BE49-F238E27FC236}">
+                <a16:creationId xmlns:a16="http://schemas.microsoft.com/office/drawing/2014/main" id="{370E0ED5-48E7-805F-32CC-2D6E732F2E3E}"/>
+              </a:ext>
+            </a:extLst>
+          </p:cNvPr>
           <p:cNvSpPr>
             <a:spLocks noGrp="1"/>
           </p:cNvSpPr>
@@ -2797,7 +2829,7 @@
     </p:spTree>
     <p:extLst>
       <p:ext uri="{BB962C8B-B14F-4D97-AF65-F5344CB8AC3E}">
-        <p14:creationId xmlns:p14="http://schemas.microsoft.com/office/powerpoint/2010/main" val="2782244947"/>
+        <p14:creationId xmlns:p14="http://schemas.microsoft.com/office/powerpoint/2010/main" val="1508622265"/>
       </p:ext>
     </p:extLst>
   </p:cSld>
@@ -2826,7 +2858,13 @@
       </p:grpSpPr>
       <p:sp>
         <p:nvSpPr>
-          <p:cNvPr id="2" name="Title 1"/>
+          <p:cNvPr id="2" name="Title 1">
+            <a:extLst>
+              <a:ext uri="{FF2B5EF4-FFF2-40B4-BE49-F238E27FC236}">
+                <a16:creationId xmlns:a16="http://schemas.microsoft.com/office/drawing/2014/main" id="{47482981-65F5-2924-7706-7247A80B9405}"/>
+              </a:ext>
+            </a:extLst>
+          </p:cNvPr>
           <p:cNvSpPr>
             <a:spLocks noGrp="1"/>
           </p:cNvSpPr>
@@ -2834,26 +2872,33 @@
             <p:ph type="title"/>
           </p:nvPr>
         </p:nvSpPr>
-        <p:spPr/>
+        <p:spPr>
+          <a:xfrm>
+            <a:off x="839788" y="365125"/>
+            <a:ext cx="10515600" cy="1325563"/>
+          </a:xfrm>
+        </p:spPr>
         <p:txBody>
           <a:bodyPr/>
-          <a:lstStyle>
-            <a:lvl1pPr>
-              <a:defRPr/>
-            </a:lvl1pPr>
-          </a:lstStyle>
-          <a:p>
-            <a:r>
-              <a:rPr lang="en-US" smtClean="0"/>
+          <a:lstStyle/>
+          <a:p>
+            <a:r>
+              <a:rPr lang="en-GB"/>
               <a:t>Click to edit Master title style</a:t>
             </a:r>
-            <a:endParaRPr lang="en-US"/>
-          </a:p>
-        </p:txBody>
-      </p:sp>
-      <p:sp>
-        <p:nvSpPr>
-          <p:cNvPr id="3" name="Text Placeholder 2"/>
+            <a:endParaRPr lang="en-DE"/>
+          </a:p>
+        </p:txBody>
+      </p:sp>
+      <p:sp>
+        <p:nvSpPr>
+          <p:cNvPr id="3" name="Text Placeholder 2">
+            <a:extLst>
+              <a:ext uri="{FF2B5EF4-FFF2-40B4-BE49-F238E27FC236}">
+                <a16:creationId xmlns:a16="http://schemas.microsoft.com/office/drawing/2014/main" id="{2A1A277E-F1F7-8594-5670-BBAD77BAD1B5}"/>
+              </a:ext>
+            </a:extLst>
+          </p:cNvPr>
           <p:cNvSpPr>
             <a:spLocks noGrp="1"/>
           </p:cNvSpPr>
@@ -2863,8 +2908,8 @@
         </p:nvSpPr>
         <p:spPr>
           <a:xfrm>
-            <a:off x="457200" y="1535113"/>
-            <a:ext cx="4040188" cy="639762"/>
+            <a:off x="839788" y="1681163"/>
+            <a:ext cx="5157787" cy="823912"/>
           </a:xfrm>
         </p:spPr>
         <p:txBody>
@@ -2910,7 +2955,7 @@
           <a:p>
             <a:pPr lvl="0"/>
             <a:r>
-              <a:rPr lang="en-US" smtClean="0"/>
+              <a:rPr lang="en-GB"/>
               <a:t>Click to edit Master text styles</a:t>
             </a:r>
           </a:p>
@@ -2918,7 +2963,13 @@
       </p:sp>
       <p:sp>
         <p:nvSpPr>
-          <p:cNvPr id="4" name="Content Placeholder 3"/>
+          <p:cNvPr id="4" name="Content Placeholder 3">
+            <a:extLst>
+              <a:ext uri="{FF2B5EF4-FFF2-40B4-BE49-F238E27FC236}">
+                <a16:creationId xmlns:a16="http://schemas.microsoft.com/office/drawing/2014/main" id="{A32F51F8-BB0E-4D7F-BE22-49211C5DB54D}"/>
+              </a:ext>
+            </a:extLst>
+          </p:cNvPr>
           <p:cNvSpPr>
             <a:spLocks noGrp="1"/>
           </p:cNvSpPr>
@@ -2928,82 +2979,60 @@
         </p:nvSpPr>
         <p:spPr>
           <a:xfrm>
-            <a:off x="457200" y="2174875"/>
-            <a:ext cx="4040188" cy="3951288"/>
+            <a:off x="839788" y="2505075"/>
+            <a:ext cx="5157787" cy="3684588"/>
           </a:xfrm>
         </p:spPr>
         <p:txBody>
           <a:bodyPr/>
-          <a:lstStyle>
-            <a:lvl1pPr>
-              <a:defRPr sz="2400"/>
-            </a:lvl1pPr>
-            <a:lvl2pPr>
-              <a:defRPr sz="2000"/>
-            </a:lvl2pPr>
-            <a:lvl3pPr>
-              <a:defRPr sz="1800"/>
-            </a:lvl3pPr>
-            <a:lvl4pPr>
-              <a:defRPr sz="1600"/>
-            </a:lvl4pPr>
-            <a:lvl5pPr>
-              <a:defRPr sz="1600"/>
-            </a:lvl5pPr>
-            <a:lvl6pPr>
-              <a:defRPr sz="1600"/>
-            </a:lvl6pPr>
-            <a:lvl7pPr>
-              <a:defRPr sz="1600"/>
-            </a:lvl7pPr>
-            <a:lvl8pPr>
-              <a:defRPr sz="1600"/>
-            </a:lvl8pPr>
-            <a:lvl9pPr>
-              <a:defRPr sz="1600"/>
-            </a:lvl9pPr>
-          </a:lstStyle>
+          <a:lstStyle/>
           <a:p>
             <a:pPr lvl="0"/>
             <a:r>
-              <a:rPr lang="en-US" smtClean="0"/>
+              <a:rPr lang="en-GB"/>
               <a:t>Click to edit Master text styles</a:t>
             </a:r>
           </a:p>
           <a:p>
             <a:pPr lvl="1"/>
             <a:r>
-              <a:rPr lang="en-US" smtClean="0"/>
+              <a:rPr lang="en-GB"/>
               <a:t>Second level</a:t>
             </a:r>
           </a:p>
           <a:p>
             <a:pPr lvl="2"/>
             <a:r>
-              <a:rPr lang="en-US" smtClean="0"/>
+              <a:rPr lang="en-GB"/>
               <a:t>Third level</a:t>
             </a:r>
           </a:p>
           <a:p>
             <a:pPr lvl="3"/>
             <a:r>
-              <a:rPr lang="en-US" smtClean="0"/>
+              <a:rPr lang="en-GB"/>
               <a:t>Fourth level</a:t>
             </a:r>
           </a:p>
           <a:p>
             <a:pPr lvl="4"/>
             <a:r>
-              <a:rPr lang="en-US" smtClean="0"/>
+              <a:rPr lang="en-GB"/>
               <a:t>Fifth level</a:t>
             </a:r>
-            <a:endParaRPr lang="en-US"/>
-          </a:p>
-        </p:txBody>
-      </p:sp>
-      <p:sp>
-        <p:nvSpPr>
-          <p:cNvPr id="5" name="Text Placeholder 4"/>
+            <a:endParaRPr lang="en-DE"/>
+          </a:p>
+        </p:txBody>
+      </p:sp>
+      <p:sp>
+        <p:nvSpPr>
+          <p:cNvPr id="5" name="Text Placeholder 4">
+            <a:extLst>
+              <a:ext uri="{FF2B5EF4-FFF2-40B4-BE49-F238E27FC236}">
+                <a16:creationId xmlns:a16="http://schemas.microsoft.com/office/drawing/2014/main" id="{2B7788E6-E381-AB01-1523-CD2BB0F3311A}"/>
+              </a:ext>
+            </a:extLst>
+          </p:cNvPr>
           <p:cNvSpPr>
             <a:spLocks noGrp="1"/>
           </p:cNvSpPr>
@@ -3013,8 +3042,8 @@
         </p:nvSpPr>
         <p:spPr>
           <a:xfrm>
-            <a:off x="4645025" y="1535113"/>
-            <a:ext cx="4041775" cy="639762"/>
+            <a:off x="6172200" y="1681163"/>
+            <a:ext cx="5183188" cy="823912"/>
           </a:xfrm>
         </p:spPr>
         <p:txBody>
@@ -3060,7 +3089,7 @@
           <a:p>
             <a:pPr lvl="0"/>
             <a:r>
-              <a:rPr lang="en-US" smtClean="0"/>
+              <a:rPr lang="en-GB"/>
               <a:t>Click to edit Master text styles</a:t>
             </a:r>
           </a:p>
@@ -3068,7 +3097,13 @@
       </p:sp>
       <p:sp>
         <p:nvSpPr>
-          <p:cNvPr id="6" name="Content Placeholder 5"/>
+          <p:cNvPr id="6" name="Content Placeholder 5">
+            <a:extLst>
+              <a:ext uri="{FF2B5EF4-FFF2-40B4-BE49-F238E27FC236}">
+                <a16:creationId xmlns:a16="http://schemas.microsoft.com/office/drawing/2014/main" id="{A23852FF-D631-4928-3339-3C9C2D8A8F84}"/>
+              </a:ext>
+            </a:extLst>
+          </p:cNvPr>
           <p:cNvSpPr>
             <a:spLocks noGrp="1"/>
           </p:cNvSpPr>
@@ -3078,82 +3113,60 @@
         </p:nvSpPr>
         <p:spPr>
           <a:xfrm>
-            <a:off x="4645025" y="2174875"/>
-            <a:ext cx="4041775" cy="3951288"/>
+            <a:off x="6172200" y="2505075"/>
+            <a:ext cx="5183188" cy="3684588"/>
           </a:xfrm>
         </p:spPr>
         <p:txBody>
           <a:bodyPr/>
-          <a:lstStyle>
-            <a:lvl1pPr>
-              <a:defRPr sz="2400"/>
-            </a:lvl1pPr>
-            <a:lvl2pPr>
-              <a:defRPr sz="2000"/>
-            </a:lvl2pPr>
-            <a:lvl3pPr>
-              <a:defRPr sz="1800"/>
-            </a:lvl3pPr>
-            <a:lvl4pPr>
-              <a:defRPr sz="1600"/>
-            </a:lvl4pPr>
-            <a:lvl5pPr>
-              <a:defRPr sz="1600"/>
-            </a:lvl5pPr>
-            <a:lvl6pPr>
-              <a:defRPr sz="1600"/>
-            </a:lvl6pPr>
-            <a:lvl7pPr>
-              <a:defRPr sz="1600"/>
-            </a:lvl7pPr>
-            <a:lvl8pPr>
-              <a:defRPr sz="1600"/>
-            </a:lvl8pPr>
-            <a:lvl9pPr>
-              <a:defRPr sz="1600"/>
-            </a:lvl9pPr>
-          </a:lstStyle>
+          <a:lstStyle/>
           <a:p>
             <a:pPr lvl="0"/>
             <a:r>
-              <a:rPr lang="en-US" smtClean="0"/>
+              <a:rPr lang="en-GB"/>
               <a:t>Click to edit Master text styles</a:t>
             </a:r>
           </a:p>
           <a:p>
             <a:pPr lvl="1"/>
             <a:r>
-              <a:rPr lang="en-US" smtClean="0"/>
+              <a:rPr lang="en-GB"/>
               <a:t>Second level</a:t>
             </a:r>
           </a:p>
           <a:p>
             <a:pPr lvl="2"/>
             <a:r>
-              <a:rPr lang="en-US" smtClean="0"/>
+              <a:rPr lang="en-GB"/>
               <a:t>Third level</a:t>
             </a:r>
           </a:p>
           <a:p>
             <a:pPr lvl="3"/>
             <a:r>
-              <a:rPr lang="en-US" smtClean="0"/>
+              <a:rPr lang="en-GB"/>
               <a:t>Fourth level</a:t>
             </a:r>
           </a:p>
           <a:p>
             <a:pPr lvl="4"/>
             <a:r>
-              <a:rPr lang="en-US" smtClean="0"/>
+              <a:rPr lang="en-GB"/>
               <a:t>Fifth level</a:t>
             </a:r>
-            <a:endParaRPr lang="en-US"/>
-          </a:p>
-        </p:txBody>
-      </p:sp>
-      <p:sp>
-        <p:nvSpPr>
-          <p:cNvPr id="7" name="Date Placeholder 6"/>
+            <a:endParaRPr lang="en-DE"/>
+          </a:p>
+        </p:txBody>
+      </p:sp>
+      <p:sp>
+        <p:nvSpPr>
+          <p:cNvPr id="7" name="Date Placeholder 6">
+            <a:extLst>
+              <a:ext uri="{FF2B5EF4-FFF2-40B4-BE49-F238E27FC236}">
+                <a16:creationId xmlns:a16="http://schemas.microsoft.com/office/drawing/2014/main" id="{B4B9FE06-9FAF-ACA5-B60D-08E1A892FC55}"/>
+              </a:ext>
+            </a:extLst>
+          </p:cNvPr>
           <p:cNvSpPr>
             <a:spLocks noGrp="1"/>
           </p:cNvSpPr>
@@ -3168,7 +3181,7 @@
           <a:p>
             <a:fld id="{5BCAD085-E8A6-8845-BD4E-CB4CCA059FC4}" type="datetimeFigureOut">
               <a:rPr lang="en-US" smtClean="0"/>
-              <a:t>1/27/13</a:t>
+              <a:t>9/24/26</a:t>
             </a:fld>
             <a:endParaRPr lang="en-US"/>
           </a:p>
@@ -3176,7 +3189,13 @@
       </p:sp>
       <p:sp>
         <p:nvSpPr>
-          <p:cNvPr id="8" name="Footer Placeholder 7"/>
+          <p:cNvPr id="8" name="Footer Placeholder 7">
+            <a:extLst>
+              <a:ext uri="{FF2B5EF4-FFF2-40B4-BE49-F238E27FC236}">
+                <a16:creationId xmlns:a16="http://schemas.microsoft.com/office/drawing/2014/main" id="{A9C00B30-6C9C-FC31-D2B4-84F592649321}"/>
+              </a:ext>
+            </a:extLst>
+          </p:cNvPr>
           <p:cNvSpPr>
             <a:spLocks noGrp="1"/>
           </p:cNvSpPr>
@@ -3195,7 +3214,13 @@
       </p:sp>
       <p:sp>
         <p:nvSpPr>
-          <p:cNvPr id="9" name="Slide Number Placeholder 8"/>
+          <p:cNvPr id="9" name="Slide Number Placeholder 8">
+            <a:extLst>
+              <a:ext uri="{FF2B5EF4-FFF2-40B4-BE49-F238E27FC236}">
+                <a16:creationId xmlns:a16="http://schemas.microsoft.com/office/drawing/2014/main" id="{607E2918-419B-70DF-CC89-BDBAD4216806}"/>
+              </a:ext>
+            </a:extLst>
+          </p:cNvPr>
           <p:cNvSpPr>
             <a:spLocks noGrp="1"/>
           </p:cNvSpPr>
@@ -3219,7 +3244,7 @@
     </p:spTree>
     <p:extLst>
       <p:ext uri="{BB962C8B-B14F-4D97-AF65-F5344CB8AC3E}">
-        <p14:creationId xmlns:p14="http://schemas.microsoft.com/office/powerpoint/2010/main" val="990158736"/>
+        <p14:creationId xmlns:p14="http://schemas.microsoft.com/office/powerpoint/2010/main" val="4146886352"/>
       </p:ext>
     </p:extLst>
   </p:cSld>
@@ -3248,7 +3273,13 @@
       </p:grpSpPr>
       <p:sp>
         <p:nvSpPr>
-          <p:cNvPr id="2" name="Title 1"/>
+          <p:cNvPr id="2" name="Title 1">
+            <a:extLst>
+              <a:ext uri="{FF2B5EF4-FFF2-40B4-BE49-F238E27FC236}">
+                <a16:creationId xmlns:a16="http://schemas.microsoft.com/office/drawing/2014/main" id="{5BE84489-57AE-2D3A-8A78-CD13AF714BE2}"/>
+              </a:ext>
+            </a:extLst>
+          </p:cNvPr>
           <p:cNvSpPr>
             <a:spLocks noGrp="1"/>
           </p:cNvSpPr>
@@ -3262,16 +3293,22 @@
           <a:lstStyle/>
           <a:p>
             <a:r>
-              <a:rPr lang="en-US" smtClean="0"/>
+              <a:rPr lang="en-GB"/>
               <a:t>Click to edit Master title style</a:t>
             </a:r>
-            <a:endParaRPr lang="en-US"/>
-          </a:p>
-        </p:txBody>
-      </p:sp>
-      <p:sp>
-        <p:nvSpPr>
-          <p:cNvPr id="3" name="Date Placeholder 2"/>
+            <a:endParaRPr lang="en-DE"/>
+          </a:p>
+        </p:txBody>
+      </p:sp>
+      <p:sp>
+        <p:nvSpPr>
+          <p:cNvPr id="3" name="Date Placeholder 2">
+            <a:extLst>
+              <a:ext uri="{FF2B5EF4-FFF2-40B4-BE49-F238E27FC236}">
+                <a16:creationId xmlns:a16="http://schemas.microsoft.com/office/drawing/2014/main" id="{7AEBC8C2-D078-2F33-2981-6AFC6660709D}"/>
+              </a:ext>
+            </a:extLst>
+          </p:cNvPr>
           <p:cNvSpPr>
             <a:spLocks noGrp="1"/>
           </p:cNvSpPr>
@@ -3286,7 +3323,7 @@
           <a:p>
             <a:fld id="{5BCAD085-E8A6-8845-BD4E-CB4CCA059FC4}" type="datetimeFigureOut">
               <a:rPr lang="en-US" smtClean="0"/>
-              <a:t>1/27/13</a:t>
+              <a:t>9/24/26</a:t>
             </a:fld>
             <a:endParaRPr lang="en-US"/>
           </a:p>
@@ -3294,7 +3331,13 @@
       </p:sp>
       <p:sp>
         <p:nvSpPr>
-          <p:cNvPr id="4" name="Footer Placeholder 3"/>
+          <p:cNvPr id="4" name="Footer Placeholder 3">
+            <a:extLst>
+              <a:ext uri="{FF2B5EF4-FFF2-40B4-BE49-F238E27FC236}">
+                <a16:creationId xmlns:a16="http://schemas.microsoft.com/office/drawing/2014/main" id="{4C773EA3-A8CE-C038-79A1-6F0E4A3A1F8D}"/>
+              </a:ext>
+            </a:extLst>
+          </p:cNvPr>
           <p:cNvSpPr>
             <a:spLocks noGrp="1"/>
           </p:cNvSpPr>
@@ -3313,7 +3356,13 @@
       </p:sp>
       <p:sp>
         <p:nvSpPr>
-          <p:cNvPr id="5" name="Slide Number Placeholder 4"/>
+          <p:cNvPr id="5" name="Slide Number Placeholder 4">
+            <a:extLst>
+              <a:ext uri="{FF2B5EF4-FFF2-40B4-BE49-F238E27FC236}">
+                <a16:creationId xmlns:a16="http://schemas.microsoft.com/office/drawing/2014/main" id="{93D095D1-EF75-A99E-C089-3FE7A2D2B54F}"/>
+              </a:ext>
+            </a:extLst>
+          </p:cNvPr>
           <p:cNvSpPr>
             <a:spLocks noGrp="1"/>
           </p:cNvSpPr>
@@ -3337,7 +3386,7 @@
     </p:spTree>
     <p:extLst>
       <p:ext uri="{BB962C8B-B14F-4D97-AF65-F5344CB8AC3E}">
-        <p14:creationId xmlns:p14="http://schemas.microsoft.com/office/powerpoint/2010/main" val="727027711"/>
+        <p14:creationId xmlns:p14="http://schemas.microsoft.com/office/powerpoint/2010/main" val="985394005"/>
       </p:ext>
     </p:extLst>
   </p:cSld>
@@ -3366,7 +3415,13 @@
       </p:grpSpPr>
       <p:sp>
         <p:nvSpPr>
-          <p:cNvPr id="2" name="Date Placeholder 1"/>
+          <p:cNvPr id="2" name="Date Placeholder 1">
+            <a:extLst>
+              <a:ext uri="{FF2B5EF4-FFF2-40B4-BE49-F238E27FC236}">
+                <a16:creationId xmlns:a16="http://schemas.microsoft.com/office/drawing/2014/main" id="{44D7E37A-C0A0-3C61-DA56-93486DD19E28}"/>
+              </a:ext>
+            </a:extLst>
+          </p:cNvPr>
           <p:cNvSpPr>
             <a:spLocks noGrp="1"/>
           </p:cNvSpPr>
@@ -3381,7 +3436,7 @@
           <a:p>
             <a:fld id="{5BCAD085-E8A6-8845-BD4E-CB4CCA059FC4}" type="datetimeFigureOut">
               <a:rPr lang="en-US" smtClean="0"/>
-              <a:t>1/27/13</a:t>
+              <a:t>9/24/26</a:t>
             </a:fld>
             <a:endParaRPr lang="en-US"/>
           </a:p>
@@ -3389,7 +3444,13 @@
       </p:sp>
       <p:sp>
         <p:nvSpPr>
-          <p:cNvPr id="3" name="Footer Placeholder 2"/>
+          <p:cNvPr id="3" name="Footer Placeholder 2">
+            <a:extLst>
+              <a:ext uri="{FF2B5EF4-FFF2-40B4-BE49-F238E27FC236}">
+                <a16:creationId xmlns:a16="http://schemas.microsoft.com/office/drawing/2014/main" id="{C6A6C5AF-9999-2579-676E-67C7FED32B65}"/>
+              </a:ext>
+            </a:extLst>
+          </p:cNvPr>
           <p:cNvSpPr>
             <a:spLocks noGrp="1"/>
           </p:cNvSpPr>
@@ -3408,7 +3469,13 @@
       </p:sp>
       <p:sp>
         <p:nvSpPr>
-          <p:cNvPr id="4" name="Slide Number Placeholder 3"/>
+          <p:cNvPr id="4" name="Slide Number Placeholder 3">
+            <a:extLst>
+              <a:ext uri="{FF2B5EF4-FFF2-40B4-BE49-F238E27FC236}">
+                <a16:creationId xmlns:a16="http://schemas.microsoft.com/office/drawing/2014/main" id="{F4ED151C-797D-F9B7-660B-F5F8E76B00B2}"/>
+              </a:ext>
+            </a:extLst>
+          </p:cNvPr>
           <p:cNvSpPr>
             <a:spLocks noGrp="1"/>
           </p:cNvSpPr>
@@ -3432,7 +3499,7 @@
     </p:spTree>
     <p:extLst>
       <p:ext uri="{BB962C8B-B14F-4D97-AF65-F5344CB8AC3E}">
-        <p14:creationId xmlns:p14="http://schemas.microsoft.com/office/powerpoint/2010/main" val="1212999818"/>
+        <p14:creationId xmlns:p14="http://schemas.microsoft.com/office/powerpoint/2010/main" val="726716720"/>
       </p:ext>
     </p:extLst>
   </p:cSld>
@@ -3461,7 +3528,13 @@
       </p:grpSpPr>
       <p:sp>
         <p:nvSpPr>
-          <p:cNvPr id="2" name="Title 1"/>
+          <p:cNvPr id="2" name="Title 1">
+            <a:extLst>
+              <a:ext uri="{FF2B5EF4-FFF2-40B4-BE49-F238E27FC236}">
+                <a16:creationId xmlns:a16="http://schemas.microsoft.com/office/drawing/2014/main" id="{DF92DB4C-3F1E-505A-35B2-F28870F2FED9}"/>
+              </a:ext>
+            </a:extLst>
+          </p:cNvPr>
           <p:cNvSpPr>
             <a:spLocks noGrp="1"/>
           </p:cNvSpPr>
@@ -3471,29 +3544,35 @@
         </p:nvSpPr>
         <p:spPr>
           <a:xfrm>
-            <a:off x="457200" y="273050"/>
-            <a:ext cx="3008313" cy="1162050"/>
+            <a:off x="839788" y="457200"/>
+            <a:ext cx="3932237" cy="1600200"/>
           </a:xfrm>
         </p:spPr>
         <p:txBody>
           <a:bodyPr anchor="b"/>
           <a:lstStyle>
-            <a:lvl1pPr algn="l">
-              <a:defRPr sz="2000" b="1"/>
+            <a:lvl1pPr>
+              <a:defRPr sz="3200"/>
             </a:lvl1pPr>
           </a:lstStyle>
           <a:p>
             <a:r>
-              <a:rPr lang="en-US" smtClean="0"/>
+              <a:rPr lang="en-GB"/>
               <a:t>Click to edit Master title style</a:t>
             </a:r>
-            <a:endParaRPr lang="en-US"/>
-          </a:p>
-        </p:txBody>
-      </p:sp>
-      <p:sp>
-        <p:nvSpPr>
-          <p:cNvPr id="3" name="Content Placeholder 2"/>
+            <a:endParaRPr lang="en-DE"/>
+          </a:p>
+        </p:txBody>
+      </p:sp>
+      <p:sp>
+        <p:nvSpPr>
+          <p:cNvPr id="3" name="Content Placeholder 2">
+            <a:extLst>
+              <a:ext uri="{FF2B5EF4-FFF2-40B4-BE49-F238E27FC236}">
+                <a16:creationId xmlns:a16="http://schemas.microsoft.com/office/drawing/2014/main" id="{2F70B54B-25AD-CE73-AEB8-80AEE9463AC5}"/>
+              </a:ext>
+            </a:extLst>
+          </p:cNvPr>
           <p:cNvSpPr>
             <a:spLocks noGrp="1"/>
           </p:cNvSpPr>
@@ -3503,8 +3582,8 @@
         </p:nvSpPr>
         <p:spPr>
           <a:xfrm>
-            <a:off x="3575050" y="273050"/>
-            <a:ext cx="5111750" cy="5853113"/>
+            <a:off x="5183188" y="987425"/>
+            <a:ext cx="6172200" cy="4873625"/>
           </a:xfrm>
         </p:spPr>
         <p:txBody>
@@ -3541,44 +3620,50 @@
           <a:p>
             <a:pPr lvl="0"/>
             <a:r>
-              <a:rPr lang="en-US" smtClean="0"/>
+              <a:rPr lang="en-GB"/>
               <a:t>Click to edit Master text styles</a:t>
             </a:r>
           </a:p>
           <a:p>
             <a:pPr lvl="1"/>
             <a:r>
-              <a:rPr lang="en-US" smtClean="0"/>
+              <a:rPr lang="en-GB"/>
               <a:t>Second level</a:t>
             </a:r>
           </a:p>
           <a:p>
             <a:pPr lvl="2"/>
             <a:r>
-              <a:rPr lang="en-US" smtClean="0"/>
+              <a:rPr lang="en-GB"/>
               <a:t>Third level</a:t>
             </a:r>
           </a:p>
           <a:p>
             <a:pPr lvl="3"/>
             <a:r>
-              <a:rPr lang="en-US" smtClean="0"/>
+              <a:rPr lang="en-GB"/>
               <a:t>Fourth level</a:t>
             </a:r>
           </a:p>
           <a:p>
             <a:pPr lvl="4"/>
             <a:r>
-              <a:rPr lang="en-US" smtClean="0"/>
+              <a:rPr lang="en-GB"/>
               <a:t>Fifth level</a:t>
             </a:r>
-            <a:endParaRPr lang="en-US"/>
-          </a:p>
-        </p:txBody>
-      </p:sp>
-      <p:sp>
-        <p:nvSpPr>
-          <p:cNvPr id="4" name="Text Placeholder 3"/>
+            <a:endParaRPr lang="en-DE"/>
+          </a:p>
+        </p:txBody>
+      </p:sp>
+      <p:sp>
+        <p:nvSpPr>
+          <p:cNvPr id="4" name="Text Placeholder 3">
+            <a:extLst>
+              <a:ext uri="{FF2B5EF4-FFF2-40B4-BE49-F238E27FC236}">
+                <a16:creationId xmlns:a16="http://schemas.microsoft.com/office/drawing/2014/main" id="{35534269-2340-A235-24C9-33CE9E4015BD}"/>
+              </a:ext>
+            </a:extLst>
+          </p:cNvPr>
           <p:cNvSpPr>
             <a:spLocks noGrp="1"/>
           </p:cNvSpPr>
@@ -3588,8 +3673,8 @@
         </p:nvSpPr>
         <p:spPr>
           <a:xfrm>
-            <a:off x="457200" y="1435100"/>
-            <a:ext cx="3008313" cy="4691063"/>
+            <a:off x="839788" y="2057400"/>
+            <a:ext cx="3932237" cy="3811588"/>
           </a:xfrm>
         </p:spPr>
         <p:txBody>
@@ -3597,45 +3682,45 @@
           <a:lstStyle>
             <a:lvl1pPr marL="0" indent="0">
               <a:buNone/>
-              <a:defRPr sz="1400"/>
+              <a:defRPr sz="1600"/>
             </a:lvl1pPr>
             <a:lvl2pPr marL="457200" indent="0">
               <a:buNone/>
-              <a:defRPr sz="1200"/>
+              <a:defRPr sz="1400"/>
             </a:lvl2pPr>
             <a:lvl3pPr marL="914400" indent="0">
               <a:buNone/>
-              <a:defRPr sz="1000"/>
+              <a:defRPr sz="1200"/>
             </a:lvl3pPr>
             <a:lvl4pPr marL="1371600" indent="0">
               <a:buNone/>
-              <a:defRPr sz="900"/>
+              <a:defRPr sz="1000"/>
             </a:lvl4pPr>
             <a:lvl5pPr marL="1828800" indent="0">
               <a:buNone/>
-              <a:defRPr sz="900"/>
+              <a:defRPr sz="1000"/>
             </a:lvl5pPr>
             <a:lvl6pPr marL="2286000" indent="0">
               <a:buNone/>
-              <a:defRPr sz="900"/>
+              <a:defRPr sz="1000"/>
             </a:lvl6pPr>
             <a:lvl7pPr marL="2743200" indent="0">
               <a:buNone/>
-              <a:defRPr sz="900"/>
+              <a:defRPr sz="1000"/>
             </a:lvl7pPr>
             <a:lvl8pPr marL="3200400" indent="0">
               <a:buNone/>
-              <a:defRPr sz="900"/>
+              <a:defRPr sz="1000"/>
             </a:lvl8pPr>
             <a:lvl9pPr marL="3657600" indent="0">
               <a:buNone/>
-              <a:defRPr sz="900"/>
+              <a:defRPr sz="1000"/>
             </a:lvl9pPr>
           </a:lstStyle>
           <a:p>
             <a:pPr lvl="0"/>
             <a:r>
-              <a:rPr lang="en-US" smtClean="0"/>
+              <a:rPr lang="en-GB"/>
               <a:t>Click to edit Master text styles</a:t>
             </a:r>
           </a:p>
@@ -3643,7 +3728,13 @@
       </p:sp>
       <p:sp>
         <p:nvSpPr>
-          <p:cNvPr id="5" name="Date Placeholder 4"/>
+          <p:cNvPr id="5" name="Date Placeholder 4">
+            <a:extLst>
+              <a:ext uri="{FF2B5EF4-FFF2-40B4-BE49-F238E27FC236}">
+                <a16:creationId xmlns:a16="http://schemas.microsoft.com/office/drawing/2014/main" id="{8C458E21-5AF1-898A-3DBC-02C200EC5FAC}"/>
+              </a:ext>
+            </a:extLst>
+          </p:cNvPr>
           <p:cNvSpPr>
             <a:spLocks noGrp="1"/>
           </p:cNvSpPr>
@@ -3658,7 +3749,7 @@
           <a:p>
             <a:fld id="{5BCAD085-E8A6-8845-BD4E-CB4CCA059FC4}" type="datetimeFigureOut">
               <a:rPr lang="en-US" smtClean="0"/>
-              <a:t>1/27/13</a:t>
+              <a:t>9/24/26</a:t>
             </a:fld>
             <a:endParaRPr lang="en-US"/>
           </a:p>
@@ -3666,7 +3757,13 @@
       </p:sp>
       <p:sp>
         <p:nvSpPr>
-          <p:cNvPr id="6" name="Footer Placeholder 5"/>
+          <p:cNvPr id="6" name="Footer Placeholder 5">
+            <a:extLst>
+              <a:ext uri="{FF2B5EF4-FFF2-40B4-BE49-F238E27FC236}">
+                <a16:creationId xmlns:a16="http://schemas.microsoft.com/office/drawing/2014/main" id="{FF87F02F-3558-4552-6FCE-9A6524407E06}"/>
+              </a:ext>
+            </a:extLst>
+          </p:cNvPr>
           <p:cNvSpPr>
             <a:spLocks noGrp="1"/>
           </p:cNvSpPr>
@@ -3685,7 +3782,13 @@
       </p:sp>
       <p:sp>
         <p:nvSpPr>
-          <p:cNvPr id="7" name="Slide Number Placeholder 6"/>
+          <p:cNvPr id="7" name="Slide Number Placeholder 6">
+            <a:extLst>
+              <a:ext uri="{FF2B5EF4-FFF2-40B4-BE49-F238E27FC236}">
+                <a16:creationId xmlns:a16="http://schemas.microsoft.com/office/drawing/2014/main" id="{06D5CC24-B04F-451C-F433-B8B5D74072C1}"/>
+              </a:ext>
+            </a:extLst>
+          </p:cNvPr>
           <p:cNvSpPr>
             <a:spLocks noGrp="1"/>
           </p:cNvSpPr>
@@ -3709,7 +3812,7 @@
     </p:spTree>
     <p:extLst>
       <p:ext uri="{BB962C8B-B14F-4D97-AF65-F5344CB8AC3E}">
-        <p14:creationId xmlns:p14="http://schemas.microsoft.com/office/powerpoint/2010/main" val="1840726560"/>
+        <p14:creationId xmlns:p14="http://schemas.microsoft.com/office/powerpoint/2010/main" val="319552195"/>
       </p:ext>
     </p:extLst>
   </p:cSld>
@@ -3738,7 +3841,13 @@
       </p:grpSpPr>
       <p:sp>
         <p:nvSpPr>
-          <p:cNvPr id="2" name="Title 1"/>
+          <p:cNvPr id="2" name="Title 1">
+            <a:extLst>
+              <a:ext uri="{FF2B5EF4-FFF2-40B4-BE49-F238E27FC236}">
+                <a16:creationId xmlns:a16="http://schemas.microsoft.com/office/drawing/2014/main" id="{9AFD8B88-472F-011D-7553-E5FA30CC41EA}"/>
+              </a:ext>
+            </a:extLst>
+          </p:cNvPr>
           <p:cNvSpPr>
             <a:spLocks noGrp="1"/>
           </p:cNvSpPr>
@@ -3748,31 +3857,37 @@
         </p:nvSpPr>
         <p:spPr>
           <a:xfrm>
-            <a:off x="1792288" y="4800600"/>
-            <a:ext cx="5486400" cy="566738"/>
+            <a:off x="839788" y="457200"/>
+            <a:ext cx="3932237" cy="1600200"/>
           </a:xfrm>
         </p:spPr>
         <p:txBody>
           <a:bodyPr anchor="b"/>
           <a:lstStyle>
-            <a:lvl1pPr algn="l">
-              <a:defRPr sz="2000" b="1"/>
+            <a:lvl1pPr>
+              <a:defRPr sz="3200"/>
             </a:lvl1pPr>
           </a:lstStyle>
           <a:p>
             <a:r>
-              <a:rPr lang="en-US" smtClean="0"/>
+              <a:rPr lang="en-GB"/>
               <a:t>Click to edit Master title style</a:t>
             </a:r>
-            <a:endParaRPr lang="en-US"/>
-          </a:p>
-        </p:txBody>
-      </p:sp>
-      <p:sp>
-        <p:nvSpPr>
-          <p:cNvPr id="3" name="Picture Placeholder 2"/>
+            <a:endParaRPr lang="en-DE"/>
+          </a:p>
+        </p:txBody>
+      </p:sp>
+      <p:sp>
+        <p:nvSpPr>
+          <p:cNvPr id="3" name="Picture Placeholder 2">
+            <a:extLst>
+              <a:ext uri="{FF2B5EF4-FFF2-40B4-BE49-F238E27FC236}">
+                <a16:creationId xmlns:a16="http://schemas.microsoft.com/office/drawing/2014/main" id="{4AEE8338-5AA1-C53E-E00E-7A60DA09FFA4}"/>
+              </a:ext>
+            </a:extLst>
+          </p:cNvPr>
           <p:cNvSpPr>
-            <a:spLocks noGrp="1"/>
+            <a:spLocks noGrp="1" noChangeAspect="1"/>
           </p:cNvSpPr>
           <p:nvPr>
             <p:ph type="pic" idx="1"/>
@@ -3780,8 +3895,8 @@
         </p:nvSpPr>
         <p:spPr>
           <a:xfrm>
-            <a:off x="1792288" y="612775"/>
-            <a:ext cx="5486400" cy="4114800"/>
+            <a:off x="5183188" y="987425"/>
+            <a:ext cx="6172200" cy="4873625"/>
           </a:xfrm>
         </p:spPr>
         <p:txBody>
@@ -3825,13 +3940,19 @@
             </a:lvl9pPr>
           </a:lstStyle>
           <a:p>
-            <a:endParaRPr lang="en-US"/>
-          </a:p>
-        </p:txBody>
-      </p:sp>
-      <p:sp>
-        <p:nvSpPr>
-          <p:cNvPr id="4" name="Text Placeholder 3"/>
+            <a:endParaRPr lang="en-DE"/>
+          </a:p>
+        </p:txBody>
+      </p:sp>
+      <p:sp>
+        <p:nvSpPr>
+          <p:cNvPr id="4" name="Text Placeholder 3">
+            <a:extLst>
+              <a:ext uri="{FF2B5EF4-FFF2-40B4-BE49-F238E27FC236}">
+                <a16:creationId xmlns:a16="http://schemas.microsoft.com/office/drawing/2014/main" id="{963CFEC5-E1F3-0021-376C-F95DCD5E66B3}"/>
+              </a:ext>
+            </a:extLst>
+          </p:cNvPr>
           <p:cNvSpPr>
             <a:spLocks noGrp="1"/>
           </p:cNvSpPr>
@@ -3841,8 +3962,8 @@
         </p:nvSpPr>
         <p:spPr>
           <a:xfrm>
-            <a:off x="1792288" y="5367338"/>
-            <a:ext cx="5486400" cy="804862"/>
+            <a:off x="839788" y="2057400"/>
+            <a:ext cx="3932237" cy="3811588"/>
           </a:xfrm>
         </p:spPr>
         <p:txBody>
@@ -3850,45 +3971,45 @@
           <a:lstStyle>
             <a:lvl1pPr marL="0" indent="0">
               <a:buNone/>
-              <a:defRPr sz="1400"/>
+              <a:defRPr sz="1600"/>
             </a:lvl1pPr>
             <a:lvl2pPr marL="457200" indent="0">
               <a:buNone/>
-              <a:defRPr sz="1200"/>
+              <a:defRPr sz="1400"/>
             </a:lvl2pPr>
             <a:lvl3pPr marL="914400" indent="0">
               <a:buNone/>
-              <a:defRPr sz="1000"/>
+              <a:defRPr sz="1200"/>
             </a:lvl3pPr>
             <a:lvl4pPr marL="1371600" indent="0">
               <a:buNone/>
-              <a:defRPr sz="900"/>
+              <a:defRPr sz="1000"/>
             </a:lvl4pPr>
             <a:lvl5pPr marL="1828800" indent="0">
               <a:buNone/>
-              <a:defRPr sz="900"/>
+              <a:defRPr sz="1000"/>
             </a:lvl5pPr>
             <a:lvl6pPr marL="2286000" indent="0">
               <a:buNone/>
-              <a:defRPr sz="900"/>
+              <a:defRPr sz="1000"/>
             </a:lvl6pPr>
             <a:lvl7pPr marL="2743200" indent="0">
               <a:buNone/>
-              <a:defRPr sz="900"/>
+              <a:defRPr sz="1000"/>
             </a:lvl7pPr>
             <a:lvl8pPr marL="3200400" indent="0">
               <a:buNone/>
-              <a:defRPr sz="900"/>
+              <a:defRPr sz="1000"/>
             </a:lvl8pPr>
             <a:lvl9pPr marL="3657600" indent="0">
               <a:buNone/>
-              <a:defRPr sz="900"/>
+              <a:defRPr sz="1000"/>
             </a:lvl9pPr>
           </a:lstStyle>
           <a:p>
             <a:pPr lvl="0"/>
             <a:r>
-              <a:rPr lang="en-US" smtClean="0"/>
+              <a:rPr lang="en-GB"/>
               <a:t>Click to edit Master text styles</a:t>
             </a:r>
           </a:p>
@@ -3896,7 +4017,13 @@
       </p:sp>
       <p:sp>
         <p:nvSpPr>
-          <p:cNvPr id="5" name="Date Placeholder 4"/>
+          <p:cNvPr id="5" name="Date Placeholder 4">
+            <a:extLst>
+              <a:ext uri="{FF2B5EF4-FFF2-40B4-BE49-F238E27FC236}">
+                <a16:creationId xmlns:a16="http://schemas.microsoft.com/office/drawing/2014/main" id="{EDC76ACC-8761-131D-2A9D-805A6CE7F45B}"/>
+              </a:ext>
+            </a:extLst>
+          </p:cNvPr>
           <p:cNvSpPr>
             <a:spLocks noGrp="1"/>
           </p:cNvSpPr>
@@ -3911,7 +4038,7 @@
           <a:p>
             <a:fld id="{5BCAD085-E8A6-8845-BD4E-CB4CCA059FC4}" type="datetimeFigureOut">
               <a:rPr lang="en-US" smtClean="0"/>
-              <a:t>1/27/13</a:t>
+              <a:t>9/24/26</a:t>
             </a:fld>
             <a:endParaRPr lang="en-US"/>
           </a:p>
@@ -3919,7 +4046,13 @@
       </p:sp>
       <p:sp>
         <p:nvSpPr>
-          <p:cNvPr id="6" name="Footer Placeholder 5"/>
+          <p:cNvPr id="6" name="Footer Placeholder 5">
+            <a:extLst>
+              <a:ext uri="{FF2B5EF4-FFF2-40B4-BE49-F238E27FC236}">
+                <a16:creationId xmlns:a16="http://schemas.microsoft.com/office/drawing/2014/main" id="{7DF8F295-ED18-E191-363A-A1D71185B16D}"/>
+              </a:ext>
+            </a:extLst>
+          </p:cNvPr>
           <p:cNvSpPr>
             <a:spLocks noGrp="1"/>
           </p:cNvSpPr>
@@ -3938,7 +4071,13 @@
       </p:sp>
       <p:sp>
         <p:nvSpPr>
-          <p:cNvPr id="7" name="Slide Number Placeholder 6"/>
+          <p:cNvPr id="7" name="Slide Number Placeholder 6">
+            <a:extLst>
+              <a:ext uri="{FF2B5EF4-FFF2-40B4-BE49-F238E27FC236}">
+                <a16:creationId xmlns:a16="http://schemas.microsoft.com/office/drawing/2014/main" id="{6FE375AA-3FF1-0FA3-1B15-F7AAF6FBA806}"/>
+              </a:ext>
+            </a:extLst>
+          </p:cNvPr>
           <p:cNvSpPr>
             <a:spLocks noGrp="1"/>
           </p:cNvSpPr>
@@ -3962,7 +4101,7 @@
     </p:spTree>
     <p:extLst>
       <p:ext uri="{BB962C8B-B14F-4D97-AF65-F5344CB8AC3E}">
-        <p14:creationId xmlns:p14="http://schemas.microsoft.com/office/powerpoint/2010/main" val="3889236939"/>
+        <p14:creationId xmlns:p14="http://schemas.microsoft.com/office/powerpoint/2010/main" val="1344074661"/>
       </p:ext>
     </p:extLst>
   </p:cSld>
@@ -3996,7 +4135,13 @@
       </p:grpSpPr>
       <p:sp>
         <p:nvSpPr>
-          <p:cNvPr id="2" name="Title Placeholder 1"/>
+          <p:cNvPr id="2" name="Title Placeholder 1">
+            <a:extLst>
+              <a:ext uri="{FF2B5EF4-FFF2-40B4-BE49-F238E27FC236}">
+                <a16:creationId xmlns:a16="http://schemas.microsoft.com/office/drawing/2014/main" id="{26A93E99-960A-6D1C-072A-C73D0765D895}"/>
+              </a:ext>
+            </a:extLst>
+          </p:cNvPr>
           <p:cNvSpPr>
             <a:spLocks noGrp="1"/>
           </p:cNvSpPr>
@@ -4006,8 +4151,8 @@
         </p:nvSpPr>
         <p:spPr>
           <a:xfrm>
-            <a:off x="457200" y="274638"/>
-            <a:ext cx="8229600" cy="1143000"/>
+            <a:off x="838200" y="365125"/>
+            <a:ext cx="10515600" cy="1325563"/>
           </a:xfrm>
           <a:prstGeom prst="rect">
             <a:avLst/>
@@ -4020,16 +4165,22 @@
           <a:lstStyle/>
           <a:p>
             <a:r>
-              <a:rPr lang="en-US" smtClean="0"/>
+              <a:rPr lang="en-GB"/>
               <a:t>Click to edit Master title style</a:t>
             </a:r>
-            <a:endParaRPr lang="en-US"/>
-          </a:p>
-        </p:txBody>
-      </p:sp>
-      <p:sp>
-        <p:nvSpPr>
-          <p:cNvPr id="3" name="Text Placeholder 2"/>
+            <a:endParaRPr lang="en-DE"/>
+          </a:p>
+        </p:txBody>
+      </p:sp>
+      <p:sp>
+        <p:nvSpPr>
+          <p:cNvPr id="3" name="Text Placeholder 2">
+            <a:extLst>
+              <a:ext uri="{FF2B5EF4-FFF2-40B4-BE49-F238E27FC236}">
+                <a16:creationId xmlns:a16="http://schemas.microsoft.com/office/drawing/2014/main" id="{AFEF8E26-06DA-36D1-ACA9-4565F1957C14}"/>
+              </a:ext>
+            </a:extLst>
+          </p:cNvPr>
           <p:cNvSpPr>
             <a:spLocks noGrp="1"/>
           </p:cNvSpPr>
@@ -4039,8 +4190,8 @@
         </p:nvSpPr>
         <p:spPr>
           <a:xfrm>
-            <a:off x="457200" y="1600200"/>
-            <a:ext cx="8229600" cy="4525963"/>
+            <a:off x="838200" y="1825625"/>
+            <a:ext cx="10515600" cy="4351338"/>
           </a:xfrm>
           <a:prstGeom prst="rect">
             <a:avLst/>
@@ -4054,44 +4205,50 @@
           <a:p>
             <a:pPr lvl="0"/>
             <a:r>
-              <a:rPr lang="en-US" smtClean="0"/>
+              <a:rPr lang="en-GB"/>
               <a:t>Click to edit Master text styles</a:t>
             </a:r>
           </a:p>
           <a:p>
             <a:pPr lvl="1"/>
             <a:r>
-              <a:rPr lang="en-US" smtClean="0"/>
+              <a:rPr lang="en-GB"/>
               <a:t>Second level</a:t>
             </a:r>
           </a:p>
           <a:p>
             <a:pPr lvl="2"/>
             <a:r>
-              <a:rPr lang="en-US" smtClean="0"/>
+              <a:rPr lang="en-GB"/>
               <a:t>Third level</a:t>
             </a:r>
           </a:p>
           <a:p>
             <a:pPr lvl="3"/>
             <a:r>
-              <a:rPr lang="en-US" smtClean="0"/>
+              <a:rPr lang="en-GB"/>
               <a:t>Fourth level</a:t>
             </a:r>
           </a:p>
           <a:p>
             <a:pPr lvl="4"/>
             <a:r>
-              <a:rPr lang="en-US" smtClean="0"/>
+              <a:rPr lang="en-GB"/>
               <a:t>Fifth level</a:t>
             </a:r>
-            <a:endParaRPr lang="en-US"/>
-          </a:p>
-        </p:txBody>
-      </p:sp>
-      <p:sp>
-        <p:nvSpPr>
-          <p:cNvPr id="4" name="Date Placeholder 3"/>
+            <a:endParaRPr lang="en-DE"/>
+          </a:p>
+        </p:txBody>
+      </p:sp>
+      <p:sp>
+        <p:nvSpPr>
+          <p:cNvPr id="4" name="Date Placeholder 3">
+            <a:extLst>
+              <a:ext uri="{FF2B5EF4-FFF2-40B4-BE49-F238E27FC236}">
+                <a16:creationId xmlns:a16="http://schemas.microsoft.com/office/drawing/2014/main" id="{ECACC647-12F8-647E-0179-6D2203AD8FCF}"/>
+              </a:ext>
+            </a:extLst>
+          </p:cNvPr>
           <p:cNvSpPr>
             <a:spLocks noGrp="1"/>
           </p:cNvSpPr>
@@ -4101,8 +4258,8 @@
         </p:nvSpPr>
         <p:spPr>
           <a:xfrm>
-            <a:off x="457200" y="6356350"/>
-            <a:ext cx="2133600" cy="365125"/>
+            <a:off x="838200" y="6356350"/>
+            <a:ext cx="2743200" cy="365125"/>
           </a:xfrm>
           <a:prstGeom prst="rect">
             <a:avLst/>
@@ -4115,7 +4272,7 @@
               <a:defRPr sz="1200">
                 <a:solidFill>
                   <a:schemeClr val="tx1">
-                    <a:tint val="75000"/>
+                    <a:tint val="82000"/>
                   </a:schemeClr>
                 </a:solidFill>
               </a:defRPr>
@@ -4124,7 +4281,7 @@
           <a:p>
             <a:fld id="{5BCAD085-E8A6-8845-BD4E-CB4CCA059FC4}" type="datetimeFigureOut">
               <a:rPr lang="en-US" smtClean="0"/>
-              <a:t>1/27/13</a:t>
+              <a:t>9/24/26</a:t>
             </a:fld>
             <a:endParaRPr lang="en-US"/>
           </a:p>
@@ -4132,7 +4289,13 @@
       </p:sp>
       <p:sp>
         <p:nvSpPr>
-          <p:cNvPr id="5" name="Footer Placeholder 4"/>
+          <p:cNvPr id="5" name="Footer Placeholder 4">
+            <a:extLst>
+              <a:ext uri="{FF2B5EF4-FFF2-40B4-BE49-F238E27FC236}">
+                <a16:creationId xmlns:a16="http://schemas.microsoft.com/office/drawing/2014/main" id="{AC7A55E3-611F-519F-B976-FFEAFE3372D8}"/>
+              </a:ext>
+            </a:extLst>
+          </p:cNvPr>
           <p:cNvSpPr>
             <a:spLocks noGrp="1"/>
           </p:cNvSpPr>
@@ -4142,8 +4305,8 @@
         </p:nvSpPr>
         <p:spPr>
           <a:xfrm>
-            <a:off x="3124200" y="6356350"/>
-            <a:ext cx="2895600" cy="365125"/>
+            <a:off x="4038600" y="6356350"/>
+            <a:ext cx="4114800" cy="365125"/>
           </a:xfrm>
           <a:prstGeom prst="rect">
             <a:avLst/>
@@ -4156,7 +4319,7 @@
               <a:defRPr sz="1200">
                 <a:solidFill>
                   <a:schemeClr val="tx1">
-                    <a:tint val="75000"/>
+                    <a:tint val="82000"/>
                   </a:schemeClr>
                 </a:solidFill>
               </a:defRPr>
@@ -4169,7 +4332,13 @@
       </p:sp>
       <p:sp>
         <p:nvSpPr>
-          <p:cNvPr id="6" name="Slide Number Placeholder 5"/>
+          <p:cNvPr id="6" name="Slide Number Placeholder 5">
+            <a:extLst>
+              <a:ext uri="{FF2B5EF4-FFF2-40B4-BE49-F238E27FC236}">
+                <a16:creationId xmlns:a16="http://schemas.microsoft.com/office/drawing/2014/main" id="{A78CFEB2-CA6B-6D8E-F16F-3C15D3F1C98A}"/>
+              </a:ext>
+            </a:extLst>
+          </p:cNvPr>
           <p:cNvSpPr>
             <a:spLocks noGrp="1"/>
           </p:cNvSpPr>
@@ -4179,8 +4348,8 @@
         </p:nvSpPr>
         <p:spPr>
           <a:xfrm>
-            <a:off x="6553200" y="6356350"/>
-            <a:ext cx="2133600" cy="365125"/>
+            <a:off x="8610600" y="6356350"/>
+            <a:ext cx="2743200" cy="365125"/>
           </a:xfrm>
           <a:prstGeom prst="rect">
             <a:avLst/>
@@ -4193,7 +4362,7 @@
               <a:defRPr sz="1200">
                 <a:solidFill>
                   <a:schemeClr val="tx1">
-                    <a:tint val="75000"/>
+                    <a:tint val="82000"/>
                   </a:schemeClr>
                 </a:solidFill>
               </a:defRPr>
@@ -4211,27 +4380,30 @@
     </p:spTree>
     <p:extLst>
       <p:ext uri="{BB962C8B-B14F-4D97-AF65-F5344CB8AC3E}">
-        <p14:creationId xmlns:p14="http://schemas.microsoft.com/office/powerpoint/2010/main" val="2209977519"/>
+        <p14:creationId xmlns:p14="http://schemas.microsoft.com/office/powerpoint/2010/main" val="2050548394"/>
       </p:ext>
     </p:extLst>
   </p:cSld>
   <p:clrMap bg1="lt1" tx1="dk1" bg2="lt2" tx2="dk2" accent1="accent1" accent2="accent2" accent3="accent3" accent4="accent4" accent5="accent5" accent6="accent6" hlink="hlink" folHlink="folHlink"/>
   <p:sldLayoutIdLst>
-    <p:sldLayoutId id="2147483649" r:id="rId1"/>
-    <p:sldLayoutId id="2147483650" r:id="rId2"/>
-    <p:sldLayoutId id="2147483651" r:id="rId3"/>
-    <p:sldLayoutId id="2147483652" r:id="rId4"/>
-    <p:sldLayoutId id="2147483653" r:id="rId5"/>
-    <p:sldLayoutId id="2147483654" r:id="rId6"/>
-    <p:sldLayoutId id="2147483655" r:id="rId7"/>
-    <p:sldLayoutId id="2147483656" r:id="rId8"/>
-    <p:sldLayoutId id="2147483657" r:id="rId9"/>
-    <p:sldLayoutId id="2147483658" r:id="rId10"/>
-    <p:sldLayoutId id="2147483659" r:id="rId11"/>
+    <p:sldLayoutId id="2147483701" r:id="rId1"/>
+    <p:sldLayoutId id="2147483702" r:id="rId2"/>
+    <p:sldLayoutId id="2147483703" r:id="rId3"/>
+    <p:sldLayoutId id="2147483704" r:id="rId4"/>
+    <p:sldLayoutId id="2147483705" r:id="rId5"/>
+    <p:sldLayoutId id="2147483706" r:id="rId6"/>
+    <p:sldLayoutId id="2147483707" r:id="rId7"/>
+    <p:sldLayoutId id="2147483708" r:id="rId8"/>
+    <p:sldLayoutId id="2147483709" r:id="rId9"/>
+    <p:sldLayoutId id="2147483710" r:id="rId10"/>
+    <p:sldLayoutId id="2147483711" r:id="rId11"/>
   </p:sldLayoutIdLst>
   <p:txStyles>
     <p:titleStyle>
-      <a:lvl1pPr algn="ctr" defTabSz="457200" rtl="0" eaLnBrk="1" latinLnBrk="0" hangingPunct="1">
+      <a:lvl1pPr algn="l" defTabSz="914400" rtl="0" eaLnBrk="1" latinLnBrk="0" hangingPunct="1">
+        <a:lnSpc>
+          <a:spcPct val="90000"/>
+        </a:lnSpc>
         <a:spcBef>
           <a:spcPct val="0"/>
         </a:spcBef>
@@ -4247,13 +4419,16 @@
       </a:lvl1pPr>
     </p:titleStyle>
     <p:bodyStyle>
-      <a:lvl1pPr marL="342900" indent="-342900" algn="l" defTabSz="457200" rtl="0" eaLnBrk="1" latinLnBrk="0" hangingPunct="1">
+      <a:lvl1pPr marL="228600" indent="-228600" algn="l" defTabSz="914400" rtl="0" eaLnBrk="1" latinLnBrk="0" hangingPunct="1">
+        <a:lnSpc>
+          <a:spcPct val="90000"/>
+        </a:lnSpc>
         <a:spcBef>
-          <a:spcPct val="20000"/>
+          <a:spcPts val="1000"/>
         </a:spcBef>
-        <a:buFont typeface="Arial"/>
+        <a:buFont typeface="Arial" panose="020B0604020202020204" pitchFamily="34" charset="0"/>
         <a:buChar char="•"/>
-        <a:defRPr sz="3200" kern="1200">
+        <a:defRPr sz="2800" kern="1200">
           <a:solidFill>
             <a:schemeClr val="tx1"/>
           </a:solidFill>
@@ -4262,26 +4437,14 @@
           <a:cs typeface="+mn-cs"/>
         </a:defRPr>
       </a:lvl1pPr>
-      <a:lvl2pPr marL="742950" indent="-285750" algn="l" defTabSz="457200" rtl="0" eaLnBrk="1" latinLnBrk="0" hangingPunct="1">
+      <a:lvl2pPr marL="685800" indent="-228600" algn="l" defTabSz="914400" rtl="0" eaLnBrk="1" latinLnBrk="0" hangingPunct="1">
+        <a:lnSpc>
+          <a:spcPct val="90000"/>
+        </a:lnSpc>
         <a:spcBef>
-          <a:spcPct val="20000"/>
+          <a:spcPts val="500"/>
         </a:spcBef>
-        <a:buFont typeface="Arial"/>
-        <a:buChar char="–"/>
-        <a:defRPr sz="2800" kern="1200">
-          <a:solidFill>
-            <a:schemeClr val="tx1"/>
-          </a:solidFill>
-          <a:latin typeface="+mn-lt"/>
-          <a:ea typeface="+mn-ea"/>
-          <a:cs typeface="+mn-cs"/>
-        </a:defRPr>
-      </a:lvl2pPr>
-      <a:lvl3pPr marL="1143000" indent="-228600" algn="l" defTabSz="457200" rtl="0" eaLnBrk="1" latinLnBrk="0" hangingPunct="1">
-        <a:spcBef>
-          <a:spcPct val="20000"/>
-        </a:spcBef>
-        <a:buFont typeface="Arial"/>
+        <a:buFont typeface="Arial" panose="020B0604020202020204" pitchFamily="34" charset="0"/>
         <a:buChar char="•"/>
         <a:defRPr sz="2400" kern="1200">
           <a:solidFill>
@@ -4291,42 +4454,15 @@
           <a:ea typeface="+mn-ea"/>
           <a:cs typeface="+mn-cs"/>
         </a:defRPr>
-      </a:lvl3pPr>
-      <a:lvl4pPr marL="1600200" indent="-228600" algn="l" defTabSz="457200" rtl="0" eaLnBrk="1" latinLnBrk="0" hangingPunct="1">
+      </a:lvl2pPr>
+      <a:lvl3pPr marL="1143000" indent="-228600" algn="l" defTabSz="914400" rtl="0" eaLnBrk="1" latinLnBrk="0" hangingPunct="1">
+        <a:lnSpc>
+          <a:spcPct val="90000"/>
+        </a:lnSpc>
         <a:spcBef>
-          <a:spcPct val="20000"/>
+          <a:spcPts val="500"/>
         </a:spcBef>
-        <a:buFont typeface="Arial"/>
-        <a:buChar char="–"/>
-        <a:defRPr sz="2000" kern="1200">
-          <a:solidFill>
-            <a:schemeClr val="tx1"/>
-          </a:solidFill>
-          <a:latin typeface="+mn-lt"/>
-          <a:ea typeface="+mn-ea"/>
-          <a:cs typeface="+mn-cs"/>
-        </a:defRPr>
-      </a:lvl4pPr>
-      <a:lvl5pPr marL="2057400" indent="-228600" algn="l" defTabSz="457200" rtl="0" eaLnBrk="1" latinLnBrk="0" hangingPunct="1">
-        <a:spcBef>
-          <a:spcPct val="20000"/>
-        </a:spcBef>
-        <a:buFont typeface="Arial"/>
-        <a:buChar char="»"/>
-        <a:defRPr sz="2000" kern="1200">
-          <a:solidFill>
-            <a:schemeClr val="tx1"/>
-          </a:solidFill>
-          <a:latin typeface="+mn-lt"/>
-          <a:ea typeface="+mn-ea"/>
-          <a:cs typeface="+mn-cs"/>
-        </a:defRPr>
-      </a:lvl5pPr>
-      <a:lvl6pPr marL="2514600" indent="-228600" algn="l" defTabSz="457200" rtl="0" eaLnBrk="1" latinLnBrk="0" hangingPunct="1">
-        <a:spcBef>
-          <a:spcPct val="20000"/>
-        </a:spcBef>
-        <a:buFont typeface="Arial"/>
+        <a:buFont typeface="Arial" panose="020B0604020202020204" pitchFamily="34" charset="0"/>
         <a:buChar char="•"/>
         <a:defRPr sz="2000" kern="1200">
           <a:solidFill>
@@ -4336,14 +4472,71 @@
           <a:ea typeface="+mn-ea"/>
           <a:cs typeface="+mn-cs"/>
         </a:defRPr>
+      </a:lvl3pPr>
+      <a:lvl4pPr marL="1600200" indent="-228600" algn="l" defTabSz="914400" rtl="0" eaLnBrk="1" latinLnBrk="0" hangingPunct="1">
+        <a:lnSpc>
+          <a:spcPct val="90000"/>
+        </a:lnSpc>
+        <a:spcBef>
+          <a:spcPts val="500"/>
+        </a:spcBef>
+        <a:buFont typeface="Arial" panose="020B0604020202020204" pitchFamily="34" charset="0"/>
+        <a:buChar char="•"/>
+        <a:defRPr sz="1800" kern="1200">
+          <a:solidFill>
+            <a:schemeClr val="tx1"/>
+          </a:solidFill>
+          <a:latin typeface="+mn-lt"/>
+          <a:ea typeface="+mn-ea"/>
+          <a:cs typeface="+mn-cs"/>
+        </a:defRPr>
+      </a:lvl4pPr>
+      <a:lvl5pPr marL="2057400" indent="-228600" algn="l" defTabSz="914400" rtl="0" eaLnBrk="1" latinLnBrk="0" hangingPunct="1">
+        <a:lnSpc>
+          <a:spcPct val="90000"/>
+        </a:lnSpc>
+        <a:spcBef>
+          <a:spcPts val="500"/>
+        </a:spcBef>
+        <a:buFont typeface="Arial" panose="020B0604020202020204" pitchFamily="34" charset="0"/>
+        <a:buChar char="•"/>
+        <a:defRPr sz="1800" kern="1200">
+          <a:solidFill>
+            <a:schemeClr val="tx1"/>
+          </a:solidFill>
+          <a:latin typeface="+mn-lt"/>
+          <a:ea typeface="+mn-ea"/>
+          <a:cs typeface="+mn-cs"/>
+        </a:defRPr>
+      </a:lvl5pPr>
+      <a:lvl6pPr marL="2514600" indent="-228600" algn="l" defTabSz="914400" rtl="0" eaLnBrk="1" latinLnBrk="0" hangingPunct="1">
+        <a:lnSpc>
+          <a:spcPct val="90000"/>
+        </a:lnSpc>
+        <a:spcBef>
+          <a:spcPts val="500"/>
+        </a:spcBef>
+        <a:buFont typeface="Arial" panose="020B0604020202020204" pitchFamily="34" charset="0"/>
+        <a:buChar char="•"/>
+        <a:defRPr sz="1800" kern="1200">
+          <a:solidFill>
+            <a:schemeClr val="tx1"/>
+          </a:solidFill>
+          <a:latin typeface="+mn-lt"/>
+          <a:ea typeface="+mn-ea"/>
+          <a:cs typeface="+mn-cs"/>
+        </a:defRPr>
       </a:lvl6pPr>
-      <a:lvl7pPr marL="2971800" indent="-228600" algn="l" defTabSz="457200" rtl="0" eaLnBrk="1" latinLnBrk="0" hangingPunct="1">
+      <a:lvl7pPr marL="2971800" indent="-228600" algn="l" defTabSz="914400" rtl="0" eaLnBrk="1" latinLnBrk="0" hangingPunct="1">
+        <a:lnSpc>
+          <a:spcPct val="90000"/>
+        </a:lnSpc>
         <a:spcBef>
-          <a:spcPct val="20000"/>
+          <a:spcPts val="500"/>
         </a:spcBef>
-        <a:buFont typeface="Arial"/>
+        <a:buFont typeface="Arial" panose="020B0604020202020204" pitchFamily="34" charset="0"/>
         <a:buChar char="•"/>
-        <a:defRPr sz="2000" kern="1200">
+        <a:defRPr sz="1800" kern="1200">
           <a:solidFill>
             <a:schemeClr val="tx1"/>
           </a:solidFill>
@@ -4352,13 +4545,16 @@
           <a:cs typeface="+mn-cs"/>
         </a:defRPr>
       </a:lvl7pPr>
-      <a:lvl8pPr marL="3429000" indent="-228600" algn="l" defTabSz="457200" rtl="0" eaLnBrk="1" latinLnBrk="0" hangingPunct="1">
+      <a:lvl8pPr marL="3429000" indent="-228600" algn="l" defTabSz="914400" rtl="0" eaLnBrk="1" latinLnBrk="0" hangingPunct="1">
+        <a:lnSpc>
+          <a:spcPct val="90000"/>
+        </a:lnSpc>
         <a:spcBef>
-          <a:spcPct val="20000"/>
+          <a:spcPts val="500"/>
         </a:spcBef>
-        <a:buFont typeface="Arial"/>
+        <a:buFont typeface="Arial" panose="020B0604020202020204" pitchFamily="34" charset="0"/>
         <a:buChar char="•"/>
-        <a:defRPr sz="2000" kern="1200">
+        <a:defRPr sz="1800" kern="1200">
           <a:solidFill>
             <a:schemeClr val="tx1"/>
           </a:solidFill>
@@ -4367,13 +4563,16 @@
           <a:cs typeface="+mn-cs"/>
         </a:defRPr>
       </a:lvl8pPr>
-      <a:lvl9pPr marL="3886200" indent="-228600" algn="l" defTabSz="457200" rtl="0" eaLnBrk="1" latinLnBrk="0" hangingPunct="1">
+      <a:lvl9pPr marL="3886200" indent="-228600" algn="l" defTabSz="914400" rtl="0" eaLnBrk="1" latinLnBrk="0" hangingPunct="1">
+        <a:lnSpc>
+          <a:spcPct val="90000"/>
+        </a:lnSpc>
         <a:spcBef>
-          <a:spcPct val="20000"/>
+          <a:spcPts val="500"/>
         </a:spcBef>
-        <a:buFont typeface="Arial"/>
+        <a:buFont typeface="Arial" panose="020B0604020202020204" pitchFamily="34" charset="0"/>
         <a:buChar char="•"/>
-        <a:defRPr sz="2000" kern="1200">
+        <a:defRPr sz="1800" kern="1200">
           <a:solidFill>
             <a:schemeClr val="tx1"/>
           </a:solidFill>
@@ -4385,9 +4584,9 @@
     </p:bodyStyle>
     <p:otherStyle>
       <a:defPPr>
-        <a:defRPr lang="en-US"/>
+        <a:defRPr lang="en-DE"/>
       </a:defPPr>
-      <a:lvl1pPr marL="0" algn="l" defTabSz="457200" rtl="0" eaLnBrk="1" latinLnBrk="0" hangingPunct="1">
+      <a:lvl1pPr marL="0" algn="l" defTabSz="914400" rtl="0" eaLnBrk="1" latinLnBrk="0" hangingPunct="1">
         <a:defRPr sz="1800" kern="1200">
           <a:solidFill>
             <a:schemeClr val="tx1"/>
@@ -4397,7 +4596,7 @@
           <a:cs typeface="+mn-cs"/>
         </a:defRPr>
       </a:lvl1pPr>
-      <a:lvl2pPr marL="457200" algn="l" defTabSz="457200" rtl="0" eaLnBrk="1" latinLnBrk="0" hangingPunct="1">
+      <a:lvl2pPr marL="457200" algn="l" defTabSz="914400" rtl="0" eaLnBrk="1" latinLnBrk="0" hangingPunct="1">
         <a:defRPr sz="1800" kern="1200">
           <a:solidFill>
             <a:schemeClr val="tx1"/>
@@ -4407,7 +4606,7 @@
           <a:cs typeface="+mn-cs"/>
         </a:defRPr>
       </a:lvl2pPr>
-      <a:lvl3pPr marL="914400" algn="l" defTabSz="457200" rtl="0" eaLnBrk="1" latinLnBrk="0" hangingPunct="1">
+      <a:lvl3pPr marL="914400" algn="l" defTabSz="914400" rtl="0" eaLnBrk="1" latinLnBrk="0" hangingPunct="1">
         <a:defRPr sz="1800" kern="1200">
           <a:solidFill>
             <a:schemeClr val="tx1"/>
@@ -4417,7 +4616,7 @@
           <a:cs typeface="+mn-cs"/>
         </a:defRPr>
       </a:lvl3pPr>
-      <a:lvl4pPr marL="1371600" algn="l" defTabSz="457200" rtl="0" eaLnBrk="1" latinLnBrk="0" hangingPunct="1">
+      <a:lvl4pPr marL="1371600" algn="l" defTabSz="914400" rtl="0" eaLnBrk="1" latinLnBrk="0" hangingPunct="1">
         <a:defRPr sz="1800" kern="1200">
           <a:solidFill>
             <a:schemeClr val="tx1"/>
@@ -4427,7 +4626,7 @@
           <a:cs typeface="+mn-cs"/>
         </a:defRPr>
       </a:lvl4pPr>
-      <a:lvl5pPr marL="1828800" algn="l" defTabSz="457200" rtl="0" eaLnBrk="1" latinLnBrk="0" hangingPunct="1">
+      <a:lvl5pPr marL="1828800" algn="l" defTabSz="914400" rtl="0" eaLnBrk="1" latinLnBrk="0" hangingPunct="1">
         <a:defRPr sz="1800" kern="1200">
           <a:solidFill>
             <a:schemeClr val="tx1"/>
@@ -4437,7 +4636,7 @@
           <a:cs typeface="+mn-cs"/>
         </a:defRPr>
       </a:lvl5pPr>
-      <a:lvl6pPr marL="2286000" algn="l" defTabSz="457200" rtl="0" eaLnBrk="1" latinLnBrk="0" hangingPunct="1">
+      <a:lvl6pPr marL="2286000" algn="l" defTabSz="914400" rtl="0" eaLnBrk="1" latinLnBrk="0" hangingPunct="1">
         <a:defRPr sz="1800" kern="1200">
           <a:solidFill>
             <a:schemeClr val="tx1"/>
@@ -4447,7 +4646,7 @@
           <a:cs typeface="+mn-cs"/>
         </a:defRPr>
       </a:lvl6pPr>
-      <a:lvl7pPr marL="2743200" algn="l" defTabSz="457200" rtl="0" eaLnBrk="1" latinLnBrk="0" hangingPunct="1">
+      <a:lvl7pPr marL="2743200" algn="l" defTabSz="914400" rtl="0" eaLnBrk="1" latinLnBrk="0" hangingPunct="1">
         <a:defRPr sz="1800" kern="1200">
           <a:solidFill>
             <a:schemeClr val="tx1"/>
@@ -4457,7 +4656,7 @@
           <a:cs typeface="+mn-cs"/>
         </a:defRPr>
       </a:lvl7pPr>
-      <a:lvl8pPr marL="3200400" algn="l" defTabSz="457200" rtl="0" eaLnBrk="1" latinLnBrk="0" hangingPunct="1">
+      <a:lvl8pPr marL="3200400" algn="l" defTabSz="914400" rtl="0" eaLnBrk="1" latinLnBrk="0" hangingPunct="1">
         <a:defRPr sz="1800" kern="1200">
           <a:solidFill>
             <a:schemeClr val="tx1"/>
@@ -4467,7 +4666,7 @@
           <a:cs typeface="+mn-cs"/>
         </a:defRPr>
       </a:lvl8pPr>
-      <a:lvl9pPr marL="3657600" algn="l" defTabSz="457200" rtl="0" eaLnBrk="1" latinLnBrk="0" hangingPunct="1">
+      <a:lvl9pPr marL="3657600" algn="l" defTabSz="914400" rtl="0" eaLnBrk="1" latinLnBrk="0" hangingPunct="1">
         <a:defRPr sz="1800" kern="1200">
           <a:solidFill>
             <a:schemeClr val="tx1"/>
@@ -4479,11 +4678,16 @@
       </a:lvl9pPr>
     </p:otherStyle>
   </p:txStyles>
+  <p:extLst>
+    <p:ext uri="{27BBF7A9-308A-43DC-89C8-2F10F3537804}">
+      <p15:sldGuideLst xmlns:p15="http://schemas.microsoft.com/office/powerpoint/2012/main"/>
+    </p:ext>
+  </p:extLst>
 </p:sldMaster>
 </file>
 
 <file path=ppt/slides/slide1.xml><?xml version="1.0" encoding="utf-8"?>
-<p:sld xmlns:a="http://schemas.openxmlformats.org/drawingml/2006/main" xmlns:p="http://schemas.openxmlformats.org/presentationml/2006/main" xmlns:r="http://schemas.openxmlformats.org/officeDocument/2006/relationships">
+<p:sld xmlns:a="http://schemas.openxmlformats.org/drawingml/2006/main" xmlns:r="http://schemas.openxmlformats.org/officeDocument/2006/relationships" xmlns:p="http://schemas.openxmlformats.org/presentationml/2006/main">
   <p:cSld>
     <p:bg>
       <p:bgPr>
@@ -4499,7 +4703,14 @@
         <p:cNvGrpSpPr/>
         <p:nvPr/>
       </p:nvGrpSpPr>
-      <p:grpSpPr/>
+      <p:grpSpPr>
+        <a:xfrm>
+          <a:off x="0" y="0"/>
+          <a:ext cx="0" cy="0"/>
+          <a:chOff x="0" y="0"/>
+          <a:chExt cx="0" cy="0"/>
+        </a:xfrm>
+      </p:grpSpPr>
       <p:pic>
         <p:nvPicPr>
           <p:cNvPr id="2" name="Picture 1" descr="frb_sky_distribution_petroff.png"/>
@@ -4509,7 +4720,7 @@
           <p:nvPr/>
         </p:nvPicPr>
         <p:blipFill>
-          <a:blip r:embed="rId2"/>
+          <a:blip r:embed="rId3"/>
           <a:srcRect l="27371" r="27371"/>
           <a:stretch>
             <a:fillRect/>
@@ -4567,6 +4778,7 @@
           <a:lstStyle/>
           <a:p>
             <a:pPr algn="ctr"/>
+            <a:endParaRPr/>
           </a:p>
         </p:txBody>
       </p:sp>
@@ -4587,7 +4799,7 @@
           <a:noFill/>
         </p:spPr>
         <p:txBody>
-          <a:bodyPr wrap="square" lIns="36576" rIns="36576" tIns="36576" bIns="36576" anchor="t">
+          <a:bodyPr wrap="square" lIns="36576" tIns="36576" rIns="36576" bIns="36576" anchor="t">
             <a:spAutoFit/>
           </a:bodyPr>
           <a:lstStyle/>
@@ -4626,7 +4838,7 @@
           <a:noFill/>
         </p:spPr>
         <p:txBody>
-          <a:bodyPr wrap="square" lIns="36576" rIns="36576" tIns="36576" bIns="36576" anchor="t">
+          <a:bodyPr wrap="square" lIns="36576" tIns="36576" rIns="36576" bIns="36576" anchor="t">
             <a:spAutoFit/>
           </a:bodyPr>
           <a:lstStyle/>
@@ -4666,7 +4878,7 @@
           <a:noFill/>
         </p:spPr>
         <p:txBody>
-          <a:bodyPr wrap="square" lIns="36576" rIns="36576" tIns="36576" bIns="36576" anchor="t">
+          <a:bodyPr wrap="square" lIns="36576" tIns="36576" rIns="36576" bIns="36576" anchor="t">
             <a:spAutoFit/>
           </a:bodyPr>
           <a:lstStyle/>
@@ -4730,6 +4942,7 @@
           <a:lstStyle/>
           <a:p>
             <a:pPr algn="ctr"/>
+            <a:endParaRPr/>
           </a:p>
         </p:txBody>
       </p:sp>
@@ -4750,7 +4963,7 @@
           <a:noFill/>
         </p:spPr>
         <p:txBody>
-          <a:bodyPr wrap="square" lIns="36576" rIns="36576" tIns="36576" bIns="36576" anchor="t">
+          <a:bodyPr wrap="square" lIns="36576" tIns="36576" rIns="36576" bIns="36576" anchor="t">
             <a:spAutoFit/>
           </a:bodyPr>
           <a:lstStyle/>
@@ -4789,7 +5002,7 @@
           <a:noFill/>
         </p:spPr>
         <p:txBody>
-          <a:bodyPr wrap="square" lIns="36576" rIns="36576" tIns="36576" bIns="36576" anchor="t">
+          <a:bodyPr wrap="square" lIns="36576" tIns="36576" rIns="36576" bIns="36576" anchor="t">
             <a:spAutoFit/>
           </a:bodyPr>
           <a:lstStyle/>
@@ -4828,7 +5041,7 @@
           <a:noFill/>
         </p:spPr>
         <p:txBody>
-          <a:bodyPr wrap="square" lIns="36576" rIns="36576" tIns="36576" bIns="36576" anchor="t">
+          <a:bodyPr wrap="square" lIns="36576" tIns="36576" rIns="36576" bIns="36576" anchor="t">
             <a:spAutoFit/>
           </a:bodyPr>
           <a:lstStyle/>
@@ -4859,7 +5072,7 @@
 </file>
 
 <file path=ppt/slides/slide10.xml><?xml version="1.0" encoding="utf-8"?>
-<p:sld xmlns:a="http://schemas.openxmlformats.org/drawingml/2006/main" xmlns:p="http://schemas.openxmlformats.org/presentationml/2006/main" xmlns:r="http://schemas.openxmlformats.org/officeDocument/2006/relationships">
+<p:sld xmlns:a="http://schemas.openxmlformats.org/drawingml/2006/main" xmlns:r="http://schemas.openxmlformats.org/officeDocument/2006/relationships" xmlns:p="http://schemas.openxmlformats.org/presentationml/2006/main">
   <p:cSld>
     <p:bg>
       <p:bgPr>
@@ -4875,7 +5088,14 @@
         <p:cNvGrpSpPr/>
         <p:nvPr/>
       </p:nvGrpSpPr>
-      <p:grpSpPr/>
+      <p:grpSpPr>
+        <a:xfrm>
+          <a:off x="0" y="0"/>
+          <a:ext cx="0" cy="0"/>
+          <a:chOff x="0" y="0"/>
+          <a:chExt cx="0" cy="0"/>
+        </a:xfrm>
+      </p:grpSpPr>
       <p:sp>
         <p:nvSpPr>
           <p:cNvPr id="2" name="Rectangle 1"/>
@@ -4918,6 +5138,7 @@
           <a:lstStyle/>
           <a:p>
             <a:pPr algn="ctr"/>
+            <a:endParaRPr/>
           </a:p>
         </p:txBody>
       </p:sp>
@@ -4938,7 +5159,7 @@
           <a:noFill/>
         </p:spPr>
         <p:txBody>
-          <a:bodyPr wrap="square" lIns="36576" rIns="36576" tIns="36576" bIns="36576" anchor="t">
+          <a:bodyPr wrap="square" lIns="36576" tIns="36576" rIns="36576" bIns="36576" anchor="t">
             <a:spAutoFit/>
           </a:bodyPr>
           <a:lstStyle/>
@@ -4977,7 +5198,7 @@
           <a:noFill/>
         </p:spPr>
         <p:txBody>
-          <a:bodyPr wrap="square" lIns="36576" rIns="36576" tIns="36576" bIns="36576" anchor="t">
+          <a:bodyPr wrap="square" lIns="36576" tIns="36576" rIns="36576" bIns="36576" anchor="t">
             <a:spAutoFit/>
           </a:bodyPr>
           <a:lstStyle/>
@@ -5016,7 +5237,7 @@
           <a:noFill/>
         </p:spPr>
         <p:txBody>
-          <a:bodyPr wrap="square" lIns="36576" rIns="36576" tIns="36576" bIns="36576" anchor="t">
+          <a:bodyPr wrap="square" lIns="36576" tIns="36576" rIns="36576" bIns="36576" anchor="t">
             <a:spAutoFit/>
           </a:bodyPr>
           <a:lstStyle/>
@@ -5080,6 +5301,7 @@
           <a:lstStyle/>
           <a:p>
             <a:pPr algn="ctr"/>
+            <a:endParaRPr/>
           </a:p>
         </p:txBody>
       </p:sp>
@@ -5092,7 +5314,7 @@
           <p:nvPr/>
         </p:nvPicPr>
         <p:blipFill>
-          <a:blip r:embed="rId2"/>
+          <a:blip r:embed="rId3"/>
           <a:stretch>
             <a:fillRect/>
           </a:stretch>
@@ -5151,6 +5373,7 @@
           <a:lstStyle/>
           <a:p>
             <a:pPr algn="ctr"/>
+            <a:endParaRPr/>
           </a:p>
         </p:txBody>
       </p:sp>
@@ -5171,7 +5394,7 @@
           <a:noFill/>
         </p:spPr>
         <p:txBody>
-          <a:bodyPr wrap="square" lIns="36576" rIns="36576" tIns="36576" bIns="36576" anchor="t">
+          <a:bodyPr wrap="square" lIns="36576" tIns="36576" rIns="36576" bIns="36576" anchor="t">
             <a:spAutoFit/>
           </a:bodyPr>
           <a:lstStyle/>
@@ -5202,7 +5425,7 @@
         <p:spPr>
           <a:xfrm>
             <a:off x="8321040" y="2231136"/>
-            <a:ext cx="2551176" cy="219456"/>
+            <a:ext cx="2551176" cy="227755"/>
           </a:xfrm>
           <a:prstGeom prst="rect">
             <a:avLst/>
@@ -5210,7 +5433,7 @@
           <a:noFill/>
         </p:spPr>
         <p:txBody>
-          <a:bodyPr wrap="square" lIns="36576" rIns="36576" tIns="36576" bIns="36576" anchor="t">
+          <a:bodyPr wrap="square" lIns="36576" tIns="36576" rIns="36576" bIns="36576" anchor="t">
             <a:spAutoFit/>
           </a:bodyPr>
           <a:lstStyle/>
@@ -5221,13 +5444,31 @@
               </a:spcAft>
             </a:pPr>
             <a:r>
-              <a:rPr sz="1000" b="1">
+              <a:rPr sz="1000" b="1" dirty="0">
                 <a:solidFill>
                   <a:srgbClr val="5B6771"/>
                 </a:solidFill>
                 <a:latin typeface="Aptos"/>
               </a:rPr>
-              <a:t>SMALLER 1D ERRORS</a:t>
+              <a:t>SMALLER </a:t>
+            </a:r>
+            <a:r>
+              <a:rPr lang="nl-NL" sz="1000" b="1" dirty="0">
+                <a:solidFill>
+                  <a:srgbClr val="5B6771"/>
+                </a:solidFill>
+                <a:latin typeface="Aptos"/>
+              </a:rPr>
+              <a:t>1 Sigma</a:t>
+            </a:r>
+            <a:r>
+              <a:rPr sz="1000" b="1" dirty="0">
+                <a:solidFill>
+                  <a:srgbClr val="5B6771"/>
+                </a:solidFill>
+                <a:latin typeface="Aptos"/>
+              </a:rPr>
+              <a:t> ERRORS</a:t>
             </a:r>
           </a:p>
         </p:txBody>
@@ -5276,6 +5517,7 @@
           <a:lstStyle/>
           <a:p>
             <a:pPr algn="ctr"/>
+            <a:endParaRPr/>
           </a:p>
         </p:txBody>
       </p:sp>
@@ -5296,7 +5538,7 @@
           <a:noFill/>
         </p:spPr>
         <p:txBody>
-          <a:bodyPr wrap="square" lIns="36576" rIns="36576" tIns="36576" bIns="36576" anchor="t">
+          <a:bodyPr wrap="square" lIns="36576" tIns="36576" rIns="36576" bIns="36576" anchor="t">
             <a:spAutoFit/>
           </a:bodyPr>
           <a:lstStyle/>
@@ -5335,7 +5577,7 @@
           <a:noFill/>
         </p:spPr>
         <p:txBody>
-          <a:bodyPr wrap="square" lIns="36576" rIns="36576" tIns="36576" bIns="36576" anchor="t">
+          <a:bodyPr wrap="square" lIns="36576" tIns="36576" rIns="36576" bIns="36576" anchor="t">
             <a:spAutoFit/>
           </a:bodyPr>
           <a:lstStyle/>
@@ -5401,6 +5643,7 @@
           <a:lstStyle/>
           <a:p>
             <a:pPr algn="ctr"/>
+            <a:endParaRPr/>
           </a:p>
         </p:txBody>
       </p:sp>
@@ -5421,7 +5664,7 @@
           <a:noFill/>
         </p:spPr>
         <p:txBody>
-          <a:bodyPr wrap="square" lIns="36576" rIns="36576" tIns="36576" bIns="36576" anchor="t">
+          <a:bodyPr wrap="square" lIns="36576" tIns="36576" rIns="36576" bIns="36576" anchor="t">
             <a:spAutoFit/>
           </a:bodyPr>
           <a:lstStyle/>
@@ -5451,8 +5694,8 @@
         </p:nvSpPr>
         <p:spPr>
           <a:xfrm>
-            <a:off x="8394192" y="4736592"/>
-            <a:ext cx="2331720" cy="685800"/>
+            <a:off x="8234172" y="4611784"/>
+            <a:ext cx="3081528" cy="597087"/>
           </a:xfrm>
           <a:prstGeom prst="rect">
             <a:avLst/>
@@ -5460,7 +5703,7 @@
           <a:noFill/>
         </p:spPr>
         <p:txBody>
-          <a:bodyPr wrap="square" lIns="36576" rIns="36576" tIns="36576" bIns="36576" anchor="t">
+          <a:bodyPr wrap="square" lIns="36576" tIns="36576" rIns="36576" bIns="36576" anchor="t">
             <a:spAutoFit/>
           </a:bodyPr>
           <a:lstStyle/>
@@ -5471,7 +5714,7 @@
               </a:spcAft>
             </a:pPr>
             <a:r>
-              <a:rPr sz="1700" b="1">
+              <a:rPr sz="1700" b="1" dirty="0">
                 <a:solidFill>
                   <a:srgbClr val="FFFFFF"/>
                 </a:solidFill>
@@ -5491,7 +5734,7 @@
         </p:nvSpPr>
         <p:spPr>
           <a:xfrm>
-            <a:off x="8394192" y="5486400"/>
+            <a:off x="8430768" y="5320444"/>
             <a:ext cx="2331720" cy="219456"/>
           </a:xfrm>
           <a:prstGeom prst="rect">
@@ -5500,7 +5743,7 @@
           <a:noFill/>
         </p:spPr>
         <p:txBody>
-          <a:bodyPr wrap="square" lIns="36576" rIns="36576" tIns="36576" bIns="36576" anchor="t">
+          <a:bodyPr wrap="square" lIns="36576" tIns="36576" rIns="36576" bIns="36576" anchor="t">
             <a:spAutoFit/>
           </a:bodyPr>
           <a:lstStyle/>
@@ -5539,7 +5782,7 @@
           <a:noFill/>
         </p:spPr>
         <p:txBody>
-          <a:bodyPr wrap="square" lIns="36576" rIns="36576" tIns="36576" bIns="36576" anchor="t">
+          <a:bodyPr wrap="square" lIns="36576" tIns="36576" rIns="36576" bIns="36576" anchor="t">
             <a:spAutoFit/>
           </a:bodyPr>
           <a:lstStyle/>
@@ -5578,7 +5821,7 @@
           <a:noFill/>
         </p:spPr>
         <p:txBody>
-          <a:bodyPr wrap="square" lIns="36576" rIns="36576" tIns="36576" bIns="36576" anchor="t">
+          <a:bodyPr wrap="square" lIns="36576" tIns="36576" rIns="36576" bIns="36576" anchor="t">
             <a:spAutoFit/>
           </a:bodyPr>
           <a:lstStyle/>
@@ -5609,7 +5852,7 @@
 </file>
 
 <file path=ppt/slides/slide11.xml><?xml version="1.0" encoding="utf-8"?>
-<p:sld xmlns:a="http://schemas.openxmlformats.org/drawingml/2006/main" xmlns:p="http://schemas.openxmlformats.org/presentationml/2006/main" xmlns:r="http://schemas.openxmlformats.org/officeDocument/2006/relationships">
+<p:sld xmlns:a="http://schemas.openxmlformats.org/drawingml/2006/main" xmlns:r="http://schemas.openxmlformats.org/officeDocument/2006/relationships" xmlns:p="http://schemas.openxmlformats.org/presentationml/2006/main">
   <p:cSld>
     <p:bg>
       <p:bgPr>
@@ -5625,130 +5868,14 @@
         <p:cNvGrpSpPr/>
         <p:nvPr/>
       </p:nvGrpSpPr>
-      <p:grpSpPr/>
-      <p:sp>
-        <p:nvSpPr>
-          <p:cNvPr id="2" name="Rectangle 1"/>
-          <p:cNvSpPr/>
-          <p:nvPr/>
-        </p:nvSpPr>
-        <p:spPr>
-          <a:xfrm>
-            <a:off x="0" y="0"/>
-            <a:ext cx="118872" cy="6858000"/>
-          </a:xfrm>
-          <a:prstGeom prst="rect">
-            <a:avLst/>
-          </a:prstGeom>
-          <a:solidFill>
-            <a:srgbClr val="188985"/>
-          </a:solidFill>
-          <a:ln>
-            <a:solidFill>
-              <a:srgbClr val="188985"/>
-            </a:solidFill>
-          </a:ln>
-        </p:spPr>
-        <p:style>
-          <a:lnRef idx="1">
-            <a:schemeClr val="accent1"/>
-          </a:lnRef>
-          <a:fillRef idx="3">
-            <a:schemeClr val="accent1"/>
-          </a:fillRef>
-          <a:effectRef idx="2">
-            <a:schemeClr val="accent1"/>
-          </a:effectRef>
-          <a:fontRef idx="minor">
-            <a:schemeClr val="lt1"/>
-          </a:fontRef>
-        </p:style>
-        <p:txBody>
-          <a:bodyPr rtlCol="0" anchor="ctr"/>
-          <a:lstStyle/>
-          <a:p>
-            <a:pPr algn="ctr"/>
-          </a:p>
-        </p:txBody>
-      </p:sp>
-      <p:sp>
-        <p:nvSpPr>
-          <p:cNvPr id="3" name="TextBox 2"/>
-          <p:cNvSpPr txBox="1"/>
-          <p:nvPr/>
-        </p:nvSpPr>
-        <p:spPr>
-          <a:xfrm>
-            <a:off x="502920" y="320040"/>
-            <a:ext cx="566928" cy="320040"/>
-          </a:xfrm>
-          <a:prstGeom prst="rect">
-            <a:avLst/>
-          </a:prstGeom>
-          <a:noFill/>
-        </p:spPr>
-        <p:txBody>
-          <a:bodyPr wrap="square" lIns="36576" rIns="36576" tIns="36576" bIns="36576" anchor="t">
-            <a:spAutoFit/>
-          </a:bodyPr>
-          <a:lstStyle/>
-          <a:p>
-            <a:pPr algn="l">
-              <a:spcAft>
-                <a:spcPts val="0"/>
-              </a:spcAft>
-            </a:pPr>
-            <a:r>
-              <a:rPr sz="1300" b="1">
-                <a:solidFill>
-                  <a:srgbClr val="DD5B4A"/>
-                </a:solidFill>
-                <a:latin typeface="Aptos"/>
-              </a:rPr>
-              <a:t>11</a:t>
-            </a:r>
-          </a:p>
-        </p:txBody>
-      </p:sp>
-      <p:sp>
-        <p:nvSpPr>
-          <p:cNvPr id="4" name="TextBox 3"/>
-          <p:cNvSpPr txBox="1"/>
-          <p:nvPr/>
-        </p:nvSpPr>
-        <p:spPr>
-          <a:xfrm>
-            <a:off x="1143000" y="320040"/>
-            <a:ext cx="2926080" cy="256032"/>
-          </a:xfrm>
-          <a:prstGeom prst="rect">
-            <a:avLst/>
-          </a:prstGeom>
-          <a:noFill/>
-        </p:spPr>
-        <p:txBody>
-          <a:bodyPr wrap="square" lIns="36576" rIns="36576" tIns="36576" bIns="36576" anchor="t">
-            <a:spAutoFit/>
-          </a:bodyPr>
-          <a:lstStyle/>
-          <a:p>
-            <a:pPr algn="l">
-              <a:spcAft>
-                <a:spcPts val="0"/>
-              </a:spcAft>
-            </a:pPr>
-            <a:r>
-              <a:rPr sz="1000" b="1">
-                <a:solidFill>
-                  <a:srgbClr val="5B6771"/>
-                </a:solidFill>
-                <a:latin typeface="Aptos"/>
-              </a:rPr>
-              <a:t>OUTLOOK</a:t>
-            </a:r>
-          </a:p>
-        </p:txBody>
-      </p:sp>
+      <p:grpSpPr>
+        <a:xfrm>
+          <a:off x="0" y="0"/>
+          <a:ext cx="0" cy="0"/>
+          <a:chOff x="0" y="0"/>
+          <a:chExt cx="0" cy="0"/>
+        </a:xfrm>
+      </p:grpSpPr>
       <p:sp>
         <p:nvSpPr>
           <p:cNvPr id="5" name="TextBox 4"/>
@@ -5766,7 +5893,7 @@
           <a:noFill/>
         </p:spPr>
         <p:txBody>
-          <a:bodyPr wrap="square" lIns="36576" rIns="36576" tIns="36576" bIns="36576" anchor="t">
+          <a:bodyPr wrap="square" lIns="36576" tIns="36576" rIns="36576" bIns="36576" anchor="t">
             <a:spAutoFit/>
           </a:bodyPr>
           <a:lstStyle/>
@@ -5830,6 +5957,7 @@
           <a:lstStyle/>
           <a:p>
             <a:pPr algn="ctr"/>
+            <a:endParaRPr/>
           </a:p>
         </p:txBody>
       </p:sp>
@@ -5842,7 +5970,7 @@
           <p:nvPr/>
         </p:nvPicPr>
         <p:blipFill>
-          <a:blip r:embed="rId2"/>
+          <a:blip r:embed="rId3"/>
           <a:stretch>
             <a:fillRect/>
           </a:stretch>
@@ -5901,6 +6029,7 @@
           <a:lstStyle/>
           <a:p>
             <a:pPr algn="ctr"/>
+            <a:endParaRPr/>
           </a:p>
         </p:txBody>
       </p:sp>
@@ -5921,7 +6050,7 @@
           <a:noFill/>
         </p:spPr>
         <p:txBody>
-          <a:bodyPr wrap="square" lIns="36576" rIns="36576" tIns="36576" bIns="36576" anchor="t">
+          <a:bodyPr wrap="square" lIns="36576" tIns="36576" rIns="36576" bIns="36576" anchor="t">
             <a:spAutoFit/>
           </a:bodyPr>
           <a:lstStyle/>
@@ -5960,7 +6089,7 @@
           <a:noFill/>
         </p:spPr>
         <p:txBody>
-          <a:bodyPr wrap="square" lIns="27432" rIns="27432" tIns="18288" bIns="18288">
+          <a:bodyPr wrap="square" lIns="27432" tIns="18288" rIns="27432" bIns="18288">
             <a:spAutoFit/>
           </a:bodyPr>
           <a:lstStyle/>
@@ -6026,7 +6155,7 @@
           <a:noFill/>
         </p:spPr>
         <p:txBody>
-          <a:bodyPr wrap="square" lIns="27432" rIns="27432" tIns="18288" bIns="18288">
+          <a:bodyPr wrap="square" lIns="27432" tIns="18288" rIns="27432" bIns="18288">
             <a:spAutoFit/>
           </a:bodyPr>
           <a:lstStyle/>
@@ -6117,6 +6246,7 @@
           <a:lstStyle/>
           <a:p>
             <a:pPr algn="ctr"/>
+            <a:endParaRPr/>
           </a:p>
         </p:txBody>
       </p:sp>
@@ -6137,7 +6267,7 @@
           <a:noFill/>
         </p:spPr>
         <p:txBody>
-          <a:bodyPr wrap="square" lIns="36576" rIns="36576" tIns="36576" bIns="36576" anchor="t">
+          <a:bodyPr wrap="square" lIns="36576" tIns="36576" rIns="36576" bIns="36576" anchor="t">
             <a:spAutoFit/>
           </a:bodyPr>
           <a:lstStyle/>
@@ -6168,7 +6298,7 @@
         <p:spPr>
           <a:xfrm>
             <a:off x="8394192" y="4224528"/>
-            <a:ext cx="2468880" cy="310896"/>
+            <a:ext cx="2468880" cy="335476"/>
           </a:xfrm>
           <a:prstGeom prst="rect">
             <a:avLst/>
@@ -6176,7 +6306,7 @@
           <a:noFill/>
         </p:spPr>
         <p:txBody>
-          <a:bodyPr wrap="square" lIns="36576" rIns="36576" tIns="36576" bIns="36576" anchor="t">
+          <a:bodyPr wrap="square" lIns="36576" tIns="36576" rIns="36576" bIns="36576" anchor="t">
             <a:spAutoFit/>
           </a:bodyPr>
           <a:lstStyle/>
@@ -6187,14 +6317,38 @@
               </a:spcAft>
             </a:pPr>
             <a:r>
-              <a:rPr sz="1700" b="1">
+              <a:rPr sz="1700" b="1" dirty="0" err="1">
                 <a:solidFill>
                   <a:srgbClr val="1C3750"/>
                 </a:solidFill>
                 <a:latin typeface="Aptos"/>
               </a:rPr>
-              <a:t>σ(b₀)  1.27 → 0.25</a:t>
-            </a:r>
+              <a:t>σ</a:t>
+            </a:r>
+            <a:r>
+              <a:rPr sz="1700" b="1" dirty="0">
+                <a:solidFill>
+                  <a:srgbClr val="1C3750"/>
+                </a:solidFill>
+                <a:latin typeface="Aptos"/>
+              </a:rPr>
+              <a:t>(b₀)  1.27 → 0.</a:t>
+            </a:r>
+            <a:r>
+              <a:rPr lang="nl-NL" sz="1700" b="1" dirty="0">
+                <a:solidFill>
+                  <a:srgbClr val="1C3750"/>
+                </a:solidFill>
+                <a:latin typeface="Aptos"/>
+              </a:rPr>
+              <a:t>43</a:t>
+            </a:r>
+            <a:endParaRPr sz="1700" b="1" dirty="0">
+              <a:solidFill>
+                <a:srgbClr val="1C3750"/>
+              </a:solidFill>
+              <a:latin typeface="Aptos"/>
+            </a:endParaRPr>
           </a:p>
         </p:txBody>
       </p:sp>
@@ -6207,7 +6361,7 @@
         <p:spPr>
           <a:xfrm>
             <a:off x="8394192" y="4681728"/>
-            <a:ext cx="2468880" cy="310896"/>
+            <a:ext cx="2468880" cy="335476"/>
           </a:xfrm>
           <a:prstGeom prst="rect">
             <a:avLst/>
@@ -6215,7 +6369,7 @@
           <a:noFill/>
         </p:spPr>
         <p:txBody>
-          <a:bodyPr wrap="square" lIns="36576" rIns="36576" tIns="36576" bIns="36576" anchor="t">
+          <a:bodyPr wrap="square" lIns="36576" tIns="36576" rIns="36576" bIns="36576" anchor="t">
             <a:spAutoFit/>
           </a:bodyPr>
           <a:lstStyle/>
@@ -6226,14 +6380,38 @@
               </a:spcAft>
             </a:pPr>
             <a:r>
-              <a:rPr sz="1700" b="1">
+              <a:rPr sz="1700" b="1" dirty="0" err="1">
                 <a:solidFill>
                   <a:srgbClr val="1C3750"/>
                 </a:solidFill>
                 <a:latin typeface="Aptos"/>
               </a:rPr>
-              <a:t>FoM     1.59 → 42.01</a:t>
-            </a:r>
+              <a:t>FoM</a:t>
+            </a:r>
+            <a:r>
+              <a:rPr sz="1700" b="1" dirty="0">
+                <a:solidFill>
+                  <a:srgbClr val="1C3750"/>
+                </a:solidFill>
+                <a:latin typeface="Aptos"/>
+              </a:rPr>
+              <a:t>     1.59 → </a:t>
+            </a:r>
+            <a:r>
+              <a:rPr lang="nl-NL" sz="1700" b="1" dirty="0">
+                <a:solidFill>
+                  <a:srgbClr val="1C3750"/>
+                </a:solidFill>
+                <a:latin typeface="Aptos"/>
+              </a:rPr>
+              <a:t>14.56</a:t>
+            </a:r>
+            <a:endParaRPr sz="1700" b="1" dirty="0">
+              <a:solidFill>
+                <a:srgbClr val="1C3750"/>
+              </a:solidFill>
+              <a:latin typeface="Aptos"/>
+            </a:endParaRPr>
           </a:p>
         </p:txBody>
       </p:sp>
@@ -6254,7 +6432,7 @@
           <a:noFill/>
         </p:spPr>
         <p:txBody>
-          <a:bodyPr wrap="square" lIns="36576" rIns="36576" tIns="36576" bIns="36576" anchor="t">
+          <a:bodyPr wrap="square" lIns="36576" tIns="36576" rIns="36576" bIns="36576" anchor="t">
             <a:spAutoFit/>
           </a:bodyPr>
           <a:lstStyle/>
@@ -6293,7 +6471,7 @@
           <a:noFill/>
         </p:spPr>
         <p:txBody>
-          <a:bodyPr wrap="square" lIns="36576" rIns="36576" tIns="36576" bIns="36576" anchor="t">
+          <a:bodyPr wrap="square" lIns="36576" tIns="36576" rIns="36576" bIns="36576" anchor="t">
             <a:spAutoFit/>
           </a:bodyPr>
           <a:lstStyle/>
@@ -6332,7 +6510,7 @@
           <a:noFill/>
         </p:spPr>
         <p:txBody>
-          <a:bodyPr wrap="square" lIns="36576" rIns="36576" tIns="36576" bIns="36576" anchor="t">
+          <a:bodyPr wrap="square" lIns="36576" tIns="36576" rIns="36576" bIns="36576" anchor="t">
             <a:spAutoFit/>
           </a:bodyPr>
           <a:lstStyle/>
@@ -6363,7 +6541,7 @@
 </file>
 
 <file path=ppt/slides/slide12.xml><?xml version="1.0" encoding="utf-8"?>
-<p:sld xmlns:a="http://schemas.openxmlformats.org/drawingml/2006/main" xmlns:p="http://schemas.openxmlformats.org/presentationml/2006/main" xmlns:r="http://schemas.openxmlformats.org/officeDocument/2006/relationships">
+<p:sld xmlns:a="http://schemas.openxmlformats.org/drawingml/2006/main" xmlns:r="http://schemas.openxmlformats.org/officeDocument/2006/relationships" xmlns:p="http://schemas.openxmlformats.org/presentationml/2006/main">
   <p:cSld>
     <p:bg>
       <p:bgPr>
@@ -6379,7 +6557,14 @@
         <p:cNvGrpSpPr/>
         <p:nvPr/>
       </p:nvGrpSpPr>
-      <p:grpSpPr/>
+      <p:grpSpPr>
+        <a:xfrm>
+          <a:off x="0" y="0"/>
+          <a:ext cx="0" cy="0"/>
+          <a:chOff x="0" y="0"/>
+          <a:chExt cx="0" cy="0"/>
+        </a:xfrm>
+      </p:grpSpPr>
       <p:sp>
         <p:nvSpPr>
           <p:cNvPr id="2" name="Rectangle 1"/>
@@ -6422,6 +6607,7 @@
           <a:lstStyle/>
           <a:p>
             <a:pPr algn="ctr"/>
+            <a:endParaRPr/>
           </a:p>
         </p:txBody>
       </p:sp>
@@ -6442,7 +6628,7 @@
           <a:noFill/>
         </p:spPr>
         <p:txBody>
-          <a:bodyPr wrap="square" lIns="36576" rIns="36576" tIns="36576" bIns="36576" anchor="t">
+          <a:bodyPr wrap="square" lIns="36576" tIns="36576" rIns="36576" bIns="36576" anchor="t">
             <a:spAutoFit/>
           </a:bodyPr>
           <a:lstStyle/>
@@ -6481,7 +6667,7 @@
           <a:noFill/>
         </p:spPr>
         <p:txBody>
-          <a:bodyPr wrap="square" lIns="36576" rIns="36576" tIns="36576" bIns="36576" anchor="t">
+          <a:bodyPr wrap="square" lIns="36576" tIns="36576" rIns="36576" bIns="36576" anchor="t">
             <a:spAutoFit/>
           </a:bodyPr>
           <a:lstStyle/>
@@ -6520,7 +6706,7 @@
           <a:noFill/>
         </p:spPr>
         <p:txBody>
-          <a:bodyPr wrap="square" lIns="36576" rIns="36576" tIns="36576" bIns="36576" anchor="t">
+          <a:bodyPr wrap="square" lIns="36576" tIns="36576" rIns="36576" bIns="36576" anchor="t">
             <a:spAutoFit/>
           </a:bodyPr>
           <a:lstStyle/>
@@ -6584,6 +6770,7 @@
           <a:lstStyle/>
           <a:p>
             <a:pPr algn="ctr"/>
+            <a:endParaRPr/>
           </a:p>
         </p:txBody>
       </p:sp>
@@ -6631,6 +6818,7 @@
           <a:lstStyle/>
           <a:p>
             <a:pPr algn="ctr"/>
+            <a:endParaRPr/>
           </a:p>
         </p:txBody>
       </p:sp>
@@ -6651,7 +6839,7 @@
           <a:noFill/>
         </p:spPr>
         <p:txBody>
-          <a:bodyPr wrap="square" lIns="36576" rIns="36576" tIns="36576" bIns="36576" anchor="t">
+          <a:bodyPr wrap="square" lIns="36576" tIns="36576" rIns="36576" bIns="36576" anchor="t">
             <a:spAutoFit/>
           </a:bodyPr>
           <a:lstStyle/>
@@ -6690,7 +6878,7 @@
           <a:noFill/>
         </p:spPr>
         <p:txBody>
-          <a:bodyPr wrap="square" lIns="36576" rIns="36576" tIns="36576" bIns="36576" anchor="t">
+          <a:bodyPr wrap="square" lIns="36576" tIns="36576" rIns="36576" bIns="36576" anchor="t">
             <a:spAutoFit/>
           </a:bodyPr>
           <a:lstStyle/>
@@ -6756,6 +6944,7 @@
           <a:lstStyle/>
           <a:p>
             <a:pPr algn="ctr"/>
+            <a:endParaRPr/>
           </a:p>
         </p:txBody>
       </p:sp>
@@ -6776,7 +6965,7 @@
           <a:noFill/>
         </p:spPr>
         <p:txBody>
-          <a:bodyPr wrap="square" lIns="36576" rIns="36576" tIns="36576" bIns="36576" anchor="t">
+          <a:bodyPr wrap="square" lIns="36576" tIns="36576" rIns="36576" bIns="36576" anchor="t">
             <a:spAutoFit/>
           </a:bodyPr>
           <a:lstStyle/>
@@ -6815,7 +7004,7 @@
           <a:noFill/>
         </p:spPr>
         <p:txBody>
-          <a:bodyPr wrap="square" lIns="36576" rIns="36576" tIns="36576" bIns="36576" anchor="t">
+          <a:bodyPr wrap="square" lIns="36576" tIns="36576" rIns="36576" bIns="36576" anchor="t">
             <a:spAutoFit/>
           </a:bodyPr>
           <a:lstStyle/>
@@ -6881,6 +7070,7 @@
           <a:lstStyle/>
           <a:p>
             <a:pPr algn="ctr"/>
+            <a:endParaRPr/>
           </a:p>
         </p:txBody>
       </p:sp>
@@ -6901,7 +7091,7 @@
           <a:noFill/>
         </p:spPr>
         <p:txBody>
-          <a:bodyPr wrap="square" lIns="36576" rIns="36576" tIns="36576" bIns="36576" anchor="t">
+          <a:bodyPr wrap="square" lIns="36576" tIns="36576" rIns="36576" bIns="36576" anchor="t">
             <a:spAutoFit/>
           </a:bodyPr>
           <a:lstStyle/>
@@ -6940,7 +7130,7 @@
           <a:noFill/>
         </p:spPr>
         <p:txBody>
-          <a:bodyPr wrap="square" lIns="36576" rIns="36576" tIns="36576" bIns="36576" anchor="t">
+          <a:bodyPr wrap="square" lIns="36576" tIns="36576" rIns="36576" bIns="36576" anchor="t">
             <a:spAutoFit/>
           </a:bodyPr>
           <a:lstStyle/>
@@ -7006,6 +7196,7 @@
           <a:lstStyle/>
           <a:p>
             <a:pPr algn="ctr"/>
+            <a:endParaRPr/>
           </a:p>
         </p:txBody>
       </p:sp>
@@ -7026,7 +7217,7 @@
           <a:noFill/>
         </p:spPr>
         <p:txBody>
-          <a:bodyPr wrap="square" lIns="36576" rIns="36576" tIns="36576" bIns="36576" anchor="t">
+          <a:bodyPr wrap="square" lIns="36576" tIns="36576" rIns="36576" bIns="36576" anchor="t">
             <a:spAutoFit/>
           </a:bodyPr>
           <a:lstStyle/>
@@ -7065,7 +7256,7 @@
           <a:noFill/>
         </p:spPr>
         <p:txBody>
-          <a:bodyPr wrap="square" lIns="36576" rIns="36576" tIns="36576" bIns="36576" anchor="t">
+          <a:bodyPr wrap="square" lIns="36576" tIns="36576" rIns="36576" bIns="36576" anchor="t">
             <a:spAutoFit/>
           </a:bodyPr>
           <a:lstStyle/>
@@ -7131,6 +7322,7 @@
           <a:lstStyle/>
           <a:p>
             <a:pPr algn="ctr"/>
+            <a:endParaRPr/>
           </a:p>
         </p:txBody>
       </p:sp>
@@ -7151,7 +7343,7 @@
           <a:noFill/>
         </p:spPr>
         <p:txBody>
-          <a:bodyPr wrap="square" lIns="36576" rIns="36576" tIns="36576" bIns="36576" anchor="t">
+          <a:bodyPr wrap="square" lIns="36576" tIns="36576" rIns="36576" bIns="36576" anchor="t">
             <a:spAutoFit/>
           </a:bodyPr>
           <a:lstStyle/>
@@ -7190,7 +7382,7 @@
           <a:noFill/>
         </p:spPr>
         <p:txBody>
-          <a:bodyPr wrap="square" lIns="36576" rIns="36576" tIns="36576" bIns="36576" anchor="t">
+          <a:bodyPr wrap="square" lIns="36576" tIns="36576" rIns="36576" bIns="36576" anchor="t">
             <a:spAutoFit/>
           </a:bodyPr>
           <a:lstStyle/>
@@ -7229,7 +7421,7 @@
           <a:noFill/>
         </p:spPr>
         <p:txBody>
-          <a:bodyPr wrap="square" lIns="36576" rIns="36576" tIns="36576" bIns="36576" anchor="t">
+          <a:bodyPr wrap="square" lIns="36576" tIns="36576" rIns="36576" bIns="36576" anchor="t">
             <a:spAutoFit/>
           </a:bodyPr>
           <a:lstStyle/>
@@ -7268,7 +7460,7 @@
           <a:noFill/>
         </p:spPr>
         <p:txBody>
-          <a:bodyPr wrap="square" lIns="36576" rIns="36576" tIns="36576" bIns="36576" anchor="t">
+          <a:bodyPr wrap="square" lIns="36576" tIns="36576" rIns="36576" bIns="36576" anchor="t">
             <a:spAutoFit/>
           </a:bodyPr>
           <a:lstStyle/>
@@ -7307,7 +7499,7 @@
           <a:noFill/>
         </p:spPr>
         <p:txBody>
-          <a:bodyPr wrap="square" lIns="36576" rIns="36576" tIns="36576" bIns="36576" anchor="t">
+          <a:bodyPr wrap="square" lIns="36576" tIns="36576" rIns="36576" bIns="36576" anchor="t">
             <a:spAutoFit/>
           </a:bodyPr>
           <a:lstStyle/>
@@ -7338,7 +7530,7 @@
 </file>
 
 <file path=ppt/slides/slide13.xml><?xml version="1.0" encoding="utf-8"?>
-<p:sld xmlns:a="http://schemas.openxmlformats.org/drawingml/2006/main" xmlns:p="http://schemas.openxmlformats.org/presentationml/2006/main" xmlns:r="http://schemas.openxmlformats.org/officeDocument/2006/relationships">
+<p:sld xmlns:a="http://schemas.openxmlformats.org/drawingml/2006/main" xmlns:r="http://schemas.openxmlformats.org/officeDocument/2006/relationships" xmlns:p="http://schemas.openxmlformats.org/presentationml/2006/main">
   <p:cSld>
     <p:bg>
       <p:bgPr>
@@ -7354,7 +7546,14 @@
         <p:cNvGrpSpPr/>
         <p:nvPr/>
       </p:nvGrpSpPr>
-      <p:grpSpPr/>
+      <p:grpSpPr>
+        <a:xfrm>
+          <a:off x="0" y="0"/>
+          <a:ext cx="0" cy="0"/>
+          <a:chOff x="0" y="0"/>
+          <a:chExt cx="0" cy="0"/>
+        </a:xfrm>
+      </p:grpSpPr>
       <p:sp>
         <p:nvSpPr>
           <p:cNvPr id="2" name="TextBox 1"/>
@@ -7372,7 +7571,7 @@
           <a:noFill/>
         </p:spPr>
         <p:txBody>
-          <a:bodyPr wrap="square" lIns="36576" rIns="36576" tIns="36576" bIns="36576" anchor="t">
+          <a:bodyPr wrap="square" lIns="36576" tIns="36576" rIns="36576" bIns="36576" anchor="t">
             <a:spAutoFit/>
           </a:bodyPr>
           <a:lstStyle/>
@@ -7411,7 +7610,7 @@
           <a:noFill/>
         </p:spPr>
         <p:txBody>
-          <a:bodyPr wrap="square" lIns="36576" rIns="36576" tIns="36576" bIns="36576" anchor="t">
+          <a:bodyPr wrap="square" lIns="36576" tIns="36576" rIns="36576" bIns="36576" anchor="t">
             <a:spAutoFit/>
           </a:bodyPr>
           <a:lstStyle/>
@@ -7478,6 +7677,7 @@
           <a:lstStyle/>
           <a:p>
             <a:pPr algn="ctr"/>
+            <a:endParaRPr/>
           </a:p>
         </p:txBody>
       </p:sp>
@@ -7498,7 +7698,7 @@
           <a:noFill/>
         </p:spPr>
         <p:txBody>
-          <a:bodyPr wrap="square" lIns="36576" rIns="36576" tIns="36576" bIns="36576" anchor="t">
+          <a:bodyPr wrap="square" lIns="36576" tIns="36576" rIns="36576" bIns="36576" anchor="t">
             <a:spAutoFit/>
           </a:bodyPr>
           <a:lstStyle/>
@@ -7537,7 +7737,7 @@
           <a:noFill/>
         </p:spPr>
         <p:txBody>
-          <a:bodyPr wrap="square" lIns="36576" rIns="36576" tIns="36576" bIns="36576" anchor="t">
+          <a:bodyPr wrap="square" lIns="36576" tIns="36576" rIns="36576" bIns="36576" anchor="t">
             <a:spAutoFit/>
           </a:bodyPr>
           <a:lstStyle/>
@@ -7576,7 +7776,7 @@
           <a:noFill/>
         </p:spPr>
         <p:txBody>
-          <a:bodyPr wrap="square" lIns="36576" rIns="36576" tIns="36576" bIns="36576" anchor="t">
+          <a:bodyPr wrap="square" lIns="36576" tIns="36576" rIns="36576" bIns="36576" anchor="t">
             <a:spAutoFit/>
           </a:bodyPr>
           <a:lstStyle/>
@@ -7642,6 +7842,7 @@
           <a:lstStyle/>
           <a:p>
             <a:pPr algn="ctr"/>
+            <a:endParaRPr/>
           </a:p>
         </p:txBody>
       </p:sp>
@@ -7662,7 +7863,7 @@
           <a:noFill/>
         </p:spPr>
         <p:txBody>
-          <a:bodyPr wrap="square" lIns="36576" rIns="36576" tIns="36576" bIns="36576" anchor="t">
+          <a:bodyPr wrap="square" lIns="36576" tIns="36576" rIns="36576" bIns="36576" anchor="t">
             <a:spAutoFit/>
           </a:bodyPr>
           <a:lstStyle/>
@@ -7701,7 +7902,7 @@
           <a:noFill/>
         </p:spPr>
         <p:txBody>
-          <a:bodyPr wrap="square" lIns="36576" rIns="36576" tIns="36576" bIns="36576" anchor="t">
+          <a:bodyPr wrap="square" lIns="36576" tIns="36576" rIns="36576" bIns="36576" anchor="t">
             <a:spAutoFit/>
           </a:bodyPr>
           <a:lstStyle/>
@@ -7740,7 +7941,7 @@
           <a:noFill/>
         </p:spPr>
         <p:txBody>
-          <a:bodyPr wrap="square" lIns="36576" rIns="36576" tIns="36576" bIns="36576" anchor="t">
+          <a:bodyPr wrap="square" lIns="36576" tIns="36576" rIns="36576" bIns="36576" anchor="t">
             <a:spAutoFit/>
           </a:bodyPr>
           <a:lstStyle/>
@@ -7806,6 +8007,7 @@
           <a:lstStyle/>
           <a:p>
             <a:pPr algn="ctr"/>
+            <a:endParaRPr/>
           </a:p>
         </p:txBody>
       </p:sp>
@@ -7826,7 +8028,7 @@
           <a:noFill/>
         </p:spPr>
         <p:txBody>
-          <a:bodyPr wrap="square" lIns="36576" rIns="36576" tIns="36576" bIns="36576" anchor="t">
+          <a:bodyPr wrap="square" lIns="36576" tIns="36576" rIns="36576" bIns="36576" anchor="t">
             <a:spAutoFit/>
           </a:bodyPr>
           <a:lstStyle/>
@@ -7865,7 +8067,7 @@
           <a:noFill/>
         </p:spPr>
         <p:txBody>
-          <a:bodyPr wrap="square" lIns="36576" rIns="36576" tIns="36576" bIns="36576" anchor="t">
+          <a:bodyPr wrap="square" lIns="36576" tIns="36576" rIns="36576" bIns="36576" anchor="t">
             <a:spAutoFit/>
           </a:bodyPr>
           <a:lstStyle/>
@@ -7904,7 +8106,7 @@
           <a:noFill/>
         </p:spPr>
         <p:txBody>
-          <a:bodyPr wrap="square" lIns="36576" rIns="36576" tIns="36576" bIns="36576" anchor="t">
+          <a:bodyPr wrap="square" lIns="36576" tIns="36576" rIns="36576" bIns="36576" anchor="t">
             <a:spAutoFit/>
           </a:bodyPr>
           <a:lstStyle/>
@@ -7968,6 +8170,7 @@
           <a:lstStyle/>
           <a:p>
             <a:pPr algn="ctr"/>
+            <a:endParaRPr/>
           </a:p>
         </p:txBody>
       </p:sp>
@@ -7988,7 +8191,7 @@
           <a:noFill/>
         </p:spPr>
         <p:txBody>
-          <a:bodyPr wrap="square" lIns="36576" rIns="36576" tIns="36576" bIns="36576" anchor="t">
+          <a:bodyPr wrap="square" lIns="36576" tIns="36576" rIns="36576" bIns="36576" anchor="t">
             <a:spAutoFit/>
           </a:bodyPr>
           <a:lstStyle/>
@@ -8027,7 +8230,7 @@
           <a:noFill/>
         </p:spPr>
         <p:txBody>
-          <a:bodyPr wrap="square" lIns="36576" rIns="36576" tIns="36576" bIns="36576" anchor="t">
+          <a:bodyPr wrap="square" lIns="36576" tIns="36576" rIns="36576" bIns="36576" anchor="t">
             <a:spAutoFit/>
           </a:bodyPr>
           <a:lstStyle/>
@@ -8058,7 +8261,7 @@
 </file>
 
 <file path=ppt/slides/slide2.xml><?xml version="1.0" encoding="utf-8"?>
-<p:sld xmlns:a="http://schemas.openxmlformats.org/drawingml/2006/main" xmlns:p="http://schemas.openxmlformats.org/presentationml/2006/main" xmlns:r="http://schemas.openxmlformats.org/officeDocument/2006/relationships">
+<p:sld xmlns:a="http://schemas.openxmlformats.org/drawingml/2006/main" xmlns:r="http://schemas.openxmlformats.org/officeDocument/2006/relationships" xmlns:p="http://schemas.openxmlformats.org/presentationml/2006/main">
   <p:cSld>
     <p:bg>
       <p:bgPr>
@@ -8074,7 +8277,14 @@
         <p:cNvGrpSpPr/>
         <p:nvPr/>
       </p:nvGrpSpPr>
-      <p:grpSpPr/>
+      <p:grpSpPr>
+        <a:xfrm>
+          <a:off x="0" y="0"/>
+          <a:ext cx="0" cy="0"/>
+          <a:chOff x="0" y="0"/>
+          <a:chExt cx="0" cy="0"/>
+        </a:xfrm>
+      </p:grpSpPr>
       <p:sp>
         <p:nvSpPr>
           <p:cNvPr id="2" name="Rectangle 1"/>
@@ -8117,6 +8327,7 @@
           <a:lstStyle/>
           <a:p>
             <a:pPr algn="ctr"/>
+            <a:endParaRPr/>
           </a:p>
         </p:txBody>
       </p:sp>
@@ -8137,7 +8348,7 @@
           <a:noFill/>
         </p:spPr>
         <p:txBody>
-          <a:bodyPr wrap="square" lIns="36576" rIns="36576" tIns="36576" bIns="36576" anchor="t">
+          <a:bodyPr wrap="square" lIns="36576" tIns="36576" rIns="36576" bIns="36576" anchor="t">
             <a:spAutoFit/>
           </a:bodyPr>
           <a:lstStyle/>
@@ -8176,7 +8387,7 @@
           <a:noFill/>
         </p:spPr>
         <p:txBody>
-          <a:bodyPr wrap="square" lIns="36576" rIns="36576" tIns="36576" bIns="36576" anchor="t">
+          <a:bodyPr wrap="square" lIns="36576" tIns="36576" rIns="36576" bIns="36576" anchor="t">
             <a:spAutoFit/>
           </a:bodyPr>
           <a:lstStyle/>
@@ -8215,7 +8426,7 @@
           <a:noFill/>
         </p:spPr>
         <p:txBody>
-          <a:bodyPr wrap="square" lIns="36576" rIns="36576" tIns="36576" bIns="36576" anchor="t">
+          <a:bodyPr wrap="square" lIns="36576" tIns="36576" rIns="36576" bIns="36576" anchor="t">
             <a:spAutoFit/>
           </a:bodyPr>
           <a:lstStyle/>
@@ -8279,6 +8490,7 @@
           <a:lstStyle/>
           <a:p>
             <a:pPr algn="ctr"/>
+            <a:endParaRPr/>
           </a:p>
         </p:txBody>
       </p:sp>
@@ -8291,7 +8503,7 @@
           <p:nvPr/>
         </p:nvPicPr>
         <p:blipFill>
-          <a:blip r:embed="rId2"/>
+          <a:blip r:embed="rId3"/>
           <a:stretch>
             <a:fillRect/>
           </a:stretch>
@@ -8350,6 +8562,7 @@
           <a:lstStyle/>
           <a:p>
             <a:pPr algn="ctr"/>
+            <a:endParaRPr/>
           </a:p>
         </p:txBody>
       </p:sp>
@@ -8370,7 +8583,7 @@
           <a:noFill/>
         </p:spPr>
         <p:txBody>
-          <a:bodyPr wrap="square" lIns="36576" rIns="36576" tIns="36576" bIns="36576" anchor="t">
+          <a:bodyPr wrap="square" lIns="36576" tIns="36576" rIns="36576" bIns="36576" anchor="t">
             <a:spAutoFit/>
           </a:bodyPr>
           <a:lstStyle/>
@@ -8409,7 +8622,7 @@
           <a:noFill/>
         </p:spPr>
         <p:txBody>
-          <a:bodyPr wrap="square" lIns="36576" rIns="36576" tIns="36576" bIns="36576" anchor="t">
+          <a:bodyPr wrap="square" lIns="36576" tIns="36576" rIns="36576" bIns="36576" anchor="t">
             <a:spAutoFit/>
           </a:bodyPr>
           <a:lstStyle/>
@@ -8475,6 +8688,7 @@
           <a:lstStyle/>
           <a:p>
             <a:pPr algn="ctr"/>
+            <a:endParaRPr/>
           </a:p>
         </p:txBody>
       </p:sp>
@@ -8495,7 +8709,7 @@
           <a:noFill/>
         </p:spPr>
         <p:txBody>
-          <a:bodyPr wrap="square" lIns="36576" rIns="36576" tIns="36576" bIns="36576" anchor="t">
+          <a:bodyPr wrap="square" lIns="36576" tIns="36576" rIns="36576" bIns="36576" anchor="t">
             <a:spAutoFit/>
           </a:bodyPr>
           <a:lstStyle/>
@@ -8534,7 +8748,7 @@
           <a:noFill/>
         </p:spPr>
         <p:txBody>
-          <a:bodyPr wrap="square" lIns="36576" rIns="36576" tIns="36576" bIns="36576" anchor="t">
+          <a:bodyPr wrap="square" lIns="36576" tIns="36576" rIns="36576" bIns="36576" anchor="t">
             <a:spAutoFit/>
           </a:bodyPr>
           <a:lstStyle/>
@@ -8573,7 +8787,7 @@
           <a:noFill/>
         </p:spPr>
         <p:txBody>
-          <a:bodyPr wrap="square" lIns="27432" rIns="27432" tIns="27432" bIns="27432">
+          <a:bodyPr wrap="square" lIns="27432" tIns="27432" rIns="27432" bIns="27432">
             <a:spAutoFit/>
           </a:bodyPr>
           <a:lstStyle/>
@@ -8672,7 +8886,7 @@
           <a:noFill/>
         </p:spPr>
         <p:txBody>
-          <a:bodyPr wrap="square" lIns="36576" rIns="36576" tIns="36576" bIns="36576" anchor="t">
+          <a:bodyPr wrap="square" lIns="36576" tIns="36576" rIns="36576" bIns="36576" anchor="t">
             <a:spAutoFit/>
           </a:bodyPr>
           <a:lstStyle/>
@@ -8711,7 +8925,7 @@
           <a:noFill/>
         </p:spPr>
         <p:txBody>
-          <a:bodyPr wrap="square" lIns="36576" rIns="36576" tIns="36576" bIns="36576" anchor="t">
+          <a:bodyPr wrap="square" lIns="36576" tIns="36576" rIns="36576" bIns="36576" anchor="t">
             <a:spAutoFit/>
           </a:bodyPr>
           <a:lstStyle/>
@@ -8742,7 +8956,7 @@
 </file>
 
 <file path=ppt/slides/slide3.xml><?xml version="1.0" encoding="utf-8"?>
-<p:sld xmlns:a="http://schemas.openxmlformats.org/drawingml/2006/main" xmlns:p="http://schemas.openxmlformats.org/presentationml/2006/main" xmlns:r="http://schemas.openxmlformats.org/officeDocument/2006/relationships">
+<p:sld xmlns:a="http://schemas.openxmlformats.org/drawingml/2006/main" xmlns:r="http://schemas.openxmlformats.org/officeDocument/2006/relationships" xmlns:p="http://schemas.openxmlformats.org/presentationml/2006/main">
   <p:cSld>
     <p:bg>
       <p:bgPr>
@@ -8758,7 +8972,14 @@
         <p:cNvGrpSpPr/>
         <p:nvPr/>
       </p:nvGrpSpPr>
-      <p:grpSpPr/>
+      <p:grpSpPr>
+        <a:xfrm>
+          <a:off x="0" y="0"/>
+          <a:ext cx="0" cy="0"/>
+          <a:chOff x="0" y="0"/>
+          <a:chExt cx="0" cy="0"/>
+        </a:xfrm>
+      </p:grpSpPr>
       <p:sp>
         <p:nvSpPr>
           <p:cNvPr id="2" name="Rectangle 1"/>
@@ -8801,6 +9022,7 @@
           <a:lstStyle/>
           <a:p>
             <a:pPr algn="ctr"/>
+            <a:endParaRPr/>
           </a:p>
         </p:txBody>
       </p:sp>
@@ -8821,7 +9043,7 @@
           <a:noFill/>
         </p:spPr>
         <p:txBody>
-          <a:bodyPr wrap="square" lIns="36576" rIns="36576" tIns="36576" bIns="36576" anchor="t">
+          <a:bodyPr wrap="square" lIns="36576" tIns="36576" rIns="36576" bIns="36576" anchor="t">
             <a:spAutoFit/>
           </a:bodyPr>
           <a:lstStyle/>
@@ -8860,7 +9082,7 @@
           <a:noFill/>
         </p:spPr>
         <p:txBody>
-          <a:bodyPr wrap="square" lIns="36576" rIns="36576" tIns="36576" bIns="36576" anchor="t">
+          <a:bodyPr wrap="square" lIns="36576" tIns="36576" rIns="36576" bIns="36576" anchor="t">
             <a:spAutoFit/>
           </a:bodyPr>
           <a:lstStyle/>
@@ -8899,7 +9121,7 @@
           <a:noFill/>
         </p:spPr>
         <p:txBody>
-          <a:bodyPr wrap="square" lIns="36576" rIns="36576" tIns="36576" bIns="36576" anchor="t">
+          <a:bodyPr wrap="square" lIns="36576" tIns="36576" rIns="36576" bIns="36576" anchor="t">
             <a:spAutoFit/>
           </a:bodyPr>
           <a:lstStyle/>
@@ -8910,7 +9132,7 @@
               </a:spcAft>
             </a:pPr>
             <a:r>
-              <a:rPr sz="2800" b="1">
+              <a:rPr sz="2800" b="1" dirty="0">
                 <a:solidFill>
                   <a:srgbClr val="1C3750"/>
                 </a:solidFill>
@@ -8963,53 +9185,7 @@
           <a:lstStyle/>
           <a:p>
             <a:pPr algn="ctr"/>
-          </a:p>
-        </p:txBody>
-      </p:sp>
-      <p:sp>
-        <p:nvSpPr>
-          <p:cNvPr id="7" name="Rounded Rectangle 6"/>
-          <p:cNvSpPr/>
-          <p:nvPr/>
-        </p:nvSpPr>
-        <p:spPr>
-          <a:xfrm>
-            <a:off x="621792" y="1664208"/>
-            <a:ext cx="2907792" cy="1874519"/>
-          </a:xfrm>
-          <a:prstGeom prst="roundRect">
-            <a:avLst>
-              <a:gd name="adj" fmla="val 8000"/>
-            </a:avLst>
-          </a:prstGeom>
-          <a:solidFill>
-            <a:srgbClr val="F7E4DD"/>
-          </a:solidFill>
-          <a:ln>
-            <a:solidFill>
-              <a:srgbClr val="F7E4DD"/>
-            </a:solidFill>
-          </a:ln>
-        </p:spPr>
-        <p:style>
-          <a:lnRef idx="1">
-            <a:schemeClr val="accent1"/>
-          </a:lnRef>
-          <a:fillRef idx="3">
-            <a:schemeClr val="accent1"/>
-          </a:fillRef>
-          <a:effectRef idx="2">
-            <a:schemeClr val="accent1"/>
-          </a:effectRef>
-          <a:fontRef idx="minor">
-            <a:schemeClr val="lt1"/>
-          </a:fontRef>
-        </p:style>
-        <p:txBody>
-          <a:bodyPr rtlCol="0" anchor="ctr"/>
-          <a:lstStyle/>
-          <a:p>
-            <a:pPr algn="ctr"/>
+            <a:endParaRPr/>
           </a:p>
         </p:txBody>
       </p:sp>
@@ -9030,7 +9206,7 @@
           <a:noFill/>
         </p:spPr>
         <p:txBody>
-          <a:bodyPr wrap="square" lIns="36576" rIns="36576" tIns="36576" bIns="36576" anchor="t">
+          <a:bodyPr wrap="square" lIns="36576" tIns="36576" rIns="36576" bIns="36576" anchor="t">
             <a:spAutoFit/>
           </a:bodyPr>
           <a:lstStyle/>
@@ -9069,7 +9245,7 @@
           <a:noFill/>
         </p:spPr>
         <p:txBody>
-          <a:bodyPr wrap="square" lIns="36576" rIns="36576" tIns="36576" bIns="36576" anchor="t">
+          <a:bodyPr wrap="square" lIns="36576" tIns="36576" rIns="36576" bIns="36576" anchor="t">
             <a:spAutoFit/>
           </a:bodyPr>
           <a:lstStyle/>
@@ -9080,7 +9256,7 @@
               </a:spcAft>
             </a:pPr>
             <a:r>
-              <a:rPr sz="1700" b="0">
+              <a:rPr sz="1700" b="0" dirty="0">
                 <a:solidFill>
                   <a:srgbClr val="182331"/>
                 </a:solidFill>
@@ -9088,55 +9264,26 @@
               </a:rPr>
               <a:t>Active star formation
 Short delay time
-b₀ = 1.0  |  δ = 0.8</a:t>
-            </a:r>
-          </a:p>
-        </p:txBody>
-      </p:sp>
-      <p:sp>
-        <p:nvSpPr>
-          <p:cNvPr id="10" name="Rounded Rectangle 9"/>
-          <p:cNvSpPr/>
-          <p:nvPr/>
-        </p:nvSpPr>
-        <p:spPr>
-          <a:xfrm>
-            <a:off x="621792" y="3767328"/>
-            <a:ext cx="2907792" cy="1874519"/>
-          </a:xfrm>
-          <a:prstGeom prst="roundRect">
-            <a:avLst>
-              <a:gd name="adj" fmla="val 8000"/>
-            </a:avLst>
-          </a:prstGeom>
-          <a:solidFill>
-            <a:srgbClr val="E2EDF4"/>
-          </a:solidFill>
-          <a:ln>
-            <a:solidFill>
-              <a:srgbClr val="E2EDF4"/>
-            </a:solidFill>
-          </a:ln>
-        </p:spPr>
-        <p:style>
-          <a:lnRef idx="1">
-            <a:schemeClr val="accent1"/>
-          </a:lnRef>
-          <a:fillRef idx="3">
-            <a:schemeClr val="accent1"/>
-          </a:fillRef>
-          <a:effectRef idx="2">
-            <a:schemeClr val="accent1"/>
-          </a:effectRef>
-          <a:fontRef idx="minor">
-            <a:schemeClr val="lt1"/>
-          </a:fontRef>
-        </p:style>
-        <p:txBody>
-          <a:bodyPr rtlCol="0" anchor="ctr"/>
-          <a:lstStyle/>
-          <a:p>
-            <a:pPr algn="ctr"/>
+b₀ = 1.0  |  </a:t>
+            </a:r>
+            <a:r>
+              <a:rPr sz="1700" b="0" dirty="0" err="1">
+                <a:solidFill>
+                  <a:srgbClr val="182331"/>
+                </a:solidFill>
+                <a:latin typeface="Aptos"/>
+              </a:rPr>
+              <a:t>δ</a:t>
+            </a:r>
+            <a:r>
+              <a:rPr sz="1700" b="0" dirty="0">
+                <a:solidFill>
+                  <a:srgbClr val="182331"/>
+                </a:solidFill>
+                <a:latin typeface="Aptos"/>
+              </a:rPr>
+              <a:t> = 0.8</a:t>
+            </a:r>
           </a:p>
         </p:txBody>
       </p:sp>
@@ -9157,7 +9304,7 @@
           <a:noFill/>
         </p:spPr>
         <p:txBody>
-          <a:bodyPr wrap="square" lIns="36576" rIns="36576" tIns="36576" bIns="36576" anchor="t">
+          <a:bodyPr wrap="square" lIns="36576" tIns="36576" rIns="36576" bIns="36576" anchor="t">
             <a:spAutoFit/>
           </a:bodyPr>
           <a:lstStyle/>
@@ -9168,7 +9315,7 @@
               </a:spcAft>
             </a:pPr>
             <a:r>
-              <a:rPr sz="1600" b="1">
+              <a:rPr sz="1600" b="1" dirty="0">
                 <a:solidFill>
                   <a:srgbClr val="5C9BBD"/>
                 </a:solidFill>
@@ -9187,7 +9334,7 @@
         </p:nvSpPr>
         <p:spPr>
           <a:xfrm>
-            <a:off x="868680" y="4453128"/>
+            <a:off x="914400" y="4297679"/>
             <a:ext cx="2377440" cy="960120"/>
           </a:xfrm>
           <a:prstGeom prst="rect">
@@ -9196,7 +9343,7 @@
           <a:noFill/>
         </p:spPr>
         <p:txBody>
-          <a:bodyPr wrap="square" lIns="36576" rIns="36576" tIns="36576" bIns="36576" anchor="t">
+          <a:bodyPr wrap="square" lIns="36576" tIns="36576" rIns="36576" bIns="36576" anchor="t">
             <a:spAutoFit/>
           </a:bodyPr>
           <a:lstStyle/>
@@ -9207,7 +9354,7 @@
               </a:spcAft>
             </a:pPr>
             <a:r>
-              <a:rPr sz="1700" b="0">
+              <a:rPr sz="1700" b="0" dirty="0">
                 <a:solidFill>
                   <a:srgbClr val="182331"/>
                 </a:solidFill>
@@ -9215,7 +9362,25 @@
               </a:rPr>
               <a:t>Older populations
 Long delay time
-b₀ = 1.5  |  δ = 0.2</a:t>
+b₀ = 1.5  |  </a:t>
+            </a:r>
+            <a:r>
+              <a:rPr sz="1700" b="0" dirty="0" err="1">
+                <a:solidFill>
+                  <a:srgbClr val="182331"/>
+                </a:solidFill>
+                <a:latin typeface="Aptos"/>
+              </a:rPr>
+              <a:t>δ</a:t>
+            </a:r>
+            <a:r>
+              <a:rPr sz="1700" b="0" dirty="0">
+                <a:solidFill>
+                  <a:srgbClr val="182331"/>
+                </a:solidFill>
+                <a:latin typeface="Aptos"/>
+              </a:rPr>
+              <a:t> = 0.2</a:t>
             </a:r>
           </a:p>
         </p:txBody>
@@ -9229,7 +9394,7 @@
           <p:nvPr/>
         </p:nvPicPr>
         <p:blipFill>
-          <a:blip r:embed="rId2"/>
+          <a:blip r:embed="rId3"/>
           <a:stretch>
             <a:fillRect/>
           </a:stretch>
@@ -9252,7 +9417,7 @@
         </p:nvSpPr>
         <p:spPr>
           <a:xfrm>
-            <a:off x="6446520" y="5715000"/>
+            <a:off x="6383890" y="6111323"/>
             <a:ext cx="3200400" cy="365760"/>
           </a:xfrm>
           <a:prstGeom prst="rect">
@@ -9261,7 +9426,7 @@
           <a:noFill/>
         </p:spPr>
         <p:txBody>
-          <a:bodyPr wrap="square" lIns="27432" rIns="27432" tIns="18288" bIns="18288">
+          <a:bodyPr wrap="square" lIns="27432" tIns="18288" rIns="27432" bIns="18288">
             <a:spAutoFit/>
           </a:bodyPr>
           <a:lstStyle/>
@@ -9272,7 +9437,7 @@
               </a:spcAft>
             </a:pPr>
             <a:r>
-              <a:rPr sz="1800" b="0">
+              <a:rPr sz="1800" b="0" dirty="0">
                 <a:solidFill>
                   <a:srgbClr val="5B6771"/>
                 </a:solidFill>
@@ -9281,7 +9446,7 @@
               <a:t>Bias model:  </a:t>
             </a:r>
             <a:r>
-              <a:rPr sz="1800" b="1">
+              <a:rPr sz="1800" b="1" dirty="0">
                 <a:solidFill>
                   <a:srgbClr val="1C3750"/>
                 </a:solidFill>
@@ -9309,7 +9474,7 @@
           <a:noFill/>
         </p:spPr>
         <p:txBody>
-          <a:bodyPr wrap="square" lIns="36576" rIns="36576" tIns="36576" bIns="36576" anchor="t">
+          <a:bodyPr wrap="square" lIns="36576" tIns="36576" rIns="36576" bIns="36576" anchor="t">
             <a:spAutoFit/>
           </a:bodyPr>
           <a:lstStyle/>
@@ -9348,7 +9513,7 @@
           <a:noFill/>
         </p:spPr>
         <p:txBody>
-          <a:bodyPr wrap="square" lIns="36576" rIns="36576" tIns="36576" bIns="36576" anchor="t">
+          <a:bodyPr wrap="square" lIns="36576" tIns="36576" rIns="36576" bIns="36576" anchor="t">
             <a:spAutoFit/>
           </a:bodyPr>
           <a:lstStyle/>
@@ -9379,7 +9544,7 @@
 </file>
 
 <file path=ppt/slides/slide4.xml><?xml version="1.0" encoding="utf-8"?>
-<p:sld xmlns:a="http://schemas.openxmlformats.org/drawingml/2006/main" xmlns:p="http://schemas.openxmlformats.org/presentationml/2006/main" xmlns:r="http://schemas.openxmlformats.org/officeDocument/2006/relationships">
+<p:sld xmlns:a="http://schemas.openxmlformats.org/drawingml/2006/main" xmlns:r="http://schemas.openxmlformats.org/officeDocument/2006/relationships" xmlns:p="http://schemas.openxmlformats.org/presentationml/2006/main">
   <p:cSld>
     <p:bg>
       <p:bgPr>
@@ -9395,7 +9560,14 @@
         <p:cNvGrpSpPr/>
         <p:nvPr/>
       </p:nvGrpSpPr>
-      <p:grpSpPr/>
+      <p:grpSpPr>
+        <a:xfrm>
+          <a:off x="0" y="0"/>
+          <a:ext cx="0" cy="0"/>
+          <a:chOff x="0" y="0"/>
+          <a:chExt cx="0" cy="0"/>
+        </a:xfrm>
+      </p:grpSpPr>
       <p:sp>
         <p:nvSpPr>
           <p:cNvPr id="2" name="Rectangle 1"/>
@@ -9438,6 +9610,7 @@
           <a:lstStyle/>
           <a:p>
             <a:pPr algn="ctr"/>
+            <a:endParaRPr/>
           </a:p>
         </p:txBody>
       </p:sp>
@@ -9458,7 +9631,7 @@
           <a:noFill/>
         </p:spPr>
         <p:txBody>
-          <a:bodyPr wrap="square" lIns="36576" rIns="36576" tIns="36576" bIns="36576" anchor="t">
+          <a:bodyPr wrap="square" lIns="36576" tIns="36576" rIns="36576" bIns="36576" anchor="t">
             <a:spAutoFit/>
           </a:bodyPr>
           <a:lstStyle/>
@@ -9497,7 +9670,7 @@
           <a:noFill/>
         </p:spPr>
         <p:txBody>
-          <a:bodyPr wrap="square" lIns="36576" rIns="36576" tIns="36576" bIns="36576" anchor="t">
+          <a:bodyPr wrap="square" lIns="36576" tIns="36576" rIns="36576" bIns="36576" anchor="t">
             <a:spAutoFit/>
           </a:bodyPr>
           <a:lstStyle/>
@@ -9536,7 +9709,7 @@
           <a:noFill/>
         </p:spPr>
         <p:txBody>
-          <a:bodyPr wrap="square" lIns="36576" rIns="36576" tIns="36576" bIns="36576" anchor="t">
+          <a:bodyPr wrap="square" lIns="36576" tIns="36576" rIns="36576" bIns="36576" anchor="t">
             <a:spAutoFit/>
           </a:bodyPr>
           <a:lstStyle/>
@@ -9600,6 +9773,7 @@
           <a:lstStyle/>
           <a:p>
             <a:pPr algn="ctr"/>
+            <a:endParaRPr/>
           </a:p>
         </p:txBody>
       </p:sp>
@@ -9620,7 +9794,7 @@
           <a:noFill/>
         </p:spPr>
         <p:txBody>
-          <a:bodyPr wrap="square" lIns="36576" rIns="36576" tIns="36576" bIns="36576" anchor="t">
+          <a:bodyPr wrap="square" lIns="36576" tIns="36576" rIns="36576" bIns="36576" anchor="t">
             <a:spAutoFit/>
           </a:bodyPr>
           <a:lstStyle/>
@@ -9659,7 +9833,7 @@
           <a:noFill/>
         </p:spPr>
         <p:txBody>
-          <a:bodyPr wrap="square" lIns="36576" rIns="36576" tIns="36576" bIns="36576" anchor="t">
+          <a:bodyPr wrap="square" lIns="36576" tIns="36576" rIns="36576" bIns="36576" anchor="t">
             <a:spAutoFit/>
           </a:bodyPr>
           <a:lstStyle/>
@@ -9698,7 +9872,7 @@
           <a:noFill/>
         </p:spPr>
         <p:txBody>
-          <a:bodyPr wrap="square" lIns="36576" rIns="36576" tIns="36576" bIns="36576" anchor="t">
+          <a:bodyPr wrap="square" lIns="36576" tIns="36576" rIns="36576" bIns="36576" anchor="t">
             <a:spAutoFit/>
           </a:bodyPr>
           <a:lstStyle/>
@@ -9764,6 +9938,7 @@
           <a:lstStyle/>
           <a:p>
             <a:pPr algn="ctr"/>
+            <a:endParaRPr/>
           </a:p>
         </p:txBody>
       </p:sp>
@@ -9811,6 +9986,7 @@
           <a:lstStyle/>
           <a:p>
             <a:pPr algn="ctr"/>
+            <a:endParaRPr/>
           </a:p>
         </p:txBody>
       </p:sp>
@@ -9858,6 +10034,7 @@
           <a:lstStyle/>
           <a:p>
             <a:pPr algn="ctr"/>
+            <a:endParaRPr/>
           </a:p>
         </p:txBody>
       </p:sp>
@@ -9905,6 +10082,7 @@
           <a:lstStyle/>
           <a:p>
             <a:pPr algn="ctr"/>
+            <a:endParaRPr/>
           </a:p>
         </p:txBody>
       </p:sp>
@@ -9952,6 +10130,7 @@
           <a:lstStyle/>
           <a:p>
             <a:pPr algn="ctr"/>
+            <a:endParaRPr/>
           </a:p>
         </p:txBody>
       </p:sp>
@@ -9972,7 +10151,7 @@
           <a:noFill/>
         </p:spPr>
         <p:txBody>
-          <a:bodyPr wrap="square" lIns="36576" rIns="36576" tIns="36576" bIns="36576" anchor="t">
+          <a:bodyPr wrap="square" lIns="36576" tIns="36576" rIns="36576" bIns="36576" anchor="t">
             <a:spAutoFit/>
           </a:bodyPr>
           <a:lstStyle/>
@@ -10036,6 +10215,7 @@
           <a:lstStyle/>
           <a:p>
             <a:pPr algn="ctr"/>
+            <a:endParaRPr/>
           </a:p>
         </p:txBody>
       </p:sp>
@@ -10056,7 +10236,7 @@
           <a:noFill/>
         </p:spPr>
         <p:txBody>
-          <a:bodyPr wrap="square" lIns="36576" rIns="36576" tIns="36576" bIns="36576" anchor="t">
+          <a:bodyPr wrap="square" lIns="36576" tIns="36576" rIns="36576" bIns="36576" anchor="t">
             <a:spAutoFit/>
           </a:bodyPr>
           <a:lstStyle/>
@@ -10120,6 +10300,7 @@
           <a:lstStyle/>
           <a:p>
             <a:pPr algn="ctr"/>
+            <a:endParaRPr/>
           </a:p>
         </p:txBody>
       </p:sp>
@@ -10165,6 +10346,7 @@
           <a:lstStyle/>
           <a:p>
             <a:pPr algn="ctr"/>
+            <a:endParaRPr/>
           </a:p>
         </p:txBody>
       </p:sp>
@@ -10210,6 +10392,7 @@
           <a:lstStyle/>
           <a:p>
             <a:pPr algn="ctr"/>
+            <a:endParaRPr/>
           </a:p>
         </p:txBody>
       </p:sp>
@@ -10255,6 +10438,7 @@
           <a:lstStyle/>
           <a:p>
             <a:pPr algn="ctr"/>
+            <a:endParaRPr/>
           </a:p>
         </p:txBody>
       </p:sp>
@@ -10300,6 +10484,7 @@
           <a:lstStyle/>
           <a:p>
             <a:pPr algn="ctr"/>
+            <a:endParaRPr/>
           </a:p>
         </p:txBody>
       </p:sp>
@@ -10345,6 +10530,7 @@
           <a:lstStyle/>
           <a:p>
             <a:pPr algn="ctr"/>
+            <a:endParaRPr/>
           </a:p>
         </p:txBody>
       </p:sp>
@@ -10365,7 +10551,7 @@
           <a:noFill/>
         </p:spPr>
         <p:txBody>
-          <a:bodyPr wrap="square" lIns="36576" rIns="36576" tIns="36576" bIns="36576" anchor="t">
+          <a:bodyPr wrap="square" lIns="36576" tIns="36576" rIns="36576" bIns="36576" anchor="t">
             <a:spAutoFit/>
           </a:bodyPr>
           <a:lstStyle/>
@@ -10429,6 +10615,7 @@
           <a:lstStyle/>
           <a:p>
             <a:pPr algn="ctr"/>
+            <a:endParaRPr/>
           </a:p>
         </p:txBody>
       </p:sp>
@@ -10474,6 +10661,7 @@
           <a:lstStyle/>
           <a:p>
             <a:pPr algn="ctr"/>
+            <a:endParaRPr/>
           </a:p>
         </p:txBody>
       </p:sp>
@@ -10519,6 +10707,7 @@
           <a:lstStyle/>
           <a:p>
             <a:pPr algn="ctr"/>
+            <a:endParaRPr/>
           </a:p>
         </p:txBody>
       </p:sp>
@@ -10564,6 +10753,7 @@
           <a:lstStyle/>
           <a:p>
             <a:pPr algn="ctr"/>
+            <a:endParaRPr/>
           </a:p>
         </p:txBody>
       </p:sp>
@@ -10609,6 +10799,7 @@
           <a:lstStyle/>
           <a:p>
             <a:pPr algn="ctr"/>
+            <a:endParaRPr/>
           </a:p>
         </p:txBody>
       </p:sp>
@@ -10629,7 +10820,7 @@
           <a:noFill/>
         </p:spPr>
         <p:txBody>
-          <a:bodyPr wrap="square" lIns="27432" rIns="27432" tIns="18288" bIns="18288">
+          <a:bodyPr wrap="square" lIns="27432" tIns="18288" rIns="27432" bIns="18288">
             <a:spAutoFit/>
           </a:bodyPr>
           <a:lstStyle/>
@@ -10677,7 +10868,7 @@
           <a:noFill/>
         </p:spPr>
         <p:txBody>
-          <a:bodyPr wrap="square" lIns="36576" rIns="36576" tIns="36576" bIns="36576" anchor="t">
+          <a:bodyPr wrap="square" lIns="36576" tIns="36576" rIns="36576" bIns="36576" anchor="t">
             <a:spAutoFit/>
           </a:bodyPr>
           <a:lstStyle/>
@@ -10716,7 +10907,7 @@
           <a:noFill/>
         </p:spPr>
         <p:txBody>
-          <a:bodyPr wrap="square" lIns="36576" rIns="36576" tIns="36576" bIns="36576" anchor="t">
+          <a:bodyPr wrap="square" lIns="36576" tIns="36576" rIns="36576" bIns="36576" anchor="t">
             <a:spAutoFit/>
           </a:bodyPr>
           <a:lstStyle/>
@@ -10747,7 +10938,7 @@
 </file>
 
 <file path=ppt/slides/slide5.xml><?xml version="1.0" encoding="utf-8"?>
-<p:sld xmlns:a="http://schemas.openxmlformats.org/drawingml/2006/main" xmlns:p="http://schemas.openxmlformats.org/presentationml/2006/main" xmlns:r="http://schemas.openxmlformats.org/officeDocument/2006/relationships">
+<p:sld xmlns:a="http://schemas.openxmlformats.org/drawingml/2006/main" xmlns:r="http://schemas.openxmlformats.org/officeDocument/2006/relationships" xmlns:p="http://schemas.openxmlformats.org/presentationml/2006/main">
   <p:cSld>
     <p:bg>
       <p:bgPr>
@@ -10763,7 +10954,14 @@
         <p:cNvGrpSpPr/>
         <p:nvPr/>
       </p:nvGrpSpPr>
-      <p:grpSpPr/>
+      <p:grpSpPr>
+        <a:xfrm>
+          <a:off x="0" y="0"/>
+          <a:ext cx="0" cy="0"/>
+          <a:chOff x="0" y="0"/>
+          <a:chExt cx="0" cy="0"/>
+        </a:xfrm>
+      </p:grpSpPr>
       <p:sp>
         <p:nvSpPr>
           <p:cNvPr id="2" name="Rectangle 1"/>
@@ -10806,6 +11004,7 @@
           <a:lstStyle/>
           <a:p>
             <a:pPr algn="ctr"/>
+            <a:endParaRPr/>
           </a:p>
         </p:txBody>
       </p:sp>
@@ -10826,7 +11025,7 @@
           <a:noFill/>
         </p:spPr>
         <p:txBody>
-          <a:bodyPr wrap="square" lIns="36576" rIns="36576" tIns="36576" bIns="36576" anchor="t">
+          <a:bodyPr wrap="square" lIns="36576" tIns="36576" rIns="36576" bIns="36576" anchor="t">
             <a:spAutoFit/>
           </a:bodyPr>
           <a:lstStyle/>
@@ -10865,7 +11064,7 @@
           <a:noFill/>
         </p:spPr>
         <p:txBody>
-          <a:bodyPr wrap="square" lIns="36576" rIns="36576" tIns="36576" bIns="36576" anchor="t">
+          <a:bodyPr wrap="square" lIns="36576" tIns="36576" rIns="36576" bIns="36576" anchor="t">
             <a:spAutoFit/>
           </a:bodyPr>
           <a:lstStyle/>
@@ -10904,7 +11103,7 @@
           <a:noFill/>
         </p:spPr>
         <p:txBody>
-          <a:bodyPr wrap="square" lIns="36576" rIns="36576" tIns="36576" bIns="36576" anchor="t">
+          <a:bodyPr wrap="square" lIns="36576" tIns="36576" rIns="36576" bIns="36576" anchor="t">
             <a:spAutoFit/>
           </a:bodyPr>
           <a:lstStyle/>
@@ -10915,7 +11114,7 @@
               </a:spcAft>
             </a:pPr>
             <a:r>
-              <a:rPr sz="2800" b="1">
+              <a:rPr sz="2800" b="1" dirty="0">
                 <a:solidFill>
                   <a:srgbClr val="1C3750"/>
                 </a:solidFill>
@@ -10968,6 +11167,7 @@
           <a:lstStyle/>
           <a:p>
             <a:pPr algn="ctr"/>
+            <a:endParaRPr/>
           </a:p>
         </p:txBody>
       </p:sp>
@@ -10980,7 +11180,7 @@
           <p:nvPr/>
         </p:nvPicPr>
         <p:blipFill>
-          <a:blip r:embed="rId2"/>
+          <a:blip r:embed="rId3"/>
           <a:stretch>
             <a:fillRect/>
           </a:stretch>
@@ -11004,7 +11204,7 @@
           <p:nvPr/>
         </p:nvPicPr>
         <p:blipFill>
-          <a:blip r:embed="rId3"/>
+          <a:blip r:embed="rId4"/>
           <a:stretch>
             <a:fillRect/>
           </a:stretch>
@@ -11063,6 +11263,7 @@
           <a:lstStyle/>
           <a:p>
             <a:pPr algn="ctr"/>
+            <a:endParaRPr/>
           </a:p>
         </p:txBody>
       </p:sp>
@@ -11083,7 +11284,7 @@
           <a:noFill/>
         </p:spPr>
         <p:txBody>
-          <a:bodyPr wrap="square" lIns="36576" rIns="36576" tIns="36576" bIns="36576" anchor="t">
+          <a:bodyPr wrap="square" lIns="36576" tIns="36576" rIns="36576" bIns="36576" anchor="t">
             <a:spAutoFit/>
           </a:bodyPr>
           <a:lstStyle/>
@@ -11094,7 +11295,7 @@
               </a:spcAft>
             </a:pPr>
             <a:r>
-              <a:rPr sz="2400" b="1">
+              <a:rPr sz="2400" b="1" dirty="0">
                 <a:solidFill>
                   <a:srgbClr val="DD5B4A"/>
                 </a:solidFill>
@@ -11122,7 +11323,7 @@
           <a:noFill/>
         </p:spPr>
         <p:txBody>
-          <a:bodyPr wrap="square" lIns="36576" rIns="36576" tIns="36576" bIns="36576" anchor="t">
+          <a:bodyPr wrap="square" lIns="36576" tIns="36576" rIns="36576" bIns="36576" anchor="t">
             <a:spAutoFit/>
           </a:bodyPr>
           <a:lstStyle/>
@@ -11188,6 +11389,7 @@
           <a:lstStyle/>
           <a:p>
             <a:pPr algn="ctr"/>
+            <a:endParaRPr/>
           </a:p>
         </p:txBody>
       </p:sp>
@@ -11208,7 +11410,7 @@
           <a:noFill/>
         </p:spPr>
         <p:txBody>
-          <a:bodyPr wrap="square" lIns="36576" rIns="36576" tIns="36576" bIns="36576" anchor="t">
+          <a:bodyPr wrap="square" lIns="36576" tIns="36576" rIns="36576" bIns="36576" anchor="t">
             <a:spAutoFit/>
           </a:bodyPr>
           <a:lstStyle/>
@@ -11219,7 +11421,7 @@
               </a:spcAft>
             </a:pPr>
             <a:r>
-              <a:rPr sz="2400" b="1">
+              <a:rPr sz="2400" b="1" dirty="0">
                 <a:solidFill>
                   <a:srgbClr val="188985"/>
                 </a:solidFill>
@@ -11247,7 +11449,7 @@
           <a:noFill/>
         </p:spPr>
         <p:txBody>
-          <a:bodyPr wrap="square" lIns="36576" rIns="36576" tIns="36576" bIns="36576" anchor="t">
+          <a:bodyPr wrap="square" lIns="36576" tIns="36576" rIns="36576" bIns="36576" anchor="t">
             <a:spAutoFit/>
           </a:bodyPr>
           <a:lstStyle/>
@@ -11258,7 +11460,7 @@
               </a:spcAft>
             </a:pPr>
             <a:r>
-              <a:rPr sz="1000" b="1">
+              <a:rPr sz="1000" b="1" dirty="0">
                 <a:solidFill>
                   <a:srgbClr val="5B6771"/>
                 </a:solidFill>
@@ -11313,6 +11515,7 @@
           <a:lstStyle/>
           <a:p>
             <a:pPr algn="ctr"/>
+            <a:endParaRPr/>
           </a:p>
         </p:txBody>
       </p:sp>
@@ -11333,7 +11536,7 @@
           <a:noFill/>
         </p:spPr>
         <p:txBody>
-          <a:bodyPr wrap="square" lIns="36576" rIns="36576" tIns="36576" bIns="36576" anchor="t">
+          <a:bodyPr wrap="square" lIns="36576" tIns="36576" rIns="36576" bIns="36576" anchor="t">
             <a:spAutoFit/>
           </a:bodyPr>
           <a:lstStyle/>
@@ -11372,7 +11575,7 @@
           <a:noFill/>
         </p:spPr>
         <p:txBody>
-          <a:bodyPr wrap="square" lIns="36576" rIns="36576" tIns="36576" bIns="36576" anchor="t">
+          <a:bodyPr wrap="square" lIns="36576" tIns="36576" rIns="36576" bIns="36576" anchor="t">
             <a:spAutoFit/>
           </a:bodyPr>
           <a:lstStyle/>
@@ -11411,7 +11614,7 @@
           <a:noFill/>
         </p:spPr>
         <p:txBody>
-          <a:bodyPr wrap="square" lIns="36576" rIns="36576" tIns="36576" bIns="36576" anchor="t">
+          <a:bodyPr wrap="square" lIns="36576" tIns="36576" rIns="36576" bIns="36576" anchor="t">
             <a:spAutoFit/>
           </a:bodyPr>
           <a:lstStyle/>
@@ -11422,7 +11625,7 @@
               </a:spcAft>
             </a:pPr>
             <a:r>
-              <a:rPr sz="1400" b="1">
+              <a:rPr sz="1400" b="1" dirty="0">
                 <a:solidFill>
                   <a:srgbClr val="1C3750"/>
                 </a:solidFill>
@@ -11450,7 +11653,7 @@
           <a:noFill/>
         </p:spPr>
         <p:txBody>
-          <a:bodyPr wrap="square" lIns="36576" rIns="36576" tIns="36576" bIns="36576" anchor="t">
+          <a:bodyPr wrap="square" lIns="36576" tIns="36576" rIns="36576" bIns="36576" anchor="t">
             <a:spAutoFit/>
           </a:bodyPr>
           <a:lstStyle/>
@@ -11489,7 +11692,7 @@
           <a:noFill/>
         </p:spPr>
         <p:txBody>
-          <a:bodyPr wrap="square" lIns="36576" rIns="36576" tIns="36576" bIns="36576" anchor="t">
+          <a:bodyPr wrap="square" lIns="36576" tIns="36576" rIns="36576" bIns="36576" anchor="t">
             <a:spAutoFit/>
           </a:bodyPr>
           <a:lstStyle/>
@@ -11520,7 +11723,7 @@
 </file>
 
 <file path=ppt/slides/slide6.xml><?xml version="1.0" encoding="utf-8"?>
-<p:sld xmlns:a="http://schemas.openxmlformats.org/drawingml/2006/main" xmlns:p="http://schemas.openxmlformats.org/presentationml/2006/main" xmlns:r="http://schemas.openxmlformats.org/officeDocument/2006/relationships">
+<p:sld xmlns:a="http://schemas.openxmlformats.org/drawingml/2006/main" xmlns:r="http://schemas.openxmlformats.org/officeDocument/2006/relationships" xmlns:p="http://schemas.openxmlformats.org/presentationml/2006/main">
   <p:cSld>
     <p:bg>
       <p:bgPr>
@@ -11536,7 +11739,14 @@
         <p:cNvGrpSpPr/>
         <p:nvPr/>
       </p:nvGrpSpPr>
-      <p:grpSpPr/>
+      <p:grpSpPr>
+        <a:xfrm>
+          <a:off x="0" y="0"/>
+          <a:ext cx="0" cy="0"/>
+          <a:chOff x="0" y="0"/>
+          <a:chExt cx="0" cy="0"/>
+        </a:xfrm>
+      </p:grpSpPr>
       <p:sp>
         <p:nvSpPr>
           <p:cNvPr id="2" name="Rectangle 1"/>
@@ -11579,6 +11789,7 @@
           <a:lstStyle/>
           <a:p>
             <a:pPr algn="ctr"/>
+            <a:endParaRPr/>
           </a:p>
         </p:txBody>
       </p:sp>
@@ -11599,7 +11810,7 @@
           <a:noFill/>
         </p:spPr>
         <p:txBody>
-          <a:bodyPr wrap="square" lIns="36576" rIns="36576" tIns="36576" bIns="36576" anchor="t">
+          <a:bodyPr wrap="square" lIns="36576" tIns="36576" rIns="36576" bIns="36576" anchor="t">
             <a:spAutoFit/>
           </a:bodyPr>
           <a:lstStyle/>
@@ -11638,7 +11849,7 @@
           <a:noFill/>
         </p:spPr>
         <p:txBody>
-          <a:bodyPr wrap="square" lIns="36576" rIns="36576" tIns="36576" bIns="36576" anchor="t">
+          <a:bodyPr wrap="square" lIns="36576" tIns="36576" rIns="36576" bIns="36576" anchor="t">
             <a:spAutoFit/>
           </a:bodyPr>
           <a:lstStyle/>
@@ -11677,7 +11888,7 @@
           <a:noFill/>
         </p:spPr>
         <p:txBody>
-          <a:bodyPr wrap="square" lIns="36576" rIns="36576" tIns="36576" bIns="36576" anchor="t">
+          <a:bodyPr wrap="square" lIns="36576" tIns="36576" rIns="36576" bIns="36576" anchor="t">
             <a:spAutoFit/>
           </a:bodyPr>
           <a:lstStyle/>
@@ -11741,6 +11952,7 @@
           <a:lstStyle/>
           <a:p>
             <a:pPr algn="ctr"/>
+            <a:endParaRPr/>
           </a:p>
         </p:txBody>
       </p:sp>
@@ -11788,6 +12000,7 @@
           <a:lstStyle/>
           <a:p>
             <a:pPr algn="ctr"/>
+            <a:endParaRPr/>
           </a:p>
         </p:txBody>
       </p:sp>
@@ -11808,7 +12021,7 @@
           <a:noFill/>
         </p:spPr>
         <p:txBody>
-          <a:bodyPr wrap="square" lIns="36576" rIns="36576" tIns="36576" bIns="36576" anchor="t">
+          <a:bodyPr wrap="square" lIns="36576" tIns="36576" rIns="36576" bIns="36576" anchor="t">
             <a:spAutoFit/>
           </a:bodyPr>
           <a:lstStyle/>
@@ -11847,7 +12060,7 @@
           <a:noFill/>
         </p:spPr>
         <p:txBody>
-          <a:bodyPr wrap="square" lIns="36576" rIns="36576" tIns="36576" bIns="36576" anchor="t">
+          <a:bodyPr wrap="square" lIns="36576" tIns="36576" rIns="36576" bIns="36576" anchor="t">
             <a:spAutoFit/>
           </a:bodyPr>
           <a:lstStyle/>
@@ -11886,7 +12099,7 @@
           <a:noFill/>
         </p:spPr>
         <p:txBody>
-          <a:bodyPr wrap="square" lIns="36576" rIns="36576" tIns="36576" bIns="36576" anchor="t">
+          <a:bodyPr wrap="square" lIns="36576" tIns="36576" rIns="36576" bIns="36576" anchor="t">
             <a:spAutoFit/>
           </a:bodyPr>
           <a:lstStyle/>
@@ -11925,7 +12138,7 @@
           <a:noFill/>
         </p:spPr>
         <p:txBody>
-          <a:bodyPr wrap="square" lIns="36576" rIns="36576" tIns="36576" bIns="36576" anchor="t">
+          <a:bodyPr wrap="square" lIns="36576" tIns="36576" rIns="36576" bIns="36576" anchor="t">
             <a:spAutoFit/>
           </a:bodyPr>
           <a:lstStyle/>
@@ -11991,6 +12204,7 @@
           <a:lstStyle/>
           <a:p>
             <a:pPr algn="ctr"/>
+            <a:endParaRPr/>
           </a:p>
         </p:txBody>
       </p:sp>
@@ -12011,7 +12225,7 @@
           <a:noFill/>
         </p:spPr>
         <p:txBody>
-          <a:bodyPr wrap="square" lIns="36576" rIns="36576" tIns="36576" bIns="36576" anchor="t">
+          <a:bodyPr wrap="square" lIns="36576" tIns="36576" rIns="36576" bIns="36576" anchor="t">
             <a:spAutoFit/>
           </a:bodyPr>
           <a:lstStyle/>
@@ -12050,7 +12264,7 @@
           <a:noFill/>
         </p:spPr>
         <p:txBody>
-          <a:bodyPr wrap="square" lIns="36576" rIns="36576" tIns="36576" bIns="36576" anchor="t">
+          <a:bodyPr wrap="square" lIns="36576" tIns="36576" rIns="36576" bIns="36576" anchor="t">
             <a:spAutoFit/>
           </a:bodyPr>
           <a:lstStyle/>
@@ -12089,7 +12303,7 @@
           <a:noFill/>
         </p:spPr>
         <p:txBody>
-          <a:bodyPr wrap="square" lIns="36576" rIns="36576" tIns="36576" bIns="36576" anchor="t">
+          <a:bodyPr wrap="square" lIns="36576" tIns="36576" rIns="36576" bIns="36576" anchor="t">
             <a:spAutoFit/>
           </a:bodyPr>
           <a:lstStyle/>
@@ -12128,7 +12342,7 @@
           <a:noFill/>
         </p:spPr>
         <p:txBody>
-          <a:bodyPr wrap="square" lIns="36576" rIns="36576" tIns="36576" bIns="36576" anchor="t">
+          <a:bodyPr wrap="square" lIns="36576" tIns="36576" rIns="36576" bIns="36576" anchor="t">
             <a:spAutoFit/>
           </a:bodyPr>
           <a:lstStyle/>
@@ -12194,6 +12408,7 @@
           <a:lstStyle/>
           <a:p>
             <a:pPr algn="ctr"/>
+            <a:endParaRPr/>
           </a:p>
         </p:txBody>
       </p:sp>
@@ -12214,7 +12429,7 @@
           <a:noFill/>
         </p:spPr>
         <p:txBody>
-          <a:bodyPr wrap="square" lIns="36576" rIns="36576" tIns="36576" bIns="36576" anchor="t">
+          <a:bodyPr wrap="square" lIns="36576" tIns="36576" rIns="36576" bIns="36576" anchor="t">
             <a:spAutoFit/>
           </a:bodyPr>
           <a:lstStyle/>
@@ -12253,7 +12468,7 @@
           <a:noFill/>
         </p:spPr>
         <p:txBody>
-          <a:bodyPr wrap="square" lIns="36576" rIns="36576" tIns="36576" bIns="36576" anchor="t">
+          <a:bodyPr wrap="square" lIns="36576" tIns="36576" rIns="36576" bIns="36576" anchor="t">
             <a:spAutoFit/>
           </a:bodyPr>
           <a:lstStyle/>
@@ -12292,7 +12507,7 @@
           <a:noFill/>
         </p:spPr>
         <p:txBody>
-          <a:bodyPr wrap="square" lIns="36576" rIns="36576" tIns="36576" bIns="36576" anchor="t">
+          <a:bodyPr wrap="square" lIns="36576" tIns="36576" rIns="36576" bIns="36576" anchor="t">
             <a:spAutoFit/>
           </a:bodyPr>
           <a:lstStyle/>
@@ -12331,7 +12546,7 @@
           <a:noFill/>
         </p:spPr>
         <p:txBody>
-          <a:bodyPr wrap="square" lIns="36576" rIns="36576" tIns="36576" bIns="36576" anchor="t">
+          <a:bodyPr wrap="square" lIns="36576" tIns="36576" rIns="36576" bIns="36576" anchor="t">
             <a:spAutoFit/>
           </a:bodyPr>
           <a:lstStyle/>
@@ -12397,6 +12612,7 @@
           <a:lstStyle/>
           <a:p>
             <a:pPr algn="ctr"/>
+            <a:endParaRPr/>
           </a:p>
         </p:txBody>
       </p:sp>
@@ -12417,7 +12633,7 @@
           <a:noFill/>
         </p:spPr>
         <p:txBody>
-          <a:bodyPr wrap="square" lIns="36576" rIns="36576" tIns="36576" bIns="36576" anchor="t">
+          <a:bodyPr wrap="square" lIns="36576" tIns="36576" rIns="36576" bIns="36576" anchor="t">
             <a:spAutoFit/>
           </a:bodyPr>
           <a:lstStyle/>
@@ -12456,7 +12672,7 @@
           <a:noFill/>
         </p:spPr>
         <p:txBody>
-          <a:bodyPr wrap="square" lIns="36576" rIns="36576" tIns="36576" bIns="36576" anchor="t">
+          <a:bodyPr wrap="square" lIns="36576" tIns="36576" rIns="36576" bIns="36576" anchor="t">
             <a:spAutoFit/>
           </a:bodyPr>
           <a:lstStyle/>
@@ -12495,7 +12711,7 @@
           <a:noFill/>
         </p:spPr>
         <p:txBody>
-          <a:bodyPr wrap="square" lIns="36576" rIns="36576" tIns="36576" bIns="36576" anchor="t">
+          <a:bodyPr wrap="square" lIns="36576" tIns="36576" rIns="36576" bIns="36576" anchor="t">
             <a:spAutoFit/>
           </a:bodyPr>
           <a:lstStyle/>
@@ -12534,7 +12750,7 @@
           <a:noFill/>
         </p:spPr>
         <p:txBody>
-          <a:bodyPr wrap="square" lIns="36576" rIns="36576" tIns="36576" bIns="36576" anchor="t">
+          <a:bodyPr wrap="square" lIns="36576" tIns="36576" rIns="36576" bIns="36576" anchor="t">
             <a:spAutoFit/>
           </a:bodyPr>
           <a:lstStyle/>
@@ -12600,6 +12816,7 @@
           <a:lstStyle/>
           <a:p>
             <a:pPr algn="ctr"/>
+            <a:endParaRPr/>
           </a:p>
         </p:txBody>
       </p:sp>
@@ -12620,7 +12837,7 @@
           <a:noFill/>
         </p:spPr>
         <p:txBody>
-          <a:bodyPr wrap="square" lIns="36576" rIns="36576" tIns="36576" bIns="36576" anchor="t">
+          <a:bodyPr wrap="square" lIns="36576" tIns="36576" rIns="36576" bIns="36576" anchor="t">
             <a:spAutoFit/>
           </a:bodyPr>
           <a:lstStyle/>
@@ -12659,7 +12876,7 @@
           <a:noFill/>
         </p:spPr>
         <p:txBody>
-          <a:bodyPr wrap="square" lIns="36576" rIns="36576" tIns="36576" bIns="36576" anchor="t">
+          <a:bodyPr wrap="square" lIns="36576" tIns="36576" rIns="36576" bIns="36576" anchor="t">
             <a:spAutoFit/>
           </a:bodyPr>
           <a:lstStyle/>
@@ -12698,7 +12915,7 @@
           <a:noFill/>
         </p:spPr>
         <p:txBody>
-          <a:bodyPr wrap="square" lIns="36576" rIns="36576" tIns="36576" bIns="36576" anchor="t">
+          <a:bodyPr wrap="square" lIns="36576" tIns="36576" rIns="36576" bIns="36576" anchor="t">
             <a:spAutoFit/>
           </a:bodyPr>
           <a:lstStyle/>
@@ -12764,6 +12981,7 @@
           <a:lstStyle/>
           <a:p>
             <a:pPr algn="ctr"/>
+            <a:endParaRPr/>
           </a:p>
         </p:txBody>
       </p:sp>
@@ -12784,7 +13002,7 @@
           <a:noFill/>
         </p:spPr>
         <p:txBody>
-          <a:bodyPr wrap="square" lIns="36576" rIns="36576" tIns="36576" bIns="36576" anchor="t">
+          <a:bodyPr wrap="square" lIns="36576" tIns="36576" rIns="36576" bIns="36576" anchor="t">
             <a:spAutoFit/>
           </a:bodyPr>
           <a:lstStyle/>
@@ -12815,7 +13033,7 @@
         <p:spPr>
           <a:xfrm>
             <a:off x="960120" y="4160520"/>
-            <a:ext cx="5669280" cy="914400"/>
+            <a:ext cx="6135624" cy="412421"/>
           </a:xfrm>
           <a:prstGeom prst="rect">
             <a:avLst/>
@@ -12823,25 +13041,118 @@
           <a:noFill/>
         </p:spPr>
         <p:txBody>
-          <a:bodyPr wrap="square" lIns="36576" rIns="36576" tIns="36576" bIns="36576" anchor="t">
+          <a:bodyPr wrap="square" lIns="36576" tIns="36576" rIns="36576" bIns="36576" anchor="t">
             <a:spAutoFit/>
           </a:bodyPr>
           <a:lstStyle/>
           <a:p>
-            <a:pPr algn="l">
-              <a:spcAft>
-                <a:spcPts val="0"/>
-              </a:spcAft>
-            </a:pPr>
-            <a:r>
-              <a:rPr sz="2200" b="1">
+            <a:r>
+              <a:rPr sz="2200" b="1" dirty="0">
                 <a:solidFill>
                   <a:srgbClr val="1C3750"/>
                 </a:solidFill>
                 <a:latin typeface="Aptos Display"/>
               </a:rPr>
-              <a:t>Cℓᴬᴮ ≈ ∫ dχ / χ²  Wᴬ(χ) Wᴮ(χ)
-            × P((ℓ + 1/2) / χ, z)</a:t>
+              <a:t>Cℓᴬᴮ ≈ ∫ </a:t>
+            </a:r>
+            <a:r>
+              <a:rPr sz="2200" b="1" dirty="0" err="1">
+                <a:solidFill>
+                  <a:srgbClr val="1C3750"/>
+                </a:solidFill>
+                <a:latin typeface="Aptos Display"/>
+              </a:rPr>
+              <a:t>dχ</a:t>
+            </a:r>
+            <a:r>
+              <a:rPr sz="2200" b="1" dirty="0">
+                <a:solidFill>
+                  <a:srgbClr val="1C3750"/>
+                </a:solidFill>
+                <a:latin typeface="Aptos Display"/>
+              </a:rPr>
+              <a:t> / χ²  W</a:t>
+            </a:r>
+            <a:r>
+              <a:rPr lang="en-GB" sz="2200" b="1" dirty="0">
+                <a:solidFill>
+                  <a:srgbClr val="1C3750"/>
+                </a:solidFill>
+                <a:latin typeface="Aptos Display"/>
+              </a:rPr>
+              <a:t>ᴬ</a:t>
+            </a:r>
+            <a:r>
+              <a:rPr sz="2200" b="1" dirty="0">
+                <a:solidFill>
+                  <a:srgbClr val="1C3750"/>
+                </a:solidFill>
+                <a:latin typeface="Aptos Display"/>
+              </a:rPr>
+              <a:t>(</a:t>
+            </a:r>
+            <a:r>
+              <a:rPr sz="2200" b="1" dirty="0" err="1">
+                <a:solidFill>
+                  <a:srgbClr val="1C3750"/>
+                </a:solidFill>
+                <a:latin typeface="Aptos Display"/>
+              </a:rPr>
+              <a:t>χ</a:t>
+            </a:r>
+            <a:r>
+              <a:rPr sz="2200" b="1" dirty="0">
+                <a:solidFill>
+                  <a:srgbClr val="1C3750"/>
+                </a:solidFill>
+                <a:latin typeface="Aptos Display"/>
+              </a:rPr>
+              <a:t>) Wᴮ(</a:t>
+            </a:r>
+            <a:r>
+              <a:rPr sz="2200" b="1" dirty="0" err="1">
+                <a:solidFill>
+                  <a:srgbClr val="1C3750"/>
+                </a:solidFill>
+                <a:latin typeface="Aptos Display"/>
+              </a:rPr>
+              <a:t>χ</a:t>
+            </a:r>
+            <a:r>
+              <a:rPr lang="nl-NL" sz="2200" b="1" dirty="0">
+                <a:solidFill>
+                  <a:srgbClr val="1C3750"/>
+                </a:solidFill>
+                <a:latin typeface="Aptos Display"/>
+              </a:rPr>
+              <a:t>) </a:t>
+            </a:r>
+            <a:r>
+              <a:rPr sz="2200" b="1" dirty="0">
+                <a:solidFill>
+                  <a:srgbClr val="1C3750"/>
+                </a:solidFill>
+                <a:latin typeface="Aptos Display"/>
+              </a:rPr>
+              <a:t>× P((ℓ + 1/2) / </a:t>
+            </a:r>
+            <a:r>
+              <a:rPr sz="2200" b="1" dirty="0" err="1">
+                <a:solidFill>
+                  <a:srgbClr val="1C3750"/>
+                </a:solidFill>
+                <a:latin typeface="Aptos Display"/>
+              </a:rPr>
+              <a:t>χ</a:t>
+            </a:r>
+            <a:r>
+              <a:rPr sz="2200" b="1" dirty="0">
+                <a:solidFill>
+                  <a:srgbClr val="1C3750"/>
+                </a:solidFill>
+                <a:latin typeface="Aptos Display"/>
+              </a:rPr>
+              <a:t>, z)</a:t>
             </a:r>
           </a:p>
         </p:txBody>
@@ -12855,7 +13166,7 @@
           <p:nvPr/>
         </p:nvPicPr>
         <p:blipFill>
-          <a:blip r:embed="rId2"/>
+          <a:blip r:embed="rId3"/>
           <a:stretch>
             <a:fillRect/>
           </a:stretch>
@@ -12887,7 +13198,7 @@
           <a:noFill/>
         </p:spPr>
         <p:txBody>
-          <a:bodyPr wrap="square" lIns="36576" rIns="36576" tIns="36576" bIns="36576" anchor="t">
+          <a:bodyPr wrap="square" lIns="36576" tIns="36576" rIns="36576" bIns="36576" anchor="t">
             <a:spAutoFit/>
           </a:bodyPr>
           <a:lstStyle/>
@@ -12926,7 +13237,7 @@
           <a:noFill/>
         </p:spPr>
         <p:txBody>
-          <a:bodyPr wrap="square" lIns="36576" rIns="36576" tIns="36576" bIns="36576" anchor="t">
+          <a:bodyPr wrap="square" lIns="36576" tIns="36576" rIns="36576" bIns="36576" anchor="t">
             <a:spAutoFit/>
           </a:bodyPr>
           <a:lstStyle/>
@@ -12965,7 +13276,7 @@
           <a:noFill/>
         </p:spPr>
         <p:txBody>
-          <a:bodyPr wrap="square" lIns="36576" rIns="36576" tIns="36576" bIns="36576" anchor="t">
+          <a:bodyPr wrap="square" lIns="36576" tIns="36576" rIns="36576" bIns="36576" anchor="t">
             <a:spAutoFit/>
           </a:bodyPr>
           <a:lstStyle/>
@@ -12996,7 +13307,7 @@
 </file>
 
 <file path=ppt/slides/slide7.xml><?xml version="1.0" encoding="utf-8"?>
-<p:sld xmlns:a="http://schemas.openxmlformats.org/drawingml/2006/main" xmlns:p="http://schemas.openxmlformats.org/presentationml/2006/main" xmlns:r="http://schemas.openxmlformats.org/officeDocument/2006/relationships">
+<p:sld xmlns:a="http://schemas.openxmlformats.org/drawingml/2006/main" xmlns:r="http://schemas.openxmlformats.org/officeDocument/2006/relationships" xmlns:p="http://schemas.openxmlformats.org/presentationml/2006/main">
   <p:cSld>
     <p:bg>
       <p:bgPr>
@@ -13012,7 +13323,14 @@
         <p:cNvGrpSpPr/>
         <p:nvPr/>
       </p:nvGrpSpPr>
-      <p:grpSpPr/>
+      <p:grpSpPr>
+        <a:xfrm>
+          <a:off x="0" y="0"/>
+          <a:ext cx="0" cy="0"/>
+          <a:chOff x="0" y="0"/>
+          <a:chExt cx="0" cy="0"/>
+        </a:xfrm>
+      </p:grpSpPr>
       <p:sp>
         <p:nvSpPr>
           <p:cNvPr id="2" name="Rectangle 1"/>
@@ -13055,6 +13373,7 @@
           <a:lstStyle/>
           <a:p>
             <a:pPr algn="ctr"/>
+            <a:endParaRPr/>
           </a:p>
         </p:txBody>
       </p:sp>
@@ -13075,7 +13394,7 @@
           <a:noFill/>
         </p:spPr>
         <p:txBody>
-          <a:bodyPr wrap="square" lIns="36576" rIns="36576" tIns="36576" bIns="36576" anchor="t">
+          <a:bodyPr wrap="square" lIns="36576" tIns="36576" rIns="36576" bIns="36576" anchor="t">
             <a:spAutoFit/>
           </a:bodyPr>
           <a:lstStyle/>
@@ -13114,7 +13433,7 @@
           <a:noFill/>
         </p:spPr>
         <p:txBody>
-          <a:bodyPr wrap="square" lIns="36576" rIns="36576" tIns="36576" bIns="36576" anchor="t">
+          <a:bodyPr wrap="square" lIns="36576" tIns="36576" rIns="36576" bIns="36576" anchor="t">
             <a:spAutoFit/>
           </a:bodyPr>
           <a:lstStyle/>
@@ -13153,7 +13472,7 @@
           <a:noFill/>
         </p:spPr>
         <p:txBody>
-          <a:bodyPr wrap="square" lIns="36576" rIns="36576" tIns="36576" bIns="36576" anchor="t">
+          <a:bodyPr wrap="square" lIns="36576" tIns="36576" rIns="36576" bIns="36576" anchor="t">
             <a:spAutoFit/>
           </a:bodyPr>
           <a:lstStyle/>
@@ -13217,6 +13536,7 @@
           <a:lstStyle/>
           <a:p>
             <a:pPr algn="ctr"/>
+            <a:endParaRPr/>
           </a:p>
         </p:txBody>
       </p:sp>
@@ -13229,7 +13549,7 @@
           <p:nvPr/>
         </p:nvPicPr>
         <p:blipFill>
-          <a:blip r:embed="rId2"/>
+          <a:blip r:embed="rId3"/>
           <a:stretch>
             <a:fillRect/>
           </a:stretch>
@@ -13288,6 +13608,7 @@
           <a:lstStyle/>
           <a:p>
             <a:pPr algn="ctr"/>
+            <a:endParaRPr/>
           </a:p>
         </p:txBody>
       </p:sp>
@@ -13308,7 +13629,7 @@
           <a:noFill/>
         </p:spPr>
         <p:txBody>
-          <a:bodyPr wrap="square" lIns="36576" rIns="36576" tIns="36576" bIns="36576" anchor="t">
+          <a:bodyPr wrap="square" lIns="36576" tIns="36576" rIns="36576" bIns="36576" anchor="t">
             <a:spAutoFit/>
           </a:bodyPr>
           <a:lstStyle/>
@@ -13347,7 +13668,7 @@
           <a:noFill/>
         </p:spPr>
         <p:txBody>
-          <a:bodyPr wrap="square" lIns="36576" rIns="36576" tIns="36576" bIns="36576" anchor="t">
+          <a:bodyPr wrap="square" lIns="36576" tIns="36576" rIns="36576" bIns="36576" anchor="t">
             <a:spAutoFit/>
           </a:bodyPr>
           <a:lstStyle/>
@@ -13386,7 +13707,7 @@
           <a:noFill/>
         </p:spPr>
         <p:txBody>
-          <a:bodyPr wrap="square" lIns="36576" rIns="36576" tIns="36576" bIns="36576" anchor="t">
+          <a:bodyPr wrap="square" lIns="36576" tIns="36576" rIns="36576" bIns="36576" anchor="t">
             <a:spAutoFit/>
           </a:bodyPr>
           <a:lstStyle/>
@@ -13425,7 +13746,7 @@
           <a:noFill/>
         </p:spPr>
         <p:txBody>
-          <a:bodyPr wrap="square" lIns="36576" rIns="36576" tIns="36576" bIns="36576" anchor="t">
+          <a:bodyPr wrap="square" lIns="36576" tIns="36576" rIns="36576" bIns="36576" anchor="t">
             <a:spAutoFit/>
           </a:bodyPr>
           <a:lstStyle/>
@@ -13465,7 +13786,7 @@
           <a:noFill/>
         </p:spPr>
         <p:txBody>
-          <a:bodyPr wrap="square" lIns="36576" rIns="36576" tIns="36576" bIns="36576" anchor="t">
+          <a:bodyPr wrap="square" lIns="36576" tIns="36576" rIns="36576" bIns="36576" anchor="t">
             <a:spAutoFit/>
           </a:bodyPr>
           <a:lstStyle/>
@@ -13504,7 +13825,7 @@
           <a:noFill/>
         </p:spPr>
         <p:txBody>
-          <a:bodyPr wrap="square" lIns="36576" rIns="36576" tIns="36576" bIns="36576" anchor="t">
+          <a:bodyPr wrap="square" lIns="36576" tIns="36576" rIns="36576" bIns="36576" anchor="t">
             <a:spAutoFit/>
           </a:bodyPr>
           <a:lstStyle/>
@@ -13543,7 +13864,7 @@
           <a:noFill/>
         </p:spPr>
         <p:txBody>
-          <a:bodyPr wrap="square" lIns="36576" rIns="36576" tIns="36576" bIns="36576" anchor="t">
+          <a:bodyPr wrap="square" lIns="36576" tIns="36576" rIns="36576" bIns="36576" anchor="t">
             <a:spAutoFit/>
           </a:bodyPr>
           <a:lstStyle/>
@@ -13574,7 +13895,7 @@
 </file>
 
 <file path=ppt/slides/slide8.xml><?xml version="1.0" encoding="utf-8"?>
-<p:sld xmlns:a="http://schemas.openxmlformats.org/drawingml/2006/main" xmlns:p="http://schemas.openxmlformats.org/presentationml/2006/main" xmlns:r="http://schemas.openxmlformats.org/officeDocument/2006/relationships">
+<p:sld xmlns:a="http://schemas.openxmlformats.org/drawingml/2006/main" xmlns:r="http://schemas.openxmlformats.org/officeDocument/2006/relationships" xmlns:p="http://schemas.openxmlformats.org/presentationml/2006/main">
   <p:cSld>
     <p:bg>
       <p:bgPr>
@@ -13590,7 +13911,14 @@
         <p:cNvGrpSpPr/>
         <p:nvPr/>
       </p:nvGrpSpPr>
-      <p:grpSpPr/>
+      <p:grpSpPr>
+        <a:xfrm>
+          <a:off x="0" y="0"/>
+          <a:ext cx="0" cy="0"/>
+          <a:chOff x="0" y="0"/>
+          <a:chExt cx="0" cy="0"/>
+        </a:xfrm>
+      </p:grpSpPr>
       <p:sp>
         <p:nvSpPr>
           <p:cNvPr id="2" name="Rectangle 1"/>
@@ -13633,6 +13961,7 @@
           <a:lstStyle/>
           <a:p>
             <a:pPr algn="ctr"/>
+            <a:endParaRPr/>
           </a:p>
         </p:txBody>
       </p:sp>
@@ -13653,7 +13982,7 @@
           <a:noFill/>
         </p:spPr>
         <p:txBody>
-          <a:bodyPr wrap="square" lIns="36576" rIns="36576" tIns="36576" bIns="36576" anchor="t">
+          <a:bodyPr wrap="square" lIns="36576" tIns="36576" rIns="36576" bIns="36576" anchor="t">
             <a:spAutoFit/>
           </a:bodyPr>
           <a:lstStyle/>
@@ -13692,7 +14021,7 @@
           <a:noFill/>
         </p:spPr>
         <p:txBody>
-          <a:bodyPr wrap="square" lIns="36576" rIns="36576" tIns="36576" bIns="36576" anchor="t">
+          <a:bodyPr wrap="square" lIns="36576" tIns="36576" rIns="36576" bIns="36576" anchor="t">
             <a:spAutoFit/>
           </a:bodyPr>
           <a:lstStyle/>
@@ -13731,7 +14060,7 @@
           <a:noFill/>
         </p:spPr>
         <p:txBody>
-          <a:bodyPr wrap="square" lIns="36576" rIns="36576" tIns="36576" bIns="36576" anchor="t">
+          <a:bodyPr wrap="square" lIns="36576" tIns="36576" rIns="36576" bIns="36576" anchor="t">
             <a:spAutoFit/>
           </a:bodyPr>
           <a:lstStyle/>
@@ -13795,6 +14124,7 @@
           <a:lstStyle/>
           <a:p>
             <a:pPr algn="ctr"/>
+            <a:endParaRPr/>
           </a:p>
         </p:txBody>
       </p:sp>
@@ -13807,7 +14137,7 @@
           <p:nvPr/>
         </p:nvPicPr>
         <p:blipFill>
-          <a:blip r:embed="rId2"/>
+          <a:blip r:embed="rId3"/>
           <a:stretch>
             <a:fillRect/>
           </a:stretch>
@@ -13866,6 +14196,7 @@
           <a:lstStyle/>
           <a:p>
             <a:pPr algn="ctr"/>
+            <a:endParaRPr/>
           </a:p>
         </p:txBody>
       </p:sp>
@@ -13886,7 +14217,7 @@
           <a:noFill/>
         </p:spPr>
         <p:txBody>
-          <a:bodyPr wrap="square" lIns="36576" rIns="36576" tIns="36576" bIns="36576" anchor="t">
+          <a:bodyPr wrap="square" lIns="36576" tIns="36576" rIns="36576" bIns="36576" anchor="t">
             <a:spAutoFit/>
           </a:bodyPr>
           <a:lstStyle/>
@@ -13925,7 +14256,7 @@
           <a:noFill/>
         </p:spPr>
         <p:txBody>
-          <a:bodyPr wrap="square" lIns="36576" rIns="36576" tIns="36576" bIns="36576" anchor="t">
+          <a:bodyPr wrap="square" lIns="36576" tIns="36576" rIns="36576" bIns="36576" anchor="t">
             <a:spAutoFit/>
           </a:bodyPr>
           <a:lstStyle/>
@@ -13989,6 +14320,7 @@
           <a:lstStyle/>
           <a:p>
             <a:pPr algn="ctr"/>
+            <a:endParaRPr/>
           </a:p>
         </p:txBody>
       </p:sp>
@@ -14009,7 +14341,7 @@
           <a:noFill/>
         </p:spPr>
         <p:txBody>
-          <a:bodyPr wrap="square" lIns="36576" rIns="36576" tIns="36576" bIns="36576" anchor="t">
+          <a:bodyPr wrap="square" lIns="36576" tIns="36576" rIns="36576" bIns="36576" anchor="t">
             <a:spAutoFit/>
           </a:bodyPr>
           <a:lstStyle/>
@@ -14048,7 +14380,7 @@
           <a:noFill/>
         </p:spPr>
         <p:txBody>
-          <a:bodyPr wrap="square" lIns="36576" rIns="36576" tIns="36576" bIns="36576" anchor="t">
+          <a:bodyPr wrap="square" lIns="36576" tIns="36576" rIns="36576" bIns="36576" anchor="t">
             <a:spAutoFit/>
           </a:bodyPr>
           <a:lstStyle/>
@@ -14088,7 +14420,7 @@
           <a:noFill/>
         </p:spPr>
         <p:txBody>
-          <a:bodyPr wrap="square" lIns="36576" rIns="36576" tIns="36576" bIns="36576" anchor="t">
+          <a:bodyPr wrap="square" lIns="36576" tIns="36576" rIns="36576" bIns="36576" anchor="t">
             <a:spAutoFit/>
           </a:bodyPr>
           <a:lstStyle/>
@@ -14127,7 +14459,7 @@
           <a:noFill/>
         </p:spPr>
         <p:txBody>
-          <a:bodyPr wrap="square" lIns="36576" rIns="36576" tIns="36576" bIns="36576" anchor="t">
+          <a:bodyPr wrap="square" lIns="36576" tIns="36576" rIns="36576" bIns="36576" anchor="t">
             <a:spAutoFit/>
           </a:bodyPr>
           <a:lstStyle/>
@@ -14167,7 +14499,7 @@
           <a:noFill/>
         </p:spPr>
         <p:txBody>
-          <a:bodyPr wrap="square" lIns="36576" rIns="36576" tIns="36576" bIns="36576" anchor="t">
+          <a:bodyPr wrap="square" lIns="36576" tIns="36576" rIns="36576" bIns="36576" anchor="t">
             <a:spAutoFit/>
           </a:bodyPr>
           <a:lstStyle/>
@@ -14206,7 +14538,7 @@
           <a:noFill/>
         </p:spPr>
         <p:txBody>
-          <a:bodyPr wrap="square" lIns="36576" rIns="36576" tIns="36576" bIns="36576" anchor="t">
+          <a:bodyPr wrap="square" lIns="36576" tIns="36576" rIns="36576" bIns="36576" anchor="t">
             <a:spAutoFit/>
           </a:bodyPr>
           <a:lstStyle/>
@@ -14237,7 +14569,7 @@
 </file>
 
 <file path=ppt/slides/slide9.xml><?xml version="1.0" encoding="utf-8"?>
-<p:sld xmlns:a="http://schemas.openxmlformats.org/drawingml/2006/main" xmlns:p="http://schemas.openxmlformats.org/presentationml/2006/main" xmlns:r="http://schemas.openxmlformats.org/officeDocument/2006/relationships">
+<p:sld xmlns:a="http://schemas.openxmlformats.org/drawingml/2006/main" xmlns:r="http://schemas.openxmlformats.org/officeDocument/2006/relationships" xmlns:p="http://schemas.openxmlformats.org/presentationml/2006/main">
   <p:cSld>
     <p:bg>
       <p:bgPr>
@@ -14253,7 +14585,14 @@
         <p:cNvGrpSpPr/>
         <p:nvPr/>
       </p:nvGrpSpPr>
-      <p:grpSpPr/>
+      <p:grpSpPr>
+        <a:xfrm>
+          <a:off x="0" y="0"/>
+          <a:ext cx="0" cy="0"/>
+          <a:chOff x="0" y="0"/>
+          <a:chExt cx="0" cy="0"/>
+        </a:xfrm>
+      </p:grpSpPr>
       <p:sp>
         <p:nvSpPr>
           <p:cNvPr id="2" name="Rectangle 1"/>
@@ -14296,6 +14635,7 @@
           <a:lstStyle/>
           <a:p>
             <a:pPr algn="ctr"/>
+            <a:endParaRPr/>
           </a:p>
         </p:txBody>
       </p:sp>
@@ -14316,7 +14656,7 @@
           <a:noFill/>
         </p:spPr>
         <p:txBody>
-          <a:bodyPr wrap="square" lIns="36576" rIns="36576" tIns="36576" bIns="36576" anchor="t">
+          <a:bodyPr wrap="square" lIns="36576" tIns="36576" rIns="36576" bIns="36576" anchor="t">
             <a:spAutoFit/>
           </a:bodyPr>
           <a:lstStyle/>
@@ -14355,7 +14695,7 @@
           <a:noFill/>
         </p:spPr>
         <p:txBody>
-          <a:bodyPr wrap="square" lIns="36576" rIns="36576" tIns="36576" bIns="36576" anchor="t">
+          <a:bodyPr wrap="square" lIns="36576" tIns="36576" rIns="36576" bIns="36576" anchor="t">
             <a:spAutoFit/>
           </a:bodyPr>
           <a:lstStyle/>
@@ -14394,7 +14734,7 @@
           <a:noFill/>
         </p:spPr>
         <p:txBody>
-          <a:bodyPr wrap="square" lIns="36576" rIns="36576" tIns="36576" bIns="36576" anchor="t">
+          <a:bodyPr wrap="square" lIns="36576" tIns="36576" rIns="36576" bIns="36576" anchor="t">
             <a:spAutoFit/>
           </a:bodyPr>
           <a:lstStyle/>
@@ -14458,6 +14798,7 @@
           <a:lstStyle/>
           <a:p>
             <a:pPr algn="ctr"/>
+            <a:endParaRPr/>
           </a:p>
         </p:txBody>
       </p:sp>
@@ -14478,7 +14819,7 @@
           <a:noFill/>
         </p:spPr>
         <p:txBody>
-          <a:bodyPr wrap="square" lIns="27432" rIns="27432" tIns="27432" bIns="27432">
+          <a:bodyPr wrap="square" lIns="27432" tIns="27432" rIns="27432" bIns="27432">
             <a:spAutoFit/>
           </a:bodyPr>
           <a:lstStyle/>
@@ -14604,6 +14945,7 @@
           <a:lstStyle/>
           <a:p>
             <a:pPr algn="ctr"/>
+            <a:endParaRPr/>
           </a:p>
         </p:txBody>
       </p:sp>
@@ -14624,7 +14966,7 @@
           <a:noFill/>
         </p:spPr>
         <p:txBody>
-          <a:bodyPr wrap="square" lIns="36576" rIns="36576" tIns="36576" bIns="36576" anchor="t">
+          <a:bodyPr wrap="square" lIns="36576" tIns="36576" rIns="36576" bIns="36576" anchor="t">
             <a:spAutoFit/>
           </a:bodyPr>
           <a:lstStyle/>
@@ -14635,13 +14977,22 @@
               </a:spcAft>
             </a:pPr>
             <a:r>
-              <a:rPr sz="2300" b="1">
+              <a:rPr sz="2300" b="1" dirty="0" err="1">
                 <a:solidFill>
                   <a:srgbClr val="188985"/>
                 </a:solidFill>
                 <a:latin typeface="Aptos Display"/>
               </a:rPr>
-              <a:t>FoM = 1 / √det(Cov)</a:t>
+              <a:t>FoM</a:t>
+            </a:r>
+            <a:r>
+              <a:rPr sz="2300" b="1" dirty="0">
+                <a:solidFill>
+                  <a:srgbClr val="188985"/>
+                </a:solidFill>
+                <a:latin typeface="Aptos Display"/>
+              </a:rPr>
+              <a:t> = 1 / √det(Cov)</a:t>
             </a:r>
           </a:p>
         </p:txBody>
@@ -14690,6 +15041,7 @@
           <a:lstStyle/>
           <a:p>
             <a:pPr algn="ctr"/>
+            <a:endParaRPr/>
           </a:p>
         </p:txBody>
       </p:sp>
@@ -14735,6 +15087,7 @@
           <a:lstStyle/>
           <a:p>
             <a:pPr algn="ctr"/>
+            <a:endParaRPr/>
           </a:p>
         </p:txBody>
       </p:sp>
@@ -14780,6 +15133,7 @@
           <a:lstStyle/>
           <a:p>
             <a:pPr algn="ctr"/>
+            <a:endParaRPr/>
           </a:p>
         </p:txBody>
       </p:sp>
@@ -14823,6 +15177,7 @@
           <a:lstStyle/>
           <a:p>
             <a:pPr algn="ctr"/>
+            <a:endParaRPr/>
           </a:p>
         </p:txBody>
       </p:sp>
@@ -14866,6 +15221,7 @@
           <a:lstStyle/>
           <a:p>
             <a:pPr algn="ctr"/>
+            <a:endParaRPr/>
           </a:p>
         </p:txBody>
       </p:sp>
@@ -14886,7 +15242,7 @@
           <a:noFill/>
         </p:spPr>
         <p:txBody>
-          <a:bodyPr wrap="square" lIns="36576" rIns="36576" tIns="36576" bIns="36576" anchor="t">
+          <a:bodyPr wrap="square" lIns="36576" tIns="36576" rIns="36576" bIns="36576" anchor="t">
             <a:spAutoFit/>
           </a:bodyPr>
           <a:lstStyle/>
@@ -14925,7 +15281,7 @@
           <a:noFill/>
         </p:spPr>
         <p:txBody>
-          <a:bodyPr wrap="square" lIns="36576" rIns="36576" tIns="36576" bIns="36576" anchor="t">
+          <a:bodyPr wrap="square" lIns="36576" tIns="36576" rIns="36576" bIns="36576" anchor="t">
             <a:spAutoFit/>
           </a:bodyPr>
           <a:lstStyle/>
@@ -14964,7 +15320,7 @@
           <a:noFill/>
         </p:spPr>
         <p:txBody>
-          <a:bodyPr wrap="square" lIns="36576" rIns="36576" tIns="36576" bIns="36576" anchor="t">
+          <a:bodyPr wrap="square" lIns="36576" tIns="36576" rIns="36576" bIns="36576" anchor="t">
             <a:spAutoFit/>
           </a:bodyPr>
           <a:lstStyle/>
@@ -15003,7 +15359,7 @@
           <a:noFill/>
         </p:spPr>
         <p:txBody>
-          <a:bodyPr wrap="square" lIns="36576" rIns="36576" tIns="36576" bIns="36576" anchor="t">
+          <a:bodyPr wrap="square" lIns="36576" tIns="36576" rIns="36576" bIns="36576" anchor="t">
             <a:spAutoFit/>
           </a:bodyPr>
           <a:lstStyle/>
@@ -15042,7 +15398,7 @@
           <a:noFill/>
         </p:spPr>
         <p:txBody>
-          <a:bodyPr wrap="square" lIns="36576" rIns="36576" tIns="36576" bIns="36576" anchor="t">
+          <a:bodyPr wrap="square" lIns="36576" tIns="36576" rIns="36576" bIns="36576" anchor="t">
             <a:spAutoFit/>
           </a:bodyPr>
           <a:lstStyle/>
@@ -15083,44 +15439,44 @@
         <a:sysClr val="window" lastClr="FFFFFF"/>
       </a:lt1>
       <a:dk2>
-        <a:srgbClr val="1F497D"/>
+        <a:srgbClr val="0E2841"/>
       </a:dk2>
       <a:lt2>
-        <a:srgbClr val="EEECE1"/>
+        <a:srgbClr val="E8E8E8"/>
       </a:lt2>
       <a:accent1>
-        <a:srgbClr val="4F81BD"/>
+        <a:srgbClr val="156082"/>
       </a:accent1>
       <a:accent2>
-        <a:srgbClr val="C0504D"/>
+        <a:srgbClr val="E97132"/>
       </a:accent2>
       <a:accent3>
-        <a:srgbClr val="9BBB59"/>
+        <a:srgbClr val="196B24"/>
       </a:accent3>
       <a:accent4>
-        <a:srgbClr val="8064A2"/>
+        <a:srgbClr val="0F9ED5"/>
       </a:accent4>
       <a:accent5>
-        <a:srgbClr val="4BACC6"/>
+        <a:srgbClr val="A02B93"/>
       </a:accent5>
       <a:accent6>
-        <a:srgbClr val="F79646"/>
+        <a:srgbClr val="4EA72E"/>
       </a:accent6>
       <a:hlink>
-        <a:srgbClr val="0000FF"/>
+        <a:srgbClr val="467886"/>
       </a:hlink>
       <a:folHlink>
-        <a:srgbClr val="800080"/>
+        <a:srgbClr val="96607D"/>
       </a:folHlink>
     </a:clrScheme>
     <a:fontScheme name="Office">
       <a:majorFont>
-        <a:latin typeface="Calibri"/>
+        <a:latin typeface="Aptos Display" panose="02110004020202020204"/>
         <a:ea typeface=""/>
         <a:cs typeface=""/>
-        <a:font script="Jpan" typeface="ＭＳ Ｐゴシック"/>
+        <a:font script="Jpan" typeface="游ゴシック Light"/>
         <a:font script="Hang" typeface="맑은 고딕"/>
-        <a:font script="Hans" typeface="宋体"/>
+        <a:font script="Hans" typeface="等线 Light"/>
         <a:font script="Hant" typeface="新細明體"/>
         <a:font script="Arab" typeface="Times New Roman"/>
         <a:font script="Hebr" typeface="Times New Roman"/>
@@ -15148,14 +15504,31 @@
         <a:font script="Viet" typeface="Times New Roman"/>
         <a:font script="Uigh" typeface="Microsoft Uighur"/>
         <a:font script="Geor" typeface="Sylfaen"/>
+        <a:font script="Armn" typeface="Arial"/>
+        <a:font script="Bugi" typeface="Leelawadee UI"/>
+        <a:font script="Bopo" typeface="Microsoft JhengHei"/>
+        <a:font script="Java" typeface="Javanese Text"/>
+        <a:font script="Lisu" typeface="Segoe UI"/>
+        <a:font script="Mymr" typeface="Myanmar Text"/>
+        <a:font script="Nkoo" typeface="Ebrima"/>
+        <a:font script="Olck" typeface="Nirmala UI"/>
+        <a:font script="Osma" typeface="Ebrima"/>
+        <a:font script="Phag" typeface="Phagspa"/>
+        <a:font script="Syrn" typeface="Estrangelo Edessa"/>
+        <a:font script="Syrj" typeface="Estrangelo Edessa"/>
+        <a:font script="Syre" typeface="Estrangelo Edessa"/>
+        <a:font script="Sora" typeface="Nirmala UI"/>
+        <a:font script="Tale" typeface="Microsoft Tai Le"/>
+        <a:font script="Talu" typeface="Microsoft New Tai Lue"/>
+        <a:font script="Tfng" typeface="Ebrima"/>
       </a:majorFont>
       <a:minorFont>
-        <a:latin typeface="Calibri"/>
+        <a:latin typeface="Aptos" panose="02110004020202020204"/>
         <a:ea typeface=""/>
         <a:cs typeface=""/>
-        <a:font script="Jpan" typeface="ＭＳ Ｐゴシック"/>
+        <a:font script="Jpan" typeface="游ゴシック"/>
         <a:font script="Hang" typeface="맑은 고딕"/>
-        <a:font script="Hans" typeface="宋体"/>
+        <a:font script="Hans" typeface="等线"/>
         <a:font script="Hant" typeface="新細明體"/>
         <a:font script="Arab" typeface="Arial"/>
         <a:font script="Hebr" typeface="Arial"/>
@@ -15183,6 +15556,23 @@
         <a:font script="Viet" typeface="Arial"/>
         <a:font script="Uigh" typeface="Microsoft Uighur"/>
         <a:font script="Geor" typeface="Sylfaen"/>
+        <a:font script="Armn" typeface="Arial"/>
+        <a:font script="Bugi" typeface="Leelawadee UI"/>
+        <a:font script="Bopo" typeface="Microsoft JhengHei"/>
+        <a:font script="Java" typeface="Javanese Text"/>
+        <a:font script="Lisu" typeface="Segoe UI"/>
+        <a:font script="Mymr" typeface="Myanmar Text"/>
+        <a:font script="Nkoo" typeface="Ebrima"/>
+        <a:font script="Olck" typeface="Nirmala UI"/>
+        <a:font script="Osma" typeface="Ebrima"/>
+        <a:font script="Phag" typeface="Phagspa"/>
+        <a:font script="Syrn" typeface="Estrangelo Edessa"/>
+        <a:font script="Syrj" typeface="Estrangelo Edessa"/>
+        <a:font script="Syre" typeface="Estrangelo Edessa"/>
+        <a:font script="Sora" typeface="Nirmala UI"/>
+        <a:font script="Tale" typeface="Microsoft Tai Le"/>
+        <a:font script="Talu" typeface="Microsoft New Tai Lue"/>
+        <a:font script="Tfng" typeface="Ebrima"/>
       </a:minorFont>
     </a:fontScheme>
     <a:fmtScheme name="Office">
@@ -15194,180 +15584,136 @@
           <a:gsLst>
             <a:gs pos="0">
               <a:schemeClr val="phClr">
-                <a:tint val="50000"/>
-                <a:satMod val="300000"/>
+                <a:lumMod val="110000"/>
+                <a:satMod val="105000"/>
+                <a:tint val="67000"/>
               </a:schemeClr>
             </a:gs>
-            <a:gs pos="35000">
+            <a:gs pos="50000">
               <a:schemeClr val="phClr">
-                <a:tint val="37000"/>
-                <a:satMod val="300000"/>
+                <a:lumMod val="105000"/>
+                <a:satMod val="103000"/>
+                <a:tint val="73000"/>
               </a:schemeClr>
             </a:gs>
             <a:gs pos="100000">
               <a:schemeClr val="phClr">
-                <a:tint val="15000"/>
-                <a:satMod val="350000"/>
+                <a:lumMod val="105000"/>
+                <a:satMod val="109000"/>
+                <a:tint val="81000"/>
               </a:schemeClr>
             </a:gs>
           </a:gsLst>
-          <a:lin ang="16200000" scaled="1"/>
+          <a:lin ang="5400000" scaled="0"/>
         </a:gradFill>
         <a:gradFill rotWithShape="1">
           <a:gsLst>
             <a:gs pos="0">
               <a:schemeClr val="phClr">
-                <a:tint val="100000"/>
+                <a:satMod val="103000"/>
+                <a:lumMod val="102000"/>
+                <a:tint val="94000"/>
+              </a:schemeClr>
+            </a:gs>
+            <a:gs pos="50000">
+              <a:schemeClr val="phClr">
+                <a:satMod val="110000"/>
+                <a:lumMod val="100000"/>
                 <a:shade val="100000"/>
-                <a:satMod val="130000"/>
               </a:schemeClr>
             </a:gs>
             <a:gs pos="100000">
               <a:schemeClr val="phClr">
-                <a:tint val="50000"/>
-                <a:shade val="100000"/>
-                <a:satMod val="350000"/>
+                <a:lumMod val="99000"/>
+                <a:satMod val="120000"/>
+                <a:shade val="78000"/>
               </a:schemeClr>
             </a:gs>
           </a:gsLst>
-          <a:lin ang="16200000" scaled="0"/>
+          <a:lin ang="5400000" scaled="0"/>
         </a:gradFill>
       </a:fillStyleLst>
       <a:lnStyleLst>
-        <a:ln w="9525" cap="flat" cmpd="sng" algn="ctr">
+        <a:ln w="12700" cap="flat" cmpd="sng" algn="ctr">
           <a:solidFill>
-            <a:schemeClr val="phClr">
-              <a:shade val="95000"/>
-              <a:satMod val="105000"/>
-            </a:schemeClr>
+            <a:schemeClr val="phClr"/>
           </a:solidFill>
           <a:prstDash val="solid"/>
+          <a:miter lim="800000"/>
+        </a:ln>
+        <a:ln w="19050" cap="flat" cmpd="sng" algn="ctr">
+          <a:solidFill>
+            <a:schemeClr val="phClr"/>
+          </a:solidFill>
+          <a:prstDash val="solid"/>
+          <a:miter lim="800000"/>
         </a:ln>
         <a:ln w="25400" cap="flat" cmpd="sng" algn="ctr">
           <a:solidFill>
             <a:schemeClr val="phClr"/>
           </a:solidFill>
           <a:prstDash val="solid"/>
-        </a:ln>
-        <a:ln w="38100" cap="flat" cmpd="sng" algn="ctr">
-          <a:solidFill>
-            <a:schemeClr val="phClr"/>
-          </a:solidFill>
-          <a:prstDash val="solid"/>
+          <a:miter lim="800000"/>
         </a:ln>
       </a:lnStyleLst>
       <a:effectStyleLst>
         <a:effectStyle>
+          <a:effectLst/>
+        </a:effectStyle>
+        <a:effectStyle>
+          <a:effectLst/>
+        </a:effectStyle>
+        <a:effectStyle>
           <a:effectLst>
-            <a:outerShdw blurRad="40000" dist="20000" dir="5400000" rotWithShape="0">
+            <a:outerShdw blurRad="57150" dist="19050" dir="5400000" algn="ctr" rotWithShape="0">
               <a:srgbClr val="000000">
-                <a:alpha val="38000"/>
+                <a:alpha val="63000"/>
               </a:srgbClr>
             </a:outerShdw>
           </a:effectLst>
-        </a:effectStyle>
-        <a:effectStyle>
-          <a:effectLst>
-            <a:outerShdw blurRad="40000" dist="23000" dir="5400000" rotWithShape="0">
-              <a:srgbClr val="000000">
-                <a:alpha val="35000"/>
-              </a:srgbClr>
-            </a:outerShdw>
-          </a:effectLst>
-        </a:effectStyle>
-        <a:effectStyle>
-          <a:effectLst>
-            <a:outerShdw blurRad="40000" dist="23000" dir="5400000" rotWithShape="0">
-              <a:srgbClr val="000000">
-                <a:alpha val="35000"/>
-              </a:srgbClr>
-            </a:outerShdw>
-          </a:effectLst>
-          <a:scene3d>
-            <a:camera prst="orthographicFront">
-              <a:rot lat="0" lon="0" rev="0"/>
-            </a:camera>
-            <a:lightRig rig="threePt" dir="t">
-              <a:rot lat="0" lon="0" rev="1200000"/>
-            </a:lightRig>
-          </a:scene3d>
-          <a:sp3d>
-            <a:bevelT w="63500" h="25400"/>
-          </a:sp3d>
         </a:effectStyle>
       </a:effectStyleLst>
       <a:bgFillStyleLst>
         <a:solidFill>
           <a:schemeClr val="phClr"/>
         </a:solidFill>
+        <a:solidFill>
+          <a:schemeClr val="phClr">
+            <a:tint val="95000"/>
+            <a:satMod val="170000"/>
+          </a:schemeClr>
+        </a:solidFill>
         <a:gradFill rotWithShape="1">
           <a:gsLst>
             <a:gs pos="0">
               <a:schemeClr val="phClr">
-                <a:tint val="40000"/>
-                <a:satMod val="350000"/>
+                <a:tint val="93000"/>
+                <a:satMod val="150000"/>
+                <a:shade val="98000"/>
+                <a:lumMod val="102000"/>
               </a:schemeClr>
             </a:gs>
-            <a:gs pos="40000">
+            <a:gs pos="50000">
               <a:schemeClr val="phClr">
-                <a:tint val="45000"/>
-                <a:shade val="99000"/>
-                <a:satMod val="350000"/>
+                <a:tint val="98000"/>
+                <a:satMod val="130000"/>
+                <a:shade val="90000"/>
+                <a:lumMod val="103000"/>
               </a:schemeClr>
             </a:gs>
             <a:gs pos="100000">
               <a:schemeClr val="phClr">
-                <a:shade val="20000"/>
-                <a:satMod val="255000"/>
+                <a:shade val="63000"/>
+                <a:satMod val="120000"/>
               </a:schemeClr>
             </a:gs>
           </a:gsLst>
-          <a:path path="circle">
-            <a:fillToRect l="50000" t="-80000" r="50000" b="180000"/>
-          </a:path>
-        </a:gradFill>
-        <a:gradFill rotWithShape="1">
-          <a:gsLst>
-            <a:gs pos="0">
-              <a:schemeClr val="phClr">
-                <a:tint val="80000"/>
-                <a:satMod val="300000"/>
-              </a:schemeClr>
-            </a:gs>
-            <a:gs pos="100000">
-              <a:schemeClr val="phClr">
-                <a:shade val="30000"/>
-                <a:satMod val="200000"/>
-              </a:schemeClr>
-            </a:gs>
-          </a:gsLst>
-          <a:path path="circle">
-            <a:fillToRect l="50000" t="50000" r="50000" b="50000"/>
-          </a:path>
+          <a:lin ang="5400000" scaled="0"/>
         </a:gradFill>
       </a:bgFillStyleLst>
     </a:fmtScheme>
   </a:themeElements>
   <a:objectDefaults>
-    <a:spDef>
-      <a:spPr/>
-      <a:bodyPr/>
-      <a:lstStyle/>
-      <a:style>
-        <a:lnRef idx="1">
-          <a:schemeClr val="accent1"/>
-        </a:lnRef>
-        <a:fillRef idx="3">
-          <a:schemeClr val="accent1"/>
-        </a:fillRef>
-        <a:effectRef idx="2">
-          <a:schemeClr val="accent1"/>
-        </a:effectRef>
-        <a:fontRef idx="minor">
-          <a:schemeClr val="lt1"/>
-        </a:fontRef>
-      </a:style>
-    </a:spDef>
     <a:lnDef>
       <a:spPr/>
       <a:bodyPr/>
@@ -15389,6 +15735,11 @@
     </a:lnDef>
   </a:objectDefaults>
   <a:extraClrSchemeLst/>
+  <a:extLst>
+    <a:ext uri="{05A4C25C-085E-4340-85A3-A5531E510DB2}">
+      <thm15:themeFamily xmlns:thm15="http://schemas.microsoft.com/office/thememl/2012/main" name="Office Theme" id="{2E142A2C-CD16-42D6-873A-C26D2A0506FA}" vid="{1BDDFF52-6CD6-40A5-AB3C-68EB2F1E4D0A}"/>
+    </a:ext>
+  </a:extLst>
 </a:theme>
 </file>
 
@@ -15403,44 +15754,44 @@
         <a:sysClr val="window" lastClr="FFFFFF"/>
       </a:lt1>
       <a:dk2>
-        <a:srgbClr val="1F497D"/>
+        <a:srgbClr val="0E2841"/>
       </a:dk2>
       <a:lt2>
-        <a:srgbClr val="EEECE1"/>
+        <a:srgbClr val="E8E8E8"/>
       </a:lt2>
       <a:accent1>
-        <a:srgbClr val="4F81BD"/>
+        <a:srgbClr val="156082"/>
       </a:accent1>
       <a:accent2>
-        <a:srgbClr val="C0504D"/>
+        <a:srgbClr val="E97132"/>
       </a:accent2>
       <a:accent3>
-        <a:srgbClr val="9BBB59"/>
+        <a:srgbClr val="196B24"/>
       </a:accent3>
       <a:accent4>
-        <a:srgbClr val="8064A2"/>
+        <a:srgbClr val="0F9ED5"/>
       </a:accent4>
       <a:accent5>
-        <a:srgbClr val="4BACC6"/>
+        <a:srgbClr val="A02B93"/>
       </a:accent5>
       <a:accent6>
-        <a:srgbClr val="F79646"/>
+        <a:srgbClr val="4EA72E"/>
       </a:accent6>
       <a:hlink>
-        <a:srgbClr val="0000FF"/>
+        <a:srgbClr val="467886"/>
       </a:hlink>
       <a:folHlink>
-        <a:srgbClr val="800080"/>
+        <a:srgbClr val="96607D"/>
       </a:folHlink>
     </a:clrScheme>
     <a:fontScheme name="Office">
       <a:majorFont>
-        <a:latin typeface="Calibri"/>
+        <a:latin typeface="Aptos Display" panose="02110004020202020204"/>
         <a:ea typeface=""/>
         <a:cs typeface=""/>
-        <a:font script="Jpan" typeface="ＭＳ Ｐゴシック"/>
+        <a:font script="Jpan" typeface="游ゴシック Light"/>
         <a:font script="Hang" typeface="맑은 고딕"/>
-        <a:font script="Hans" typeface="宋体"/>
+        <a:font script="Hans" typeface="等线 Light"/>
         <a:font script="Hant" typeface="新細明體"/>
         <a:font script="Arab" typeface="Times New Roman"/>
         <a:font script="Hebr" typeface="Times New Roman"/>
@@ -15468,14 +15819,31 @@
         <a:font script="Viet" typeface="Times New Roman"/>
         <a:font script="Uigh" typeface="Microsoft Uighur"/>
         <a:font script="Geor" typeface="Sylfaen"/>
+        <a:font script="Armn" typeface="Arial"/>
+        <a:font script="Bugi" typeface="Leelawadee UI"/>
+        <a:font script="Bopo" typeface="Microsoft JhengHei"/>
+        <a:font script="Java" typeface="Javanese Text"/>
+        <a:font script="Lisu" typeface="Segoe UI"/>
+        <a:font script="Mymr" typeface="Myanmar Text"/>
+        <a:font script="Nkoo" typeface="Ebrima"/>
+        <a:font script="Olck" typeface="Nirmala UI"/>
+        <a:font script="Osma" typeface="Ebrima"/>
+        <a:font script="Phag" typeface="Phagspa"/>
+        <a:font script="Syrn" typeface="Estrangelo Edessa"/>
+        <a:font script="Syrj" typeface="Estrangelo Edessa"/>
+        <a:font script="Syre" typeface="Estrangelo Edessa"/>
+        <a:font script="Sora" typeface="Nirmala UI"/>
+        <a:font script="Tale" typeface="Microsoft Tai Le"/>
+        <a:font script="Talu" typeface="Microsoft New Tai Lue"/>
+        <a:font script="Tfng" typeface="Ebrima"/>
       </a:majorFont>
       <a:minorFont>
-        <a:latin typeface="Calibri"/>
+        <a:latin typeface="Aptos" panose="02110004020202020204"/>
         <a:ea typeface=""/>
         <a:cs typeface=""/>
-        <a:font script="Jpan" typeface="ＭＳ Ｐゴシック"/>
+        <a:font script="Jpan" typeface="游ゴシック"/>
         <a:font script="Hang" typeface="맑은 고딕"/>
-        <a:font script="Hans" typeface="宋体"/>
+        <a:font script="Hans" typeface="等线"/>
         <a:font script="Hant" typeface="新細明體"/>
         <a:font script="Arab" typeface="Arial"/>
         <a:font script="Hebr" typeface="Arial"/>
@@ -15503,6 +15871,23 @@
         <a:font script="Viet" typeface="Arial"/>
         <a:font script="Uigh" typeface="Microsoft Uighur"/>
         <a:font script="Geor" typeface="Sylfaen"/>
+        <a:font script="Armn" typeface="Arial"/>
+        <a:font script="Bugi" typeface="Leelawadee UI"/>
+        <a:font script="Bopo" typeface="Microsoft JhengHei"/>
+        <a:font script="Java" typeface="Javanese Text"/>
+        <a:font script="Lisu" typeface="Segoe UI"/>
+        <a:font script="Mymr" typeface="Myanmar Text"/>
+        <a:font script="Nkoo" typeface="Ebrima"/>
+        <a:font script="Olck" typeface="Nirmala UI"/>
+        <a:font script="Osma" typeface="Ebrima"/>
+        <a:font script="Phag" typeface="Phagspa"/>
+        <a:font script="Syrn" typeface="Estrangelo Edessa"/>
+        <a:font script="Syrj" typeface="Estrangelo Edessa"/>
+        <a:font script="Syre" typeface="Estrangelo Edessa"/>
+        <a:font script="Sora" typeface="Nirmala UI"/>
+        <a:font script="Tale" typeface="Microsoft Tai Le"/>
+        <a:font script="Talu" typeface="Microsoft New Tai Lue"/>
+        <a:font script="Tfng" typeface="Ebrima"/>
       </a:minorFont>
     </a:fontScheme>
     <a:fmtScheme name="Office">
@@ -15514,180 +15899,136 @@
           <a:gsLst>
             <a:gs pos="0">
               <a:schemeClr val="phClr">
-                <a:tint val="50000"/>
-                <a:satMod val="300000"/>
+                <a:lumMod val="110000"/>
+                <a:satMod val="105000"/>
+                <a:tint val="67000"/>
               </a:schemeClr>
             </a:gs>
-            <a:gs pos="35000">
+            <a:gs pos="50000">
               <a:schemeClr val="phClr">
-                <a:tint val="37000"/>
-                <a:satMod val="300000"/>
+                <a:lumMod val="105000"/>
+                <a:satMod val="103000"/>
+                <a:tint val="73000"/>
               </a:schemeClr>
             </a:gs>
             <a:gs pos="100000">
               <a:schemeClr val="phClr">
-                <a:tint val="15000"/>
-                <a:satMod val="350000"/>
+                <a:lumMod val="105000"/>
+                <a:satMod val="109000"/>
+                <a:tint val="81000"/>
               </a:schemeClr>
             </a:gs>
           </a:gsLst>
-          <a:lin ang="16200000" scaled="1"/>
+          <a:lin ang="5400000" scaled="0"/>
         </a:gradFill>
         <a:gradFill rotWithShape="1">
           <a:gsLst>
             <a:gs pos="0">
               <a:schemeClr val="phClr">
-                <a:tint val="100000"/>
+                <a:satMod val="103000"/>
+                <a:lumMod val="102000"/>
+                <a:tint val="94000"/>
+              </a:schemeClr>
+            </a:gs>
+            <a:gs pos="50000">
+              <a:schemeClr val="phClr">
+                <a:satMod val="110000"/>
+                <a:lumMod val="100000"/>
                 <a:shade val="100000"/>
-                <a:satMod val="130000"/>
               </a:schemeClr>
             </a:gs>
             <a:gs pos="100000">
               <a:schemeClr val="phClr">
-                <a:tint val="50000"/>
-                <a:shade val="100000"/>
-                <a:satMod val="350000"/>
+                <a:lumMod val="99000"/>
+                <a:satMod val="120000"/>
+                <a:shade val="78000"/>
               </a:schemeClr>
             </a:gs>
           </a:gsLst>
-          <a:lin ang="16200000" scaled="0"/>
+          <a:lin ang="5400000" scaled="0"/>
         </a:gradFill>
       </a:fillStyleLst>
       <a:lnStyleLst>
-        <a:ln w="9525" cap="flat" cmpd="sng" algn="ctr">
+        <a:ln w="12700" cap="flat" cmpd="sng" algn="ctr">
           <a:solidFill>
-            <a:schemeClr val="phClr">
-              <a:shade val="95000"/>
-              <a:satMod val="105000"/>
-            </a:schemeClr>
+            <a:schemeClr val="phClr"/>
           </a:solidFill>
           <a:prstDash val="solid"/>
+          <a:miter lim="800000"/>
+        </a:ln>
+        <a:ln w="19050" cap="flat" cmpd="sng" algn="ctr">
+          <a:solidFill>
+            <a:schemeClr val="phClr"/>
+          </a:solidFill>
+          <a:prstDash val="solid"/>
+          <a:miter lim="800000"/>
         </a:ln>
         <a:ln w="25400" cap="flat" cmpd="sng" algn="ctr">
           <a:solidFill>
             <a:schemeClr val="phClr"/>
           </a:solidFill>
           <a:prstDash val="solid"/>
-        </a:ln>
-        <a:ln w="38100" cap="flat" cmpd="sng" algn="ctr">
-          <a:solidFill>
-            <a:schemeClr val="phClr"/>
-          </a:solidFill>
-          <a:prstDash val="solid"/>
+          <a:miter lim="800000"/>
         </a:ln>
       </a:lnStyleLst>
       <a:effectStyleLst>
         <a:effectStyle>
+          <a:effectLst/>
+        </a:effectStyle>
+        <a:effectStyle>
+          <a:effectLst/>
+        </a:effectStyle>
+        <a:effectStyle>
           <a:effectLst>
-            <a:outerShdw blurRad="40000" dist="20000" dir="5400000" rotWithShape="0">
+            <a:outerShdw blurRad="57150" dist="19050" dir="5400000" algn="ctr" rotWithShape="0">
               <a:srgbClr val="000000">
-                <a:alpha val="38000"/>
+                <a:alpha val="63000"/>
               </a:srgbClr>
             </a:outerShdw>
           </a:effectLst>
-        </a:effectStyle>
-        <a:effectStyle>
-          <a:effectLst>
-            <a:outerShdw blurRad="40000" dist="23000" dir="5400000" rotWithShape="0">
-              <a:srgbClr val="000000">
-                <a:alpha val="35000"/>
-              </a:srgbClr>
-            </a:outerShdw>
-          </a:effectLst>
-        </a:effectStyle>
-        <a:effectStyle>
-          <a:effectLst>
-            <a:outerShdw blurRad="40000" dist="23000" dir="5400000" rotWithShape="0">
-              <a:srgbClr val="000000">
-                <a:alpha val="35000"/>
-              </a:srgbClr>
-            </a:outerShdw>
-          </a:effectLst>
-          <a:scene3d>
-            <a:camera prst="orthographicFront">
-              <a:rot lat="0" lon="0" rev="0"/>
-            </a:camera>
-            <a:lightRig rig="threePt" dir="t">
-              <a:rot lat="0" lon="0" rev="1200000"/>
-            </a:lightRig>
-          </a:scene3d>
-          <a:sp3d>
-            <a:bevelT w="63500" h="25400"/>
-          </a:sp3d>
         </a:effectStyle>
       </a:effectStyleLst>
       <a:bgFillStyleLst>
         <a:solidFill>
           <a:schemeClr val="phClr"/>
         </a:solidFill>
+        <a:solidFill>
+          <a:schemeClr val="phClr">
+            <a:tint val="95000"/>
+            <a:satMod val="170000"/>
+          </a:schemeClr>
+        </a:solidFill>
         <a:gradFill rotWithShape="1">
           <a:gsLst>
             <a:gs pos="0">
               <a:schemeClr val="phClr">
-                <a:tint val="40000"/>
-                <a:satMod val="350000"/>
+                <a:tint val="93000"/>
+                <a:satMod val="150000"/>
+                <a:shade val="98000"/>
+                <a:lumMod val="102000"/>
               </a:schemeClr>
             </a:gs>
-            <a:gs pos="40000">
+            <a:gs pos="50000">
               <a:schemeClr val="phClr">
-                <a:tint val="45000"/>
-                <a:shade val="99000"/>
-                <a:satMod val="350000"/>
+                <a:tint val="98000"/>
+                <a:satMod val="130000"/>
+                <a:shade val="90000"/>
+                <a:lumMod val="103000"/>
               </a:schemeClr>
             </a:gs>
             <a:gs pos="100000">
               <a:schemeClr val="phClr">
-                <a:shade val="20000"/>
-                <a:satMod val="255000"/>
+                <a:shade val="63000"/>
+                <a:satMod val="120000"/>
               </a:schemeClr>
             </a:gs>
           </a:gsLst>
-          <a:path path="circle">
-            <a:fillToRect l="50000" t="-80000" r="50000" b="180000"/>
-          </a:path>
-        </a:gradFill>
-        <a:gradFill rotWithShape="1">
-          <a:gsLst>
-            <a:gs pos="0">
-              <a:schemeClr val="phClr">
-                <a:tint val="80000"/>
-                <a:satMod val="300000"/>
-              </a:schemeClr>
-            </a:gs>
-            <a:gs pos="100000">
-              <a:schemeClr val="phClr">
-                <a:shade val="30000"/>
-                <a:satMod val="200000"/>
-              </a:schemeClr>
-            </a:gs>
-          </a:gsLst>
-          <a:path path="circle">
-            <a:fillToRect l="50000" t="50000" r="50000" b="50000"/>
-          </a:path>
+          <a:lin ang="5400000" scaled="0"/>
         </a:gradFill>
       </a:bgFillStyleLst>
     </a:fmtScheme>
   </a:themeElements>
   <a:objectDefaults>
-    <a:spDef>
-      <a:spPr/>
-      <a:bodyPr/>
-      <a:lstStyle/>
-      <a:style>
-        <a:lnRef idx="1">
-          <a:schemeClr val="accent1"/>
-        </a:lnRef>
-        <a:fillRef idx="3">
-          <a:schemeClr val="accent1"/>
-        </a:fillRef>
-        <a:effectRef idx="2">
-          <a:schemeClr val="accent1"/>
-        </a:effectRef>
-        <a:fontRef idx="minor">
-          <a:schemeClr val="lt1"/>
-        </a:fontRef>
-      </a:style>
-    </a:spDef>
     <a:lnDef>
       <a:spPr/>
       <a:bodyPr/>
@@ -15709,5 +16050,10 @@
     </a:lnDef>
   </a:objectDefaults>
   <a:extraClrSchemeLst/>
+  <a:extLst>
+    <a:ext uri="{05A4C25C-085E-4340-85A3-A5531E510DB2}">
+      <thm15:themeFamily xmlns:thm15="http://schemas.microsoft.com/office/thememl/2012/main" name="Office Theme" id="{2E142A2C-CD16-42D6-873A-C26D2A0506FA}" vid="{1BDDFF52-6CD6-40A5-AB3C-68EB2F1E4D0A}"/>
+    </a:ext>
+  </a:extLst>
 </a:theme>
 </file>